--- a/docs/Concrete Crack Detection - Presentation (EN).pptx
+++ b/docs/Concrete Crack Detection - Presentation (EN).pptx
@@ -4,6 +4,9 @@
   <p:sldMasterIdLst>
     <p:sldMasterId id="2147483648" r:id="rId1"/>
   </p:sldMasterIdLst>
+  <p:notesMasterIdLst>
+    <p:notesMasterId r:id="rId14"/>
+  </p:notesMasterIdLst>
   <p:sldIdLst>
     <p:sldId id="256" r:id="rId2"/>
     <p:sldId id="257" r:id="rId3"/>
@@ -18,9 +21,6 @@
     <p:sldId id="266" r:id="rId12"/>
     <p:sldId id="267" r:id="rId13"/>
   </p:sldIdLst>
-  <p:notesMasterIdLst>
-    <p:notesMasterId r:id="rId14"/>
-  </p:notesMasterIdLst>
   <p:sldSz cx="12192000" cy="6858000"/>
   <p:notesSz cx="6858000" cy="12192000"/>
   <p:defaultTextStyle>
@@ -115,6 +115,11 @@
       </a:defRPr>
     </a:lvl9pPr>
   </p:defaultTextStyle>
+  <p:extLst>
+    <p:ext uri="{EFAFB233-063F-42B5-8137-9DF3F51BA10A}">
+      <p15:sldGuideLst xmlns:p15="http://schemas.microsoft.com/office/powerpoint/2012/main"/>
+    </p:ext>
+  </p:extLst>
 </p:presentation>
 </file>
 
@@ -140,234 +145,10 @@
           <a:chExt cx="0" cy="0"/>
         </a:xfrm>
       </p:grpSpPr>
-      <p:sp>
-        <p:nvSpPr>
-          <p:cNvPr id="2" name="Header Placeholder 1"/>
-          <p:cNvSpPr>
-            <a:spLocks noGrp="1"/>
-          </p:cNvSpPr>
-          <p:nvPr>
-            <p:ph type="hdr" sz="quarter"/>
-          </p:nvPr>
-        </p:nvSpPr>
-        <p:spPr>
-          <a:xfrm>
-            <a:off x="0" y="0"/>
-            <a:ext cx="2971800" cy="458788"/>
-          </a:xfrm>
-          <a:prstGeom prst="rect">
-            <a:avLst/>
-          </a:prstGeom>
-        </p:spPr>
-        <p:txBody>
-          <a:bodyPr vert="horz" lIns="91440" tIns="45720" rIns="91440" bIns="45720" rtlCol="0"/>
-          <a:lstStyle>
-            <a:lvl1pPr algn="l">
-              <a:defRPr sz="1200"/>
-            </a:lvl1pPr>
-          </a:lstStyle>
-          <a:p>
-            <a:endParaRPr lang="en-US"/>
-          </a:p>
-        </p:txBody>
-      </p:sp>
-      <p:sp>
-        <p:nvSpPr>
-          <p:cNvPr id="3" name="Date Placeholder 2"/>
-          <p:cNvSpPr>
-            <a:spLocks noGrp="1"/>
-          </p:cNvSpPr>
-          <p:nvPr>
-            <p:ph type="dt" idx="1"/>
-          </p:nvPr>
-        </p:nvSpPr>
-        <p:spPr>
-          <a:xfrm>
-            <a:off x="3884613" y="0"/>
-            <a:ext cx="2971800" cy="458788"/>
-          </a:xfrm>
-          <a:prstGeom prst="rect">
-            <a:avLst/>
-          </a:prstGeom>
-        </p:spPr>
-        <p:txBody>
-          <a:bodyPr vert="horz" lIns="91440" tIns="45720" rIns="91440" bIns="45720" rtlCol="0"/>
-          <a:lstStyle>
-            <a:lvl1pPr algn="r">
-              <a:defRPr sz="1200"/>
-            </a:lvl1pPr>
-          </a:lstStyle>
-          <a:p>
-            <a:fld id="{5282F153-3F37-0F45-9E97-73ACFA13230C}" type="datetimeFigureOut">
-              <a:rPr lang="en-US"/>
-              <a:t>7/23/19</a:t>
-            </a:fld>
-            <a:endParaRPr lang="en-US"/>
-          </a:p>
-        </p:txBody>
-      </p:sp>
-      <p:sp>
-        <p:nvSpPr>
-          <p:cNvPr id="4" name="Slide Image Placeholder 3"/>
-          <p:cNvSpPr>
-            <a:spLocks noGrp="1" noRot="1" noChangeAspect="1"/>
-          </p:cNvSpPr>
-          <p:nvPr>
-            <p:ph type="sldImg" idx="2"/>
-          </p:nvPr>
-        </p:nvSpPr>
-        <p:spPr>
-          <a:xfrm>
-            <a:off x="685800" y="1143000"/>
-            <a:ext cx="5486400" cy="3086100"/>
-          </a:xfrm>
-          <a:prstGeom prst="rect">
-            <a:avLst/>
-          </a:prstGeom>
-          <a:noFill/>
-          <a:ln w="12700">
-            <a:solidFill>
-              <a:prstClr val="black"/>
-            </a:solidFill>
-          </a:ln>
-        </p:spPr>
-        <p:txBody>
-          <a:bodyPr vert="horz" lIns="91440" tIns="45720" rIns="91440" bIns="45720" rtlCol="0" anchor="ctr"/>
-          <a:lstStyle/>
-          <a:p>
-            <a:endParaRPr lang="en-US"/>
-          </a:p>
-        </p:txBody>
-      </p:sp>
-      <p:sp>
-        <p:nvSpPr>
-          <p:cNvPr id="5" name="Notes Placeholder 4"/>
-          <p:cNvSpPr>
-            <a:spLocks noGrp="1"/>
-          </p:cNvSpPr>
-          <p:nvPr>
-            <p:ph type="body" sz="quarter" idx="3"/>
-          </p:nvPr>
-        </p:nvSpPr>
-        <p:spPr>
-          <a:xfrm>
-            <a:off x="685800" y="4400550"/>
-            <a:ext cx="5486400" cy="3600450"/>
-          </a:xfrm>
-          <a:prstGeom prst="rect">
-            <a:avLst/>
-          </a:prstGeom>
-        </p:spPr>
-        <p:txBody>
-          <a:bodyPr vert="horz" lIns="91440" tIns="45720" rIns="91440" bIns="45720" rtlCol="0"/>
-          <a:lstStyle/>
-          <a:p>
-            <a:pPr lvl="0"/>
-            <a:r>
-              <a:rPr lang="en-US"/>
-              <a:t>Click to edit Master text styles</a:t>
-            </a:r>
-          </a:p>
-          <a:p>
-            <a:pPr lvl="1"/>
-            <a:r>
-              <a:rPr lang="en-US"/>
-              <a:t>Second level</a:t>
-            </a:r>
-          </a:p>
-          <a:p>
-            <a:pPr lvl="2"/>
-            <a:r>
-              <a:rPr lang="en-US"/>
-              <a:t>Third level</a:t>
-            </a:r>
-          </a:p>
-          <a:p>
-            <a:pPr lvl="3"/>
-            <a:r>
-              <a:rPr lang="en-US"/>
-              <a:t>Fourth level</a:t>
-            </a:r>
-          </a:p>
-          <a:p>
-            <a:pPr lvl="4"/>
-            <a:r>
-              <a:rPr lang="en-US"/>
-              <a:t>Fifth level</a:t>
-            </a:r>
-          </a:p>
-        </p:txBody>
-      </p:sp>
-      <p:sp>
-        <p:nvSpPr>
-          <p:cNvPr id="6" name="Footer Placeholder 5"/>
-          <p:cNvSpPr>
-            <a:spLocks noGrp="1"/>
-          </p:cNvSpPr>
-          <p:nvPr>
-            <p:ph type="ftr" sz="quarter" idx="4"/>
-          </p:nvPr>
-        </p:nvSpPr>
-        <p:spPr>
-          <a:xfrm>
-            <a:off x="0" y="8685213"/>
-            <a:ext cx="2971800" cy="458787"/>
-          </a:xfrm>
-          <a:prstGeom prst="rect">
-            <a:avLst/>
-          </a:prstGeom>
-        </p:spPr>
-        <p:txBody>
-          <a:bodyPr vert="horz" lIns="91440" tIns="45720" rIns="91440" bIns="45720" rtlCol="0" anchor="b"/>
-          <a:lstStyle>
-            <a:lvl1pPr algn="l">
-              <a:defRPr sz="1200"/>
-            </a:lvl1pPr>
-          </a:lstStyle>
-          <a:p>
-            <a:endParaRPr lang="en-US"/>
-          </a:p>
-        </p:txBody>
-      </p:sp>
-      <p:sp>
-        <p:nvSpPr>
-          <p:cNvPr id="7" name="Slide Number Placeholder 6"/>
-          <p:cNvSpPr>
-            <a:spLocks noGrp="1"/>
-          </p:cNvSpPr>
-          <p:nvPr>
-            <p:ph type="sldNum" sz="quarter" idx="5"/>
-          </p:nvPr>
-        </p:nvSpPr>
-        <p:spPr>
-          <a:xfrm>
-            <a:off x="3884613" y="8685213"/>
-            <a:ext cx="2971800" cy="458787"/>
-          </a:xfrm>
-          <a:prstGeom prst="rect">
-            <a:avLst/>
-          </a:prstGeom>
-        </p:spPr>
-        <p:txBody>
-          <a:bodyPr vert="horz" lIns="91440" tIns="45720" rIns="91440" bIns="45720" rtlCol="0" anchor="b"/>
-          <a:lstStyle>
-            <a:lvl1pPr algn="r">
-              <a:defRPr sz="1200"/>
-            </a:lvl1pPr>
-          </a:lstStyle>
-          <a:p>
-            <a:fld id="{CE5E9CC1-C706-0F49-92D6-E571CC5EEA8F}" type="slidenum">
-              <a:rPr lang="en-US"/>
-              <a:t>‹#›</a:t>
-            </a:fld>
-            <a:endParaRPr lang="en-US"/>
-          </a:p>
-        </p:txBody>
-      </p:sp>
     </p:spTree>
     <p:extLst>
       <p:ext uri="{BB962C8B-B14F-4D97-AF65-F5344CB8AC3E}">
-        <p14:creationId xmlns:p14="http://schemas.microsoft.com/office/powerpoint/2010/main" val="1024086991"/>
+        <p14:creationId xmlns:p14="http://schemas.microsoft.com/office/powerpoint/2010/main" val="2071018713"/>
       </p:ext>
     </p:extLst>
   </p:cSld>
@@ -515,7 +296,6 @@
               <a:rPr lang="en-US" dirty="0"/>
               <a:t>[Member 1] Hello, today we present our project: Concrete Crack Detection using traditional image processing.</a:t>
             </a:r>
-            <a:endParaRPr lang="en-US" dirty="0"/>
           </a:p>
         </p:txBody>
       </p:sp>
@@ -601,9 +381,8 @@
           <a:p>
             <a:r>
               <a:rPr lang="en-US" dirty="0"/>
-              <a:t>[Member 2] Lesson: the old aspect-ratio criterion discarded curved cracks; switching to circularity clearly helped.</a:t>
+              <a:t>[Member 3] Walk through the tuning rounds: baseline is guessed and low-precision; round 1's first grid search lifts precision; round 2 widens the grid and lets morphology be skipped so recall recovers; round 3 fixes the area count, switches to circularity, and adds the train/held-out split.</a:t>
             </a:r>
-            <a:endParaRPr lang="en-US" dirty="0"/>
           </a:p>
         </p:txBody>
       </p:sp>
@@ -691,7 +470,6 @@
               <a:rPr lang="en-US" dirty="0"/>
               <a:t>[Member 3] Good and failing cases; some failures are ground-truth issues, not the system's fault.</a:t>
             </a:r>
-            <a:endParaRPr lang="en-US" dirty="0"/>
           </a:p>
         </p:txBody>
       </p:sp>
@@ -779,7 +557,6 @@
               <a:rPr lang="en-US" dirty="0"/>
               <a:t>[Member 1] Future work toward Edge AI / drones; the pipeline is fast enough. Conclusion and thanks.</a:t>
             </a:r>
-            <a:endParaRPr lang="en-US" dirty="0"/>
           </a:p>
         </p:txBody>
       </p:sp>
@@ -867,7 +644,6 @@
               <a:rPr lang="en-US" dirty="0"/>
               <a:t>[Member 1] Motivated by the earthquake; cracks are an early warning sign, but manual inspection is slow and inconsistent.</a:t>
             </a:r>
-            <a:endParaRPr lang="en-US" dirty="0"/>
           </a:p>
         </p:txBody>
       </p:sp>
@@ -955,7 +731,6 @@
               <a:rPr lang="en-US" dirty="0"/>
               <a:t>[Member 1] Goal: separate real cracks from normal texture, using traditional IP only, tested on 118 CrackForest images.</a:t>
             </a:r>
-            <a:endParaRPr lang="en-US" dirty="0"/>
           </a:p>
         </p:txBody>
       </p:sp>
@@ -1043,7 +818,6 @@
               <a:rPr lang="en-US" dirty="0"/>
               <a:t>[Member 2] Four-step pipeline; steps 3-4 mainly clean up the noise that step 2 picks up.</a:t>
             </a:r>
-            <a:endParaRPr lang="en-US" dirty="0"/>
           </a:p>
         </p:txBody>
       </p:sp>
@@ -1131,7 +905,6 @@
               <a:rPr lang="en-US" dirty="0"/>
               <a:t>[Member 2] Walk through each step: pre-processing, adaptive threshold, morphology, shape analysis. Parameters from grid search.</a:t>
             </a:r>
-            <a:endParaRPr lang="en-US" dirty="0"/>
           </a:p>
         </p:txBody>
       </p:sp>
@@ -1219,7 +992,6 @@
               <a:rPr lang="en-US" dirty="0"/>
               <a:t>[Member 3] Pixel-level evaluation, separate train/test, and no accuracy because the data is imbalanced.</a:t>
             </a:r>
-            <a:endParaRPr lang="en-US" dirty="0"/>
           </a:p>
         </p:txBody>
       </p:sp>
@@ -1307,7 +1079,6 @@
               <a:rPr lang="en-US" dirty="0"/>
               <a:t>[Member 3] Explain the metrics: count TP/FP/FN per pixel. Precision = how much of what we predicted is right, Recall = how much of the real cracks we found, IoU/Dice combine both into one overlap score. Dice is the headline number.</a:t>
             </a:r>
-            <a:endParaRPr lang="en-US" dirty="0"/>
           </a:p>
         </p:txBody>
       </p:sp>
@@ -1395,7 +1166,6 @@
               <a:rPr lang="en-US" dirty="0"/>
               <a:t>[Member 3] Headline Dice 0.5024 from 0.3201; the big change is precision more than doubling.</a:t>
             </a:r>
-            <a:endParaRPr lang="en-US" dirty="0"/>
           </a:p>
         </p:txBody>
       </p:sp>
@@ -1483,7 +1253,6 @@
               <a:rPr lang="en-US" dirty="0"/>
               <a:t>[Member 3] Adaptive beats the others on 102/118 images because edge and Otsu are fooled by texture and shadows.</a:t>
             </a:r>
-            <a:endParaRPr lang="en-US" dirty="0"/>
           </a:p>
         </p:txBody>
       </p:sp>
@@ -1556,6 +1325,11 @@
 <file path=ppt/slideMasters/slideMaster1.xml><?xml version="1.0" encoding="utf-8"?>
 <p:sldMaster xmlns:a="http://schemas.openxmlformats.org/drawingml/2006/main" xmlns:r="http://schemas.openxmlformats.org/officeDocument/2006/relationships" xmlns:p="http://schemas.openxmlformats.org/presentationml/2006/main">
   <p:cSld>
+    <p:bg>
+      <p:bgRef idx="1001">
+        <a:schemeClr val="bg1"/>
+      </p:bgRef>
+    </p:bg>
     <p:spTree>
       <p:nvGrpSpPr>
         <p:cNvPr id="1" name=""/>
@@ -1838,6 +1612,7 @@
         <a:solidFill>
           <a:srgbClr val="2E3338"/>
         </a:solidFill>
+        <a:effectLst/>
       </p:bgPr>
     </p:bg>
     <p:spTree>
@@ -1876,6 +1651,13 @@
             <a:prstDash val="solid"/>
           </a:ln>
         </p:spPr>
+        <p:txBody>
+          <a:bodyPr/>
+          <a:lstStyle/>
+          <a:p>
+            <a:endParaRPr lang="en-US"/>
+          </a:p>
+        </p:txBody>
       </p:sp>
       <p:sp>
         <p:nvSpPr>
@@ -1899,6 +1681,13 @@
             <a:prstDash val="solid"/>
           </a:ln>
         </p:spPr>
+        <p:txBody>
+          <a:bodyPr/>
+          <a:lstStyle/>
+          <a:p>
+            <a:endParaRPr lang="en-US"/>
+          </a:p>
+        </p:txBody>
       </p:sp>
       <p:sp>
         <p:nvSpPr>
@@ -1922,6 +1711,13 @@
             <a:prstDash val="solid"/>
           </a:ln>
         </p:spPr>
+        <p:txBody>
+          <a:bodyPr/>
+          <a:lstStyle/>
+          <a:p>
+            <a:endParaRPr lang="en-US"/>
+          </a:p>
+        </p:txBody>
       </p:sp>
       <p:sp>
         <p:nvSpPr>
@@ -1945,6 +1741,13 @@
             <a:prstDash val="solid"/>
           </a:ln>
         </p:spPr>
+        <p:txBody>
+          <a:bodyPr/>
+          <a:lstStyle/>
+          <a:p>
+            <a:endParaRPr lang="en-US"/>
+          </a:p>
+        </p:txBody>
       </p:sp>
       <p:sp>
         <p:nvSpPr>
@@ -1968,6 +1771,13 @@
             <a:prstDash val="solid"/>
           </a:ln>
         </p:spPr>
+        <p:txBody>
+          <a:bodyPr/>
+          <a:lstStyle/>
+          <a:p>
+            <a:endParaRPr lang="en-US"/>
+          </a:p>
+        </p:txBody>
       </p:sp>
       <p:sp>
         <p:nvSpPr>
@@ -1991,6 +1801,13 @@
             <a:prstDash val="solid"/>
           </a:ln>
         </p:spPr>
+        <p:txBody>
+          <a:bodyPr/>
+          <a:lstStyle/>
+          <a:p>
+            <a:endParaRPr lang="en-US"/>
+          </a:p>
+        </p:txBody>
       </p:sp>
       <p:sp>
         <p:nvSpPr>
@@ -2014,6 +1831,13 @@
             <a:prstDash val="solid"/>
           </a:ln>
         </p:spPr>
+        <p:txBody>
+          <a:bodyPr/>
+          <a:lstStyle/>
+          <a:p>
+            <a:endParaRPr lang="en-US"/>
+          </a:p>
+        </p:txBody>
       </p:sp>
       <p:sp>
         <p:nvSpPr>
@@ -2037,6 +1861,13 @@
             <a:prstDash val="solid"/>
           </a:ln>
         </p:spPr>
+        <p:txBody>
+          <a:bodyPr/>
+          <a:lstStyle/>
+          <a:p>
+            <a:endParaRPr lang="en-US"/>
+          </a:p>
+        </p:txBody>
       </p:sp>
       <p:sp>
         <p:nvSpPr>
@@ -2059,11 +1890,11 @@
           <a:bodyPr wrap="square" rtlCol="0" anchor="ctr"/>
           <a:lstStyle/>
           <a:p>
-            <a:pPr indent="0" marL="0">
+            <a:pPr marL="0" indent="0">
               <a:buNone/>
             </a:pPr>
             <a:r>
-              <a:rPr lang="en-US" sz="1400" b="1" spc="300" kern="0" dirty="0">
+              <a:rPr lang="en-US" sz="1400" b="1" kern="0" spc="300" dirty="0">
                 <a:solidFill>
                   <a:srgbClr val="E8871E"/>
                 </a:solidFill>
@@ -2098,7 +1929,7 @@
           <a:bodyPr wrap="square" rtlCol="0" anchor="ctr"/>
           <a:lstStyle/>
           <a:p>
-            <a:pPr indent="0" marL="0">
+            <a:pPr marL="0" indent="0">
               <a:buNone/>
             </a:pPr>
             <a:r>
@@ -2137,7 +1968,7 @@
           <a:bodyPr wrap="square" rtlCol="0" anchor="ctr"/>
           <a:lstStyle/>
           <a:p>
-            <a:pPr indent="0" marL="0">
+            <a:pPr marL="0" indent="0">
               <a:buNone/>
             </a:pPr>
             <a:r>
@@ -2149,7 +1980,7 @@
                 <a:ea typeface="Calibri" pitchFamily="34" charset="-122"/>
                 <a:cs typeface="Calibri" pitchFamily="34" charset="-120"/>
               </a:rPr>
-              <a:t>Detecting structural cracks with traditional image processing — no deep learning — evaluated on 118 CrackForest images</a:t>
+              <a:t>Detecting structural cracks with traditional image processing</a:t>
             </a:r>
             <a:endParaRPr lang="en-US" sz="1800" dirty="0"/>
           </a:p>
@@ -2176,7 +2007,7 @@
           <a:bodyPr wrap="square" rtlCol="0" anchor="ctr"/>
           <a:lstStyle/>
           <a:p>
-            <a:pPr indent="0" marL="0">
+            <a:pPr marL="0" indent="0">
               <a:buNone/>
             </a:pPr>
             <a:r>
@@ -2190,21 +2021,22 @@
               </a:rPr>
               <a:t>Presented by  </a:t>
             </a:r>
-            <a:pPr indent="0" marL="0">
-              <a:buNone/>
-            </a:pPr>
             <a:r>
-              <a:rPr lang="en-US" sz="1600" b="1" dirty="0">
+              <a:rPr lang="th-TH" sz="1600" b="1" dirty="0">
                 <a:solidFill>
-                  <a:srgbClr val="FFFFFF"/>
+                  <a:schemeClr val="bg1"/>
                 </a:solidFill>
                 <a:latin typeface="Calibri" pitchFamily="34" charset="0"/>
                 <a:ea typeface="Calibri" pitchFamily="34" charset="-122"/>
                 <a:cs typeface="Calibri" pitchFamily="34" charset="-120"/>
               </a:rPr>
-              <a:t>Member 1  ·  Member 2  ·  Member 3</a:t>
+              <a:t>ราชสีห์</a:t>
             </a:r>
-            <a:endParaRPr lang="en-US" sz="1600" dirty="0"/>
+            <a:endParaRPr lang="en-US" sz="1600" b="1" dirty="0">
+              <a:solidFill>
+                <a:schemeClr val="bg1"/>
+              </a:solidFill>
+            </a:endParaRPr>
           </a:p>
         </p:txBody>
       </p:sp>
@@ -2217,13 +2049,14 @@
 </file>
 
 <file path=ppt/slides/slide10.xml><?xml version="1.0" encoding="utf-8"?>
-<p:sld xmlns:a="http://schemas.openxmlformats.org/drawingml/2006/main" xmlns:r="http://schemas.openxmlformats.org/officeDocument/2006/relationships" xmlns:p="http://schemas.openxmlformats.org/presentationml/2006/main">
+<p:sld xmlns:a="http://schemas.openxmlformats.org/drawingml/2006/main" xmlns:r="http://schemas.openxmlformats.org/officeDocument/2006/relationships" xmlns:p="http://schemas.openxmlformats.org/presentationml/2006/main" show="0">
   <p:cSld name="Slide 10">
     <p:bg>
       <p:bgPr>
         <a:solidFill>
-          <a:srgbClr val="2E3338"/>
+          <a:srgbClr val="F4F4F2"/>
         </a:solidFill>
+        <a:effectLst/>
       </p:bgPr>
     </p:bg>
     <p:spTree>
@@ -2248,8 +2081,8 @@
         </p:nvSpPr>
         <p:spPr>
           <a:xfrm>
-            <a:off x="731520" y="548640"/>
-            <a:ext cx="10972800" cy="640080"/>
+            <a:off x="640080" y="457200"/>
+            <a:ext cx="10881360" cy="731520"/>
           </a:xfrm>
           <a:prstGeom prst="rect">
             <a:avLst/>
@@ -2261,695 +2094,1130 @@
           <a:bodyPr wrap="square" rtlCol="0" anchor="ctr"/>
           <a:lstStyle/>
           <a:p>
-            <a:pPr indent="0" marL="0">
+            <a:pPr marL="0" indent="0">
               <a:buNone/>
             </a:pPr>
             <a:r>
-              <a:rPr lang="en-US" sz="3400" b="1" dirty="0">
+              <a:rPr lang="en-US" sz="3200" b="1" dirty="0">
                 <a:solidFill>
-                  <a:srgbClr val="FFFFFF"/>
+                  <a:srgbClr val="222629"/>
                 </a:solidFill>
                 <a:latin typeface="Cambria" pitchFamily="34" charset="0"/>
                 <a:ea typeface="Cambria" pitchFamily="34" charset="-122"/>
                 <a:cs typeface="Cambria" pitchFamily="34" charset="-120"/>
               </a:rPr>
-              <a:t>Key Lesson</a:t>
+              <a:t>Tuning Round</a:t>
             </a:r>
-            <a:endParaRPr lang="en-US" sz="3400" dirty="0"/>
-          </a:p>
-        </p:txBody>
-      </p:sp>
-      <p:sp>
-        <p:nvSpPr>
-          <p:cNvPr id="3" name="Text 1"/>
-          <p:cNvSpPr/>
-          <p:nvPr/>
-        </p:nvSpPr>
-        <p:spPr>
-          <a:xfrm>
-            <a:off x="749808" y="1325880"/>
-            <a:ext cx="10972800" cy="457200"/>
-          </a:xfrm>
-          <a:prstGeom prst="rect">
-            <a:avLst/>
-          </a:prstGeom>
-          <a:noFill/>
-          <a:ln/>
-        </p:spPr>
-        <p:txBody>
-          <a:bodyPr wrap="square" rtlCol="0" anchor="ctr"/>
-          <a:lstStyle/>
-          <a:p>
-            <a:pPr indent="0" marL="0">
-              <a:buNone/>
-            </a:pPr>
-            <a:r>
-              <a:rPr lang="en-US" sz="1800" i="1" dirty="0">
-                <a:solidFill>
-                  <a:srgbClr val="E8871E"/>
-                </a:solidFill>
-                <a:latin typeface="Calibri" pitchFamily="34" charset="0"/>
-                <a:ea typeface="Calibri" pitchFamily="34" charset="-122"/>
-                <a:cs typeface="Calibri" pitchFamily="34" charset="-120"/>
-              </a:rPr>
-              <a:t>The old shape criterion (aspect ratio) made results worse</a:t>
-            </a:r>
-            <a:endParaRPr lang="en-US" sz="1800" dirty="0"/>
-          </a:p>
-        </p:txBody>
-      </p:sp>
-      <p:sp>
-        <p:nvSpPr>
-          <p:cNvPr id="4" name="Text 2"/>
-          <p:cNvSpPr/>
-          <p:nvPr/>
-        </p:nvSpPr>
-        <p:spPr>
-          <a:xfrm>
-            <a:off x="731520" y="1965960"/>
-            <a:ext cx="5486400" cy="1828800"/>
-          </a:xfrm>
-          <a:prstGeom prst="rect">
-            <a:avLst/>
-          </a:prstGeom>
-          <a:noFill/>
-          <a:ln/>
-        </p:spPr>
-        <p:txBody>
-          <a:bodyPr wrap="square" rtlCol="0" anchor="t"/>
-          <a:lstStyle/>
-          <a:p>
-            <a:pPr indent="0" marL="0">
-              <a:lnSpc>
-                <a:spcPct val="130000"/>
-              </a:lnSpc>
-              <a:buNone/>
-            </a:pPr>
-            <a:r>
-              <a:rPr lang="en-US" sz="1600" b="1" dirty="0">
-                <a:solidFill>
-                  <a:srgbClr val="FFFFFF"/>
-                </a:solidFill>
-                <a:latin typeface="Calibri" pitchFamily="34" charset="0"/>
-                <a:ea typeface="Calibri" pitchFamily="34" charset="-122"/>
-                <a:cs typeface="Calibri" pitchFamily="34" charset="-120"/>
-              </a:rPr>
-              <a:t>Aspect ratio </a:t>
-            </a:r>
-            <a:pPr indent="0" marL="0">
-              <a:lnSpc>
-                <a:spcPct val="130000"/>
-              </a:lnSpc>
-              <a:buNone/>
-            </a:pPr>
-            <a:r>
-              <a:rPr lang="en-US" sz="1600" dirty="0">
-                <a:solidFill>
-                  <a:srgbClr val="CBD1D6"/>
-                </a:solidFill>
-                <a:latin typeface="Calibri" pitchFamily="34" charset="0"/>
-                <a:ea typeface="Calibri" pitchFamily="34" charset="-122"/>
-                <a:cs typeface="Calibri" pitchFamily="34" charset="-120"/>
-              </a:rPr>
-              <a:t>of the bounding box assumes a crack is straight — a T-shaped or branching crack has a near-square box and gets discarded whole.</a:t>
-            </a:r>
-            <a:endParaRPr lang="en-US" sz="1600" dirty="0"/>
-          </a:p>
-        </p:txBody>
-      </p:sp>
-      <p:sp>
-        <p:nvSpPr>
-          <p:cNvPr id="5" name="Text 3"/>
-          <p:cNvSpPr/>
-          <p:nvPr/>
-        </p:nvSpPr>
-        <p:spPr>
-          <a:xfrm>
-            <a:off x="731520" y="3886200"/>
-            <a:ext cx="5486400" cy="1828800"/>
-          </a:xfrm>
-          <a:prstGeom prst="rect">
-            <a:avLst/>
-          </a:prstGeom>
-          <a:noFill/>
-          <a:ln/>
-        </p:spPr>
-        <p:txBody>
-          <a:bodyPr wrap="square" rtlCol="0" anchor="t"/>
-          <a:lstStyle/>
-          <a:p>
-            <a:pPr indent="0" marL="0">
-              <a:lnSpc>
-                <a:spcPct val="130000"/>
-              </a:lnSpc>
-              <a:buNone/>
-            </a:pPr>
-            <a:r>
-              <a:rPr lang="en-US" sz="1600" b="1" dirty="0">
-                <a:solidFill>
-                  <a:srgbClr val="FFFFFF"/>
-                </a:solidFill>
-                <a:latin typeface="Calibri" pitchFamily="34" charset="0"/>
-                <a:ea typeface="Calibri" pitchFamily="34" charset="-122"/>
-                <a:cs typeface="Calibri" pitchFamily="34" charset="-120"/>
-              </a:rPr>
-              <a:t>Circularity </a:t>
-            </a:r>
-            <a:pPr indent="0" marL="0">
-              <a:lnSpc>
-                <a:spcPct val="130000"/>
-              </a:lnSpc>
-              <a:buNone/>
-            </a:pPr>
-            <a:r>
-              <a:rPr lang="en-US" sz="1600" dirty="0">
-                <a:solidFill>
-                  <a:srgbClr val="CBD1D6"/>
-                </a:solidFill>
-                <a:latin typeface="Calibri" pitchFamily="34" charset="0"/>
-                <a:ea typeface="Calibri" pitchFamily="34" charset="-122"/>
-                <a:cs typeface="Calibri" pitchFamily="34" charset="-120"/>
-              </a:rPr>
-              <a:t>= 4·π·area / perimeter² does not depend on curvature, so thin cracks pass however much they bend. Images that scored 0.0000 came back to 0.58.</a:t>
-            </a:r>
-            <a:endParaRPr lang="en-US" sz="1600" dirty="0"/>
-          </a:p>
-        </p:txBody>
-      </p:sp>
-      <p:sp>
-        <p:nvSpPr>
-          <p:cNvPr id="6" name="Text 4"/>
-          <p:cNvSpPr/>
-          <p:nvPr/>
-        </p:nvSpPr>
-        <p:spPr>
-          <a:xfrm>
-            <a:off x="6400800" y="2103120"/>
-            <a:ext cx="2743200" cy="365760"/>
-          </a:xfrm>
-          <a:prstGeom prst="rect">
-            <a:avLst/>
-          </a:prstGeom>
-          <a:noFill/>
-          <a:ln/>
-        </p:spPr>
-        <p:txBody>
-          <a:bodyPr wrap="square" rtlCol="0" anchor="ctr"/>
-          <a:lstStyle/>
-          <a:p>
-            <a:pPr indent="0" marL="0">
-              <a:buNone/>
-            </a:pPr>
-            <a:r>
-              <a:rPr lang="en-US" sz="1300" b="1" dirty="0">
-                <a:solidFill>
-                  <a:srgbClr val="FFFFFF"/>
-                </a:solidFill>
-                <a:latin typeface="Calibri" pitchFamily="34" charset="0"/>
-                <a:ea typeface="Calibri" pitchFamily="34" charset="-122"/>
-                <a:cs typeface="Calibri" pitchFamily="34" charset="-120"/>
-              </a:rPr>
-              <a:t>circularity (new)</a:t>
-            </a:r>
-            <a:endParaRPr lang="en-US" sz="1300" dirty="0"/>
-          </a:p>
-        </p:txBody>
-      </p:sp>
-      <p:sp>
-        <p:nvSpPr>
-          <p:cNvPr id="7" name="Shape 5"/>
-          <p:cNvSpPr/>
-          <p:nvPr/>
-        </p:nvSpPr>
-        <p:spPr>
-          <a:xfrm>
-            <a:off x="9144000" y="2121408"/>
-            <a:ext cx="2286000" cy="274320"/>
-          </a:xfrm>
-          <a:prstGeom prst="rect">
-            <a:avLst/>
-          </a:prstGeom>
-          <a:solidFill>
-            <a:srgbClr val="3A4046"/>
-          </a:solidFill>
-          <a:ln/>
-        </p:spPr>
-      </p:sp>
-      <p:sp>
-        <p:nvSpPr>
-          <p:cNvPr id="8" name="Shape 6"/>
-          <p:cNvSpPr/>
-          <p:nvPr/>
-        </p:nvSpPr>
-        <p:spPr>
-          <a:xfrm>
-            <a:off x="9144000" y="2121408"/>
-            <a:ext cx="2179181" cy="274320"/>
-          </a:xfrm>
-          <a:prstGeom prst="rect">
-            <a:avLst/>
-          </a:prstGeom>
-          <a:solidFill>
-            <a:srgbClr val="E8871E"/>
-          </a:solidFill>
-          <a:ln/>
-        </p:spPr>
-      </p:sp>
-      <p:sp>
-        <p:nvSpPr>
-          <p:cNvPr id="9" name="Text 7"/>
-          <p:cNvSpPr/>
-          <p:nvPr/>
-        </p:nvSpPr>
-        <p:spPr>
-          <a:xfrm>
-            <a:off x="9144000" y="2084832"/>
-            <a:ext cx="2286000" cy="310896"/>
-          </a:xfrm>
-          <a:prstGeom prst="rect">
-            <a:avLst/>
-          </a:prstGeom>
-          <a:noFill/>
-          <a:ln/>
-        </p:spPr>
-        <p:txBody>
-          <a:bodyPr wrap="square" rtlCol="0" anchor="ctr"/>
-          <a:lstStyle/>
-          <a:p>
-            <a:pPr algn="r" indent="0" marL="0">
-              <a:buNone/>
-            </a:pPr>
-            <a:r>
-              <a:rPr lang="en-US" sz="1100" b="1" dirty="0">
-                <a:solidFill>
-                  <a:srgbClr val="FFFFFF"/>
-                </a:solidFill>
-                <a:latin typeface="Cambria" pitchFamily="34" charset="0"/>
-                <a:ea typeface="Cambria" pitchFamily="34" charset="-122"/>
-                <a:cs typeface="Cambria" pitchFamily="34" charset="-120"/>
-              </a:rPr>
-              <a:t>0.5243</a:t>
-            </a:r>
-            <a:endParaRPr lang="en-US" sz="1100" dirty="0"/>
-          </a:p>
-        </p:txBody>
-      </p:sp>
-      <p:sp>
-        <p:nvSpPr>
-          <p:cNvPr id="10" name="Text 8"/>
-          <p:cNvSpPr/>
-          <p:nvPr/>
-        </p:nvSpPr>
-        <p:spPr>
-          <a:xfrm>
-            <a:off x="6400800" y="2761488"/>
-            <a:ext cx="2743200" cy="365760"/>
-          </a:xfrm>
-          <a:prstGeom prst="rect">
-            <a:avLst/>
-          </a:prstGeom>
-          <a:noFill/>
-          <a:ln/>
-        </p:spPr>
-        <p:txBody>
-          <a:bodyPr wrap="square" rtlCol="0" anchor="ctr"/>
-          <a:lstStyle/>
-          <a:p>
-            <a:pPr indent="0" marL="0">
-              <a:buNone/>
-            </a:pPr>
-            <a:r>
-              <a:rPr lang="en-US" sz="1300" dirty="0">
-                <a:solidFill>
-                  <a:srgbClr val="AEB6BC"/>
-                </a:solidFill>
-                <a:latin typeface="Calibri" pitchFamily="34" charset="0"/>
-                <a:ea typeface="Calibri" pitchFamily="34" charset="-122"/>
-                <a:cs typeface="Calibri" pitchFamily="34" charset="-120"/>
-              </a:rPr>
-              <a:t>no shape filter</a:t>
-            </a:r>
-            <a:endParaRPr lang="en-US" sz="1300" dirty="0"/>
-          </a:p>
-        </p:txBody>
-      </p:sp>
-      <p:sp>
-        <p:nvSpPr>
-          <p:cNvPr id="11" name="Shape 9"/>
-          <p:cNvSpPr/>
-          <p:nvPr/>
-        </p:nvSpPr>
-        <p:spPr>
-          <a:xfrm>
-            <a:off x="9144000" y="2779776"/>
-            <a:ext cx="2286000" cy="274320"/>
-          </a:xfrm>
-          <a:prstGeom prst="rect">
-            <a:avLst/>
-          </a:prstGeom>
-          <a:solidFill>
-            <a:srgbClr val="3A4046"/>
-          </a:solidFill>
-          <a:ln/>
-        </p:spPr>
-      </p:sp>
-      <p:sp>
-        <p:nvSpPr>
-          <p:cNvPr id="12" name="Shape 10"/>
-          <p:cNvSpPr/>
-          <p:nvPr/>
-        </p:nvSpPr>
-        <p:spPr>
-          <a:xfrm>
-            <a:off x="9144000" y="2779776"/>
-            <a:ext cx="2161725" cy="274320"/>
-          </a:xfrm>
-          <a:prstGeom prst="rect">
-            <a:avLst/>
-          </a:prstGeom>
-          <a:solidFill>
-            <a:srgbClr val="6B747B"/>
-          </a:solidFill>
-          <a:ln/>
-        </p:spPr>
-      </p:sp>
-      <p:sp>
-        <p:nvSpPr>
-          <p:cNvPr id="13" name="Text 11"/>
-          <p:cNvSpPr/>
-          <p:nvPr/>
-        </p:nvSpPr>
-        <p:spPr>
-          <a:xfrm>
-            <a:off x="9144000" y="2743200"/>
-            <a:ext cx="2286000" cy="310896"/>
-          </a:xfrm>
-          <a:prstGeom prst="rect">
-            <a:avLst/>
-          </a:prstGeom>
-          <a:noFill/>
-          <a:ln/>
-        </p:spPr>
-        <p:txBody>
-          <a:bodyPr wrap="square" rtlCol="0" anchor="ctr"/>
-          <a:lstStyle/>
-          <a:p>
-            <a:pPr algn="r" indent="0" marL="0">
-              <a:buNone/>
-            </a:pPr>
-            <a:r>
-              <a:rPr lang="en-US" sz="1100" dirty="0">
-                <a:solidFill>
-                  <a:srgbClr val="FFFFFF"/>
-                </a:solidFill>
-                <a:latin typeface="Cambria" pitchFamily="34" charset="0"/>
-                <a:ea typeface="Cambria" pitchFamily="34" charset="-122"/>
-                <a:cs typeface="Cambria" pitchFamily="34" charset="-120"/>
-              </a:rPr>
-              <a:t>0.5201</a:t>
-            </a:r>
-            <a:endParaRPr lang="en-US" sz="1100" dirty="0"/>
-          </a:p>
-        </p:txBody>
-      </p:sp>
-      <p:sp>
-        <p:nvSpPr>
-          <p:cNvPr id="14" name="Text 12"/>
-          <p:cNvSpPr/>
-          <p:nvPr/>
-        </p:nvSpPr>
-        <p:spPr>
-          <a:xfrm>
-            <a:off x="6400800" y="3419856"/>
-            <a:ext cx="2743200" cy="365760"/>
-          </a:xfrm>
-          <a:prstGeom prst="rect">
-            <a:avLst/>
-          </a:prstGeom>
-          <a:noFill/>
-          <a:ln/>
-        </p:spPr>
-        <p:txBody>
-          <a:bodyPr wrap="square" rtlCol="0" anchor="ctr"/>
-          <a:lstStyle/>
-          <a:p>
-            <a:pPr indent="0" marL="0">
-              <a:buNone/>
-            </a:pPr>
-            <a:r>
-              <a:rPr lang="en-US" sz="1300" dirty="0">
-                <a:solidFill>
-                  <a:srgbClr val="AEB6BC"/>
-                </a:solidFill>
-                <a:latin typeface="Calibri" pitchFamily="34" charset="0"/>
-                <a:ea typeface="Calibri" pitchFamily="34" charset="-122"/>
-                <a:cs typeface="Calibri" pitchFamily="34" charset="-120"/>
-              </a:rPr>
-              <a:t>both criteria</a:t>
-            </a:r>
-            <a:endParaRPr lang="en-US" sz="1300" dirty="0"/>
-          </a:p>
-        </p:txBody>
-      </p:sp>
-      <p:sp>
-        <p:nvSpPr>
-          <p:cNvPr id="15" name="Shape 13"/>
-          <p:cNvSpPr/>
-          <p:nvPr/>
-        </p:nvSpPr>
-        <p:spPr>
-          <a:xfrm>
-            <a:off x="9144000" y="3438144"/>
-            <a:ext cx="2286000" cy="274320"/>
-          </a:xfrm>
-          <a:prstGeom prst="rect">
-            <a:avLst/>
-          </a:prstGeom>
-          <a:solidFill>
-            <a:srgbClr val="3A4046"/>
-          </a:solidFill>
-          <a:ln/>
-        </p:spPr>
-      </p:sp>
-      <p:sp>
-        <p:nvSpPr>
-          <p:cNvPr id="16" name="Shape 14"/>
-          <p:cNvSpPr/>
-          <p:nvPr/>
-        </p:nvSpPr>
-        <p:spPr>
-          <a:xfrm>
-            <a:off x="9144000" y="3438144"/>
-            <a:ext cx="2090651" cy="274320"/>
-          </a:xfrm>
-          <a:prstGeom prst="rect">
-            <a:avLst/>
-          </a:prstGeom>
-          <a:solidFill>
-            <a:srgbClr val="6B747B"/>
-          </a:solidFill>
-          <a:ln/>
-        </p:spPr>
-      </p:sp>
-      <p:sp>
-        <p:nvSpPr>
-          <p:cNvPr id="17" name="Text 15"/>
-          <p:cNvSpPr/>
-          <p:nvPr/>
-        </p:nvSpPr>
-        <p:spPr>
-          <a:xfrm>
-            <a:off x="9144000" y="3401568"/>
-            <a:ext cx="2286000" cy="310896"/>
-          </a:xfrm>
-          <a:prstGeom prst="rect">
-            <a:avLst/>
-          </a:prstGeom>
-          <a:noFill/>
-          <a:ln/>
-        </p:spPr>
-        <p:txBody>
-          <a:bodyPr wrap="square" rtlCol="0" anchor="ctr"/>
-          <a:lstStyle/>
-          <a:p>
-            <a:pPr algn="r" indent="0" marL="0">
-              <a:buNone/>
-            </a:pPr>
-            <a:r>
-              <a:rPr lang="en-US" sz="1100" dirty="0">
-                <a:solidFill>
-                  <a:srgbClr val="FFFFFF"/>
-                </a:solidFill>
-                <a:latin typeface="Cambria" pitchFamily="34" charset="0"/>
-                <a:ea typeface="Cambria" pitchFamily="34" charset="-122"/>
-                <a:cs typeface="Cambria" pitchFamily="34" charset="-120"/>
-              </a:rPr>
-              <a:t>0.5030</a:t>
-            </a:r>
-            <a:endParaRPr lang="en-US" sz="1100" dirty="0"/>
-          </a:p>
-        </p:txBody>
-      </p:sp>
-      <p:sp>
-        <p:nvSpPr>
-          <p:cNvPr id="18" name="Text 16"/>
-          <p:cNvSpPr/>
-          <p:nvPr/>
-        </p:nvSpPr>
-        <p:spPr>
-          <a:xfrm>
-            <a:off x="6400800" y="4078224"/>
-            <a:ext cx="2743200" cy="365760"/>
-          </a:xfrm>
-          <a:prstGeom prst="rect">
-            <a:avLst/>
-          </a:prstGeom>
-          <a:noFill/>
-          <a:ln/>
-        </p:spPr>
-        <p:txBody>
-          <a:bodyPr wrap="square" rtlCol="0" anchor="ctr"/>
-          <a:lstStyle/>
-          <a:p>
-            <a:pPr indent="0" marL="0">
-              <a:buNone/>
-            </a:pPr>
-            <a:r>
-              <a:rPr lang="en-US" sz="1300" dirty="0">
-                <a:solidFill>
-                  <a:srgbClr val="AEB6BC"/>
-                </a:solidFill>
-                <a:latin typeface="Calibri" pitchFamily="34" charset="0"/>
-                <a:ea typeface="Calibri" pitchFamily="34" charset="-122"/>
-                <a:cs typeface="Calibri" pitchFamily="34" charset="-120"/>
-              </a:rPr>
-              <a:t>aspect ratio (old)</a:t>
-            </a:r>
-            <a:endParaRPr lang="en-US" sz="1300" dirty="0"/>
-          </a:p>
-        </p:txBody>
-      </p:sp>
-      <p:sp>
-        <p:nvSpPr>
-          <p:cNvPr id="19" name="Shape 17"/>
-          <p:cNvSpPr/>
-          <p:nvPr/>
-        </p:nvSpPr>
-        <p:spPr>
-          <a:xfrm>
-            <a:off x="9144000" y="4096512"/>
-            <a:ext cx="2286000" cy="274320"/>
-          </a:xfrm>
-          <a:prstGeom prst="rect">
-            <a:avLst/>
-          </a:prstGeom>
-          <a:solidFill>
-            <a:srgbClr val="3A4046"/>
-          </a:solidFill>
-          <a:ln/>
-        </p:spPr>
-      </p:sp>
-      <p:sp>
-        <p:nvSpPr>
-          <p:cNvPr id="20" name="Shape 18"/>
-          <p:cNvSpPr/>
-          <p:nvPr/>
-        </p:nvSpPr>
-        <p:spPr>
-          <a:xfrm>
-            <a:off x="9144000" y="4096512"/>
-            <a:ext cx="2076935" cy="274320"/>
-          </a:xfrm>
-          <a:prstGeom prst="rect">
-            <a:avLst/>
-          </a:prstGeom>
-          <a:solidFill>
-            <a:srgbClr val="6B747B"/>
-          </a:solidFill>
-          <a:ln/>
-        </p:spPr>
-      </p:sp>
-      <p:sp>
-        <p:nvSpPr>
-          <p:cNvPr id="21" name="Text 19"/>
-          <p:cNvSpPr/>
-          <p:nvPr/>
-        </p:nvSpPr>
-        <p:spPr>
-          <a:xfrm>
-            <a:off x="9144000" y="4059936"/>
-            <a:ext cx="2286000" cy="310896"/>
-          </a:xfrm>
-          <a:prstGeom prst="rect">
-            <a:avLst/>
-          </a:prstGeom>
-          <a:noFill/>
-          <a:ln/>
-        </p:spPr>
-        <p:txBody>
-          <a:bodyPr wrap="square" rtlCol="0" anchor="ctr"/>
-          <a:lstStyle/>
-          <a:p>
-            <a:pPr algn="r" indent="0" marL="0">
-              <a:buNone/>
-            </a:pPr>
-            <a:r>
-              <a:rPr lang="en-US" sz="1100" dirty="0">
-                <a:solidFill>
-                  <a:srgbClr val="FFFFFF"/>
-                </a:solidFill>
-                <a:latin typeface="Cambria" pitchFamily="34" charset="0"/>
-                <a:ea typeface="Cambria" pitchFamily="34" charset="-122"/>
-                <a:cs typeface="Cambria" pitchFamily="34" charset="-120"/>
-              </a:rPr>
-              <a:t>0.4997</a:t>
-            </a:r>
-            <a:endParaRPr lang="en-US" sz="1100" dirty="0"/>
-          </a:p>
-        </p:txBody>
-      </p:sp>
-      <p:sp>
-        <p:nvSpPr>
-          <p:cNvPr id="22" name="Text 20"/>
-          <p:cNvSpPr/>
-          <p:nvPr/>
-        </p:nvSpPr>
-        <p:spPr>
-          <a:xfrm>
-            <a:off x="6400800" y="5029200"/>
-            <a:ext cx="5120640" cy="914400"/>
-          </a:xfrm>
-          <a:prstGeom prst="rect">
-            <a:avLst/>
-          </a:prstGeom>
-          <a:noFill/>
-          <a:ln/>
-        </p:spPr>
-        <p:txBody>
-          <a:bodyPr wrap="square" rtlCol="0" anchor="t"/>
-          <a:lstStyle/>
-          <a:p>
-            <a:pPr indent="0" marL="0">
-              <a:lnSpc>
-                <a:spcPct val="120000"/>
-              </a:lnSpc>
-              <a:buNone/>
-            </a:pPr>
-            <a:r>
-              <a:rPr lang="en-US" sz="1300" i="1" dirty="0">
-                <a:solidFill>
-                  <a:srgbClr val="E8871E"/>
-                </a:solidFill>
-                <a:latin typeface="Calibri" pitchFamily="34" charset="0"/>
-                <a:ea typeface="Calibri" pitchFamily="34" charset="-122"/>
-                <a:cs typeface="Calibri" pitchFamily="34" charset="-120"/>
-              </a:rPr>
-              <a:t>Best Dice on training images. The old criterion (0.4997) is worse than no shape filter (0.5201) — the new one (0.5243) is the first to justify this step.</a:t>
-            </a:r>
-            <a:endParaRPr lang="en-US" sz="1300" dirty="0"/>
-          </a:p>
-        </p:txBody>
-      </p:sp>
+            <a:endParaRPr lang="en-US" sz="3200" dirty="0"/>
+          </a:p>
+        </p:txBody>
+      </p:sp>
+      <p:graphicFrame>
+        <p:nvGraphicFramePr>
+          <p:cNvPr id="11" name="Table 0"/>
+          <p:cNvGraphicFramePr>
+            <a:graphicFrameLocks noGrp="1"/>
+          </p:cNvGraphicFramePr>
+          <p:nvPr>
+            <p:extLst>
+              <p:ext uri="{D42A27DB-BD31-4B8C-83A1-F6EECF244321}">
+                <p14:modId xmlns:p14="http://schemas.microsoft.com/office/powerpoint/2010/main" val="2066824050"/>
+              </p:ext>
+            </p:extLst>
+          </p:nvPr>
+        </p:nvGraphicFramePr>
+        <p:xfrm>
+          <a:off x="640080" y="1920240"/>
+          <a:ext cx="10881360" cy="4343400"/>
+        </p:xfrm>
+        <a:graphic>
+          <a:graphicData uri="http://schemas.openxmlformats.org/drawingml/2006/table">
+            <a:tbl>
+              <a:tblPr/>
+              <a:tblGrid>
+                <a:gridCol w="1371600">
+                  <a:extLst>
+                    <a:ext uri="{9D8B030D-6E8A-4147-A177-3AD203B41FA5}">
+                      <a16:colId xmlns:a16="http://schemas.microsoft.com/office/drawing/2014/main" val="20000"/>
+                    </a:ext>
+                  </a:extLst>
+                </a:gridCol>
+                <a:gridCol w="1097280">
+                  <a:extLst>
+                    <a:ext uri="{9D8B030D-6E8A-4147-A177-3AD203B41FA5}">
+                      <a16:colId xmlns:a16="http://schemas.microsoft.com/office/drawing/2014/main" val="20001"/>
+                    </a:ext>
+                  </a:extLst>
+                </a:gridCol>
+                <a:gridCol w="8412480">
+                  <a:extLst>
+                    <a:ext uri="{9D8B030D-6E8A-4147-A177-3AD203B41FA5}">
+                      <a16:colId xmlns:a16="http://schemas.microsoft.com/office/drawing/2014/main" val="20002"/>
+                    </a:ext>
+                  </a:extLst>
+                </a:gridCol>
+              </a:tblGrid>
+              <a:tr h="868680">
+                <a:tc>
+                  <a:txBody>
+                    <a:bodyPr/>
+                    <a:lstStyle/>
+                    <a:p>
+                      <a:pPr marL="0" indent="0" algn="ctr">
+                        <a:buNone/>
+                      </a:pPr>
+                      <a:r>
+                        <a:rPr lang="en-US" sz="1300" b="1" dirty="0">
+                          <a:solidFill>
+                            <a:srgbClr val="FFFFFF"/>
+                          </a:solidFill>
+                          <a:latin typeface="Calibri" pitchFamily="34" charset="0"/>
+                          <a:ea typeface="Calibri" pitchFamily="34" charset="-122"/>
+                          <a:cs typeface="Calibri" pitchFamily="34" charset="-120"/>
+                        </a:rPr>
+                        <a:t>Round</a:t>
+                      </a:r>
+                      <a:endParaRPr lang="en-US" sz="1300" dirty="0">
+                        <a:latin typeface="Calibri" charset="0"/>
+                        <a:ea typeface="Calibri" charset="0"/>
+                        <a:cs typeface="Calibri" charset="0"/>
+                      </a:endParaRPr>
+                    </a:p>
+                  </a:txBody>
+                  <a:tcPr>
+                    <a:lnL w="12700" cap="flat" cmpd="sng" algn="ctr">
+                      <a:solidFill>
+                        <a:srgbClr val="DDDDDD"/>
+                      </a:solidFill>
+                      <a:prstDash val="solid"/>
+                      <a:round/>
+                      <a:headEnd type="none" w="med" len="med"/>
+                      <a:tailEnd type="none" w="med" len="med"/>
+                    </a:lnL>
+                    <a:lnR w="12700" cap="flat" cmpd="sng" algn="ctr">
+                      <a:solidFill>
+                        <a:srgbClr val="DDDDDD"/>
+                      </a:solidFill>
+                      <a:prstDash val="solid"/>
+                      <a:round/>
+                      <a:headEnd type="none" w="med" len="med"/>
+                      <a:tailEnd type="none" w="med" len="med"/>
+                    </a:lnR>
+                    <a:lnT w="12700" cap="flat" cmpd="sng" algn="ctr">
+                      <a:solidFill>
+                        <a:srgbClr val="DDDDDD"/>
+                      </a:solidFill>
+                      <a:prstDash val="solid"/>
+                      <a:round/>
+                      <a:headEnd type="none" w="med" len="med"/>
+                      <a:tailEnd type="none" w="med" len="med"/>
+                    </a:lnT>
+                    <a:lnB w="12700" cap="flat" cmpd="sng" algn="ctr">
+                      <a:solidFill>
+                        <a:srgbClr val="DDDDDD"/>
+                      </a:solidFill>
+                      <a:prstDash val="solid"/>
+                      <a:round/>
+                      <a:headEnd type="none" w="med" len="med"/>
+                      <a:tailEnd type="none" w="med" len="med"/>
+                    </a:lnB>
+                    <a:solidFill>
+                      <a:srgbClr val="2E3338"/>
+                    </a:solidFill>
+                  </a:tcPr>
+                </a:tc>
+                <a:tc>
+                  <a:txBody>
+                    <a:bodyPr/>
+                    <a:lstStyle/>
+                    <a:p>
+                      <a:pPr marL="0" indent="0" algn="ctr">
+                        <a:buNone/>
+                      </a:pPr>
+                      <a:r>
+                        <a:rPr lang="en-US" sz="1300" b="1" dirty="0">
+                          <a:solidFill>
+                            <a:srgbClr val="FFFFFF"/>
+                          </a:solidFill>
+                          <a:latin typeface="Calibri" pitchFamily="34" charset="0"/>
+                          <a:ea typeface="Calibri" pitchFamily="34" charset="-122"/>
+                          <a:cs typeface="Calibri" pitchFamily="34" charset="-120"/>
+                        </a:rPr>
+                        <a:t>Dice</a:t>
+                      </a:r>
+                      <a:endParaRPr lang="en-US" sz="1300" dirty="0">
+                        <a:latin typeface="Calibri" charset="0"/>
+                        <a:ea typeface="Calibri" charset="0"/>
+                        <a:cs typeface="Calibri" charset="0"/>
+                      </a:endParaRPr>
+                    </a:p>
+                  </a:txBody>
+                  <a:tcPr>
+                    <a:lnL w="12700" cap="flat" cmpd="sng" algn="ctr">
+                      <a:solidFill>
+                        <a:srgbClr val="DDDDDD"/>
+                      </a:solidFill>
+                      <a:prstDash val="solid"/>
+                      <a:round/>
+                      <a:headEnd type="none" w="med" len="med"/>
+                      <a:tailEnd type="none" w="med" len="med"/>
+                    </a:lnL>
+                    <a:lnR w="12700" cap="flat" cmpd="sng" algn="ctr">
+                      <a:solidFill>
+                        <a:srgbClr val="DDDDDD"/>
+                      </a:solidFill>
+                      <a:prstDash val="solid"/>
+                      <a:round/>
+                      <a:headEnd type="none" w="med" len="med"/>
+                      <a:tailEnd type="none" w="med" len="med"/>
+                    </a:lnR>
+                    <a:lnT w="12700" cap="flat" cmpd="sng" algn="ctr">
+                      <a:solidFill>
+                        <a:srgbClr val="DDDDDD"/>
+                      </a:solidFill>
+                      <a:prstDash val="solid"/>
+                      <a:round/>
+                      <a:headEnd type="none" w="med" len="med"/>
+                      <a:tailEnd type="none" w="med" len="med"/>
+                    </a:lnT>
+                    <a:lnB w="12700" cap="flat" cmpd="sng" algn="ctr">
+                      <a:solidFill>
+                        <a:srgbClr val="DDDDDD"/>
+                      </a:solidFill>
+                      <a:prstDash val="solid"/>
+                      <a:round/>
+                      <a:headEnd type="none" w="med" len="med"/>
+                      <a:tailEnd type="none" w="med" len="med"/>
+                    </a:lnB>
+                    <a:solidFill>
+                      <a:srgbClr val="2E3338"/>
+                    </a:solidFill>
+                  </a:tcPr>
+                </a:tc>
+                <a:tc>
+                  <a:txBody>
+                    <a:bodyPr/>
+                    <a:lstStyle/>
+                    <a:p>
+                      <a:pPr marL="0" indent="0" algn="ctr">
+                        <a:buNone/>
+                      </a:pPr>
+                      <a:r>
+                        <a:rPr lang="en-US" sz="1300" b="1" dirty="0">
+                          <a:solidFill>
+                            <a:srgbClr val="FFFFFF"/>
+                          </a:solidFill>
+                          <a:latin typeface="Calibri" pitchFamily="34" charset="0"/>
+                          <a:ea typeface="Calibri" pitchFamily="34" charset="-122"/>
+                          <a:cs typeface="Calibri" pitchFamily="34" charset="-120"/>
+                        </a:rPr>
+                        <a:t>What was changed / parameters</a:t>
+                      </a:r>
+                      <a:endParaRPr lang="en-US" sz="1300" dirty="0">
+                        <a:latin typeface="Calibri" charset="0"/>
+                        <a:ea typeface="Calibri" charset="0"/>
+                        <a:cs typeface="Calibri" charset="0"/>
+                      </a:endParaRPr>
+                    </a:p>
+                  </a:txBody>
+                  <a:tcPr>
+                    <a:lnL w="12700" cap="flat" cmpd="sng" algn="ctr">
+                      <a:solidFill>
+                        <a:srgbClr val="DDDDDD"/>
+                      </a:solidFill>
+                      <a:prstDash val="solid"/>
+                      <a:round/>
+                      <a:headEnd type="none" w="med" len="med"/>
+                      <a:tailEnd type="none" w="med" len="med"/>
+                    </a:lnL>
+                    <a:lnR w="12700" cap="flat" cmpd="sng" algn="ctr">
+                      <a:solidFill>
+                        <a:srgbClr val="DDDDDD"/>
+                      </a:solidFill>
+                      <a:prstDash val="solid"/>
+                      <a:round/>
+                      <a:headEnd type="none" w="med" len="med"/>
+                      <a:tailEnd type="none" w="med" len="med"/>
+                    </a:lnR>
+                    <a:lnT w="12700" cap="flat" cmpd="sng" algn="ctr">
+                      <a:solidFill>
+                        <a:srgbClr val="DDDDDD"/>
+                      </a:solidFill>
+                      <a:prstDash val="solid"/>
+                      <a:round/>
+                      <a:headEnd type="none" w="med" len="med"/>
+                      <a:tailEnd type="none" w="med" len="med"/>
+                    </a:lnT>
+                    <a:lnB w="12700" cap="flat" cmpd="sng" algn="ctr">
+                      <a:solidFill>
+                        <a:srgbClr val="DDDDDD"/>
+                      </a:solidFill>
+                      <a:prstDash val="solid"/>
+                      <a:round/>
+                      <a:headEnd type="none" w="med" len="med"/>
+                      <a:tailEnd type="none" w="med" len="med"/>
+                    </a:lnB>
+                    <a:solidFill>
+                      <a:srgbClr val="2E3338"/>
+                    </a:solidFill>
+                  </a:tcPr>
+                </a:tc>
+                <a:extLst>
+                  <a:ext uri="{0D108BD9-81ED-4DB2-BD59-A6C34878D82A}">
+                    <a16:rowId xmlns:a16="http://schemas.microsoft.com/office/drawing/2014/main" val="10000"/>
+                  </a:ext>
+                </a:extLst>
+              </a:tr>
+              <a:tr h="868680">
+                <a:tc>
+                  <a:txBody>
+                    <a:bodyPr/>
+                    <a:lstStyle/>
+                    <a:p>
+                      <a:pPr marL="0" indent="0" algn="l">
+                        <a:buNone/>
+                      </a:pPr>
+                      <a:r>
+                        <a:rPr lang="en-US" sz="1300" b="1" dirty="0">
+                          <a:solidFill>
+                            <a:srgbClr val="222629"/>
+                          </a:solidFill>
+                          <a:latin typeface="Calibri" pitchFamily="34" charset="0"/>
+                          <a:ea typeface="Calibri" pitchFamily="34" charset="-122"/>
+                          <a:cs typeface="Calibri" pitchFamily="34" charset="-120"/>
+                        </a:rPr>
+                        <a:t>Baseline</a:t>
+                      </a:r>
+                      <a:endParaRPr lang="en-US" sz="1300" dirty="0">
+                        <a:latin typeface="Calibri" charset="0"/>
+                        <a:ea typeface="Calibri" charset="0"/>
+                        <a:cs typeface="Calibri" charset="0"/>
+                      </a:endParaRPr>
+                    </a:p>
+                  </a:txBody>
+                  <a:tcPr anchor="ctr">
+                    <a:lnL w="12700" cap="flat" cmpd="sng" algn="ctr">
+                      <a:solidFill>
+                        <a:srgbClr val="DDDDDD"/>
+                      </a:solidFill>
+                      <a:prstDash val="solid"/>
+                      <a:round/>
+                      <a:headEnd type="none" w="med" len="med"/>
+                      <a:tailEnd type="none" w="med" len="med"/>
+                    </a:lnL>
+                    <a:lnR w="12700" cap="flat" cmpd="sng" algn="ctr">
+                      <a:solidFill>
+                        <a:srgbClr val="DDDDDD"/>
+                      </a:solidFill>
+                      <a:prstDash val="solid"/>
+                      <a:round/>
+                      <a:headEnd type="none" w="med" len="med"/>
+                      <a:tailEnd type="none" w="med" len="med"/>
+                    </a:lnR>
+                    <a:lnT w="12700" cap="flat" cmpd="sng" algn="ctr">
+                      <a:solidFill>
+                        <a:srgbClr val="DDDDDD"/>
+                      </a:solidFill>
+                      <a:prstDash val="solid"/>
+                      <a:round/>
+                      <a:headEnd type="none" w="med" len="med"/>
+                      <a:tailEnd type="none" w="med" len="med"/>
+                    </a:lnT>
+                    <a:lnB w="12700" cap="flat" cmpd="sng" algn="ctr">
+                      <a:solidFill>
+                        <a:srgbClr val="DDDDDD"/>
+                      </a:solidFill>
+                      <a:prstDash val="solid"/>
+                      <a:round/>
+                      <a:headEnd type="none" w="med" len="med"/>
+                      <a:tailEnd type="none" w="med" len="med"/>
+                    </a:lnB>
+                    <a:solidFill>
+                      <a:srgbClr val="F0F2F4"/>
+                    </a:solidFill>
+                  </a:tcPr>
+                </a:tc>
+                <a:tc>
+                  <a:txBody>
+                    <a:bodyPr/>
+                    <a:lstStyle/>
+                    <a:p>
+                      <a:pPr marL="0" indent="0" algn="ctr">
+                        <a:buNone/>
+                      </a:pPr>
+                      <a:r>
+                        <a:rPr lang="en-US" sz="1300" dirty="0">
+                          <a:solidFill>
+                            <a:srgbClr val="222629"/>
+                          </a:solidFill>
+                          <a:latin typeface="Calibri" pitchFamily="34" charset="0"/>
+                          <a:ea typeface="Calibri" pitchFamily="34" charset="-122"/>
+                          <a:cs typeface="Calibri" pitchFamily="34" charset="-120"/>
+                        </a:rPr>
+                        <a:t>0.3201</a:t>
+                      </a:r>
+                      <a:endParaRPr lang="en-US" sz="1300" dirty="0">
+                        <a:latin typeface="Calibri" charset="0"/>
+                        <a:ea typeface="Calibri" charset="0"/>
+                        <a:cs typeface="Calibri" charset="0"/>
+                      </a:endParaRPr>
+                    </a:p>
+                  </a:txBody>
+                  <a:tcPr anchor="ctr">
+                    <a:lnL w="12700" cap="flat" cmpd="sng" algn="ctr">
+                      <a:solidFill>
+                        <a:srgbClr val="DDDDDD"/>
+                      </a:solidFill>
+                      <a:prstDash val="solid"/>
+                      <a:round/>
+                      <a:headEnd type="none" w="med" len="med"/>
+                      <a:tailEnd type="none" w="med" len="med"/>
+                    </a:lnL>
+                    <a:lnR w="12700" cap="flat" cmpd="sng" algn="ctr">
+                      <a:solidFill>
+                        <a:srgbClr val="DDDDDD"/>
+                      </a:solidFill>
+                      <a:prstDash val="solid"/>
+                      <a:round/>
+                      <a:headEnd type="none" w="med" len="med"/>
+                      <a:tailEnd type="none" w="med" len="med"/>
+                    </a:lnR>
+                    <a:lnT w="12700" cap="flat" cmpd="sng" algn="ctr">
+                      <a:solidFill>
+                        <a:srgbClr val="DDDDDD"/>
+                      </a:solidFill>
+                      <a:prstDash val="solid"/>
+                      <a:round/>
+                      <a:headEnd type="none" w="med" len="med"/>
+                      <a:tailEnd type="none" w="med" len="med"/>
+                    </a:lnT>
+                    <a:lnB w="12700" cap="flat" cmpd="sng" algn="ctr">
+                      <a:solidFill>
+                        <a:srgbClr val="DDDDDD"/>
+                      </a:solidFill>
+                      <a:prstDash val="solid"/>
+                      <a:round/>
+                      <a:headEnd type="none" w="med" len="med"/>
+                      <a:tailEnd type="none" w="med" len="med"/>
+                    </a:lnB>
+                    <a:solidFill>
+                      <a:srgbClr val="F0F2F4"/>
+                    </a:solidFill>
+                  </a:tcPr>
+                </a:tc>
+                <a:tc>
+                  <a:txBody>
+                    <a:bodyPr/>
+                    <a:lstStyle/>
+                    <a:p>
+                      <a:pPr marL="0" indent="0" algn="l">
+                        <a:buNone/>
+                      </a:pPr>
+                      <a:r>
+                        <a:rPr lang="en-US" sz="1300" dirty="0">
+                          <a:solidFill>
+                            <a:srgbClr val="222629"/>
+                          </a:solidFill>
+                          <a:latin typeface="Calibri" pitchFamily="34" charset="0"/>
+                          <a:ea typeface="Calibri" pitchFamily="34" charset="-122"/>
+                          <a:cs typeface="Calibri" pitchFamily="34" charset="-120"/>
+                        </a:rPr>
+                        <a:t>Parameters set by hand, no search yet</a:t>
+                      </a:r>
+                      <a:endParaRPr lang="en-US" sz="1300" dirty="0">
+                        <a:latin typeface="Calibri" charset="0"/>
+                        <a:ea typeface="Calibri" charset="0"/>
+                        <a:cs typeface="Calibri" charset="0"/>
+                      </a:endParaRPr>
+                    </a:p>
+                  </a:txBody>
+                  <a:tcPr anchor="ctr">
+                    <a:lnL w="12700" cap="flat" cmpd="sng" algn="ctr">
+                      <a:solidFill>
+                        <a:srgbClr val="DDDDDD"/>
+                      </a:solidFill>
+                      <a:prstDash val="solid"/>
+                      <a:round/>
+                      <a:headEnd type="none" w="med" len="med"/>
+                      <a:tailEnd type="none" w="med" len="med"/>
+                    </a:lnL>
+                    <a:lnR w="12700" cap="flat" cmpd="sng" algn="ctr">
+                      <a:solidFill>
+                        <a:srgbClr val="DDDDDD"/>
+                      </a:solidFill>
+                      <a:prstDash val="solid"/>
+                      <a:round/>
+                      <a:headEnd type="none" w="med" len="med"/>
+                      <a:tailEnd type="none" w="med" len="med"/>
+                    </a:lnR>
+                    <a:lnT w="12700" cap="flat" cmpd="sng" algn="ctr">
+                      <a:solidFill>
+                        <a:srgbClr val="DDDDDD"/>
+                      </a:solidFill>
+                      <a:prstDash val="solid"/>
+                      <a:round/>
+                      <a:headEnd type="none" w="med" len="med"/>
+                      <a:tailEnd type="none" w="med" len="med"/>
+                    </a:lnT>
+                    <a:lnB w="12700" cap="flat" cmpd="sng" algn="ctr">
+                      <a:solidFill>
+                        <a:srgbClr val="DDDDDD"/>
+                      </a:solidFill>
+                      <a:prstDash val="solid"/>
+                      <a:round/>
+                      <a:headEnd type="none" w="med" len="med"/>
+                      <a:tailEnd type="none" w="med" len="med"/>
+                    </a:lnB>
+                  </a:tcPr>
+                </a:tc>
+                <a:extLst>
+                  <a:ext uri="{0D108BD9-81ED-4DB2-BD59-A6C34878D82A}">
+                    <a16:rowId xmlns:a16="http://schemas.microsoft.com/office/drawing/2014/main" val="10001"/>
+                  </a:ext>
+                </a:extLst>
+              </a:tr>
+              <a:tr h="868680">
+                <a:tc>
+                  <a:txBody>
+                    <a:bodyPr/>
+                    <a:lstStyle/>
+                    <a:p>
+                      <a:pPr marL="0" indent="0" algn="l">
+                        <a:buNone/>
+                      </a:pPr>
+                      <a:r>
+                        <a:rPr lang="en-US" sz="1300" b="1" dirty="0">
+                          <a:solidFill>
+                            <a:srgbClr val="222629"/>
+                          </a:solidFill>
+                          <a:latin typeface="Calibri" pitchFamily="34" charset="0"/>
+                          <a:ea typeface="Calibri" pitchFamily="34" charset="-122"/>
+                          <a:cs typeface="Calibri" pitchFamily="34" charset="-120"/>
+                        </a:rPr>
+                        <a:t>Round 1</a:t>
+                      </a:r>
+                      <a:endParaRPr lang="en-US" sz="1300" dirty="0">
+                        <a:latin typeface="Calibri" charset="0"/>
+                        <a:ea typeface="Calibri" charset="0"/>
+                        <a:cs typeface="Calibri" charset="0"/>
+                      </a:endParaRPr>
+                    </a:p>
+                  </a:txBody>
+                  <a:tcPr anchor="ctr">
+                    <a:lnL w="12700" cap="flat" cmpd="sng" algn="ctr">
+                      <a:solidFill>
+                        <a:srgbClr val="DDDDDD"/>
+                      </a:solidFill>
+                      <a:prstDash val="solid"/>
+                      <a:round/>
+                      <a:headEnd type="none" w="med" len="med"/>
+                      <a:tailEnd type="none" w="med" len="med"/>
+                    </a:lnL>
+                    <a:lnR w="12700" cap="flat" cmpd="sng" algn="ctr">
+                      <a:solidFill>
+                        <a:srgbClr val="DDDDDD"/>
+                      </a:solidFill>
+                      <a:prstDash val="solid"/>
+                      <a:round/>
+                      <a:headEnd type="none" w="med" len="med"/>
+                      <a:tailEnd type="none" w="med" len="med"/>
+                    </a:lnR>
+                    <a:lnT w="12700" cap="flat" cmpd="sng" algn="ctr">
+                      <a:solidFill>
+                        <a:srgbClr val="DDDDDD"/>
+                      </a:solidFill>
+                      <a:prstDash val="solid"/>
+                      <a:round/>
+                      <a:headEnd type="none" w="med" len="med"/>
+                      <a:tailEnd type="none" w="med" len="med"/>
+                    </a:lnT>
+                    <a:lnB w="12700" cap="flat" cmpd="sng" algn="ctr">
+                      <a:solidFill>
+                        <a:srgbClr val="DDDDDD"/>
+                      </a:solidFill>
+                      <a:prstDash val="solid"/>
+                      <a:round/>
+                      <a:headEnd type="none" w="med" len="med"/>
+                      <a:tailEnd type="none" w="med" len="med"/>
+                    </a:lnB>
+                    <a:solidFill>
+                      <a:srgbClr val="F0F2F4"/>
+                    </a:solidFill>
+                  </a:tcPr>
+                </a:tc>
+                <a:tc>
+                  <a:txBody>
+                    <a:bodyPr/>
+                    <a:lstStyle/>
+                    <a:p>
+                      <a:pPr marL="0" indent="0" algn="ctr">
+                        <a:buNone/>
+                      </a:pPr>
+                      <a:r>
+                        <a:rPr lang="en-US" sz="1300" dirty="0">
+                          <a:solidFill>
+                            <a:srgbClr val="222629"/>
+                          </a:solidFill>
+                          <a:latin typeface="Calibri" pitchFamily="34" charset="0"/>
+                          <a:ea typeface="Calibri" pitchFamily="34" charset="-122"/>
+                          <a:cs typeface="Calibri" pitchFamily="34" charset="-120"/>
+                        </a:rPr>
+                        <a:t>0.4872</a:t>
+                      </a:r>
+                      <a:endParaRPr lang="en-US" sz="1300" dirty="0">
+                        <a:latin typeface="Calibri" charset="0"/>
+                        <a:ea typeface="Calibri" charset="0"/>
+                        <a:cs typeface="Calibri" charset="0"/>
+                      </a:endParaRPr>
+                    </a:p>
+                  </a:txBody>
+                  <a:tcPr anchor="ctr">
+                    <a:lnL w="12700" cap="flat" cmpd="sng" algn="ctr">
+                      <a:solidFill>
+                        <a:srgbClr val="DDDDDD"/>
+                      </a:solidFill>
+                      <a:prstDash val="solid"/>
+                      <a:round/>
+                      <a:headEnd type="none" w="med" len="med"/>
+                      <a:tailEnd type="none" w="med" len="med"/>
+                    </a:lnL>
+                    <a:lnR w="12700" cap="flat" cmpd="sng" algn="ctr">
+                      <a:solidFill>
+                        <a:srgbClr val="DDDDDD"/>
+                      </a:solidFill>
+                      <a:prstDash val="solid"/>
+                      <a:round/>
+                      <a:headEnd type="none" w="med" len="med"/>
+                      <a:tailEnd type="none" w="med" len="med"/>
+                    </a:lnR>
+                    <a:lnT w="12700" cap="flat" cmpd="sng" algn="ctr">
+                      <a:solidFill>
+                        <a:srgbClr val="DDDDDD"/>
+                      </a:solidFill>
+                      <a:prstDash val="solid"/>
+                      <a:round/>
+                      <a:headEnd type="none" w="med" len="med"/>
+                      <a:tailEnd type="none" w="med" len="med"/>
+                    </a:lnT>
+                    <a:lnB w="12700" cap="flat" cmpd="sng" algn="ctr">
+                      <a:solidFill>
+                        <a:srgbClr val="DDDDDD"/>
+                      </a:solidFill>
+                      <a:prstDash val="solid"/>
+                      <a:round/>
+                      <a:headEnd type="none" w="med" len="med"/>
+                      <a:tailEnd type="none" w="med" len="med"/>
+                    </a:lnB>
+                    <a:solidFill>
+                      <a:srgbClr val="F0F2F4"/>
+                    </a:solidFill>
+                  </a:tcPr>
+                </a:tc>
+                <a:tc>
+                  <a:txBody>
+                    <a:bodyPr/>
+                    <a:lstStyle/>
+                    <a:p>
+                      <a:pPr marL="0" indent="0" algn="l">
+                        <a:buNone/>
+                      </a:pPr>
+                      <a:r>
+                        <a:rPr lang="en-US" sz="1300" dirty="0">
+                          <a:solidFill>
+                            <a:srgbClr val="222629"/>
+                          </a:solidFill>
+                          <a:latin typeface="Calibri" pitchFamily="34" charset="0"/>
+                          <a:ea typeface="Calibri" pitchFamily="34" charset="-122"/>
+                          <a:cs typeface="Calibri" pitchFamily="34" charset="-120"/>
+                        </a:rPr>
+                        <a:t>First grid search over block_size, C, morphology kernels and </a:t>
+                      </a:r>
+                      <a:r>
+                        <a:rPr lang="en-US" sz="1300" dirty="0" err="1">
+                          <a:solidFill>
+                            <a:srgbClr val="222629"/>
+                          </a:solidFill>
+                          <a:latin typeface="Calibri" pitchFamily="34" charset="0"/>
+                          <a:ea typeface="Calibri" pitchFamily="34" charset="-122"/>
+                          <a:cs typeface="Calibri" pitchFamily="34" charset="-120"/>
+                        </a:rPr>
+                        <a:t>min_area</a:t>
+                      </a:r>
+                      <a:endParaRPr lang="en-US" sz="1300" dirty="0">
+                        <a:latin typeface="Calibri" charset="0"/>
+                        <a:ea typeface="Calibri" charset="0"/>
+                        <a:cs typeface="Calibri" charset="0"/>
+                      </a:endParaRPr>
+                    </a:p>
+                  </a:txBody>
+                  <a:tcPr anchor="ctr">
+                    <a:lnL w="12700" cap="flat" cmpd="sng" algn="ctr">
+                      <a:solidFill>
+                        <a:srgbClr val="DDDDDD"/>
+                      </a:solidFill>
+                      <a:prstDash val="solid"/>
+                      <a:round/>
+                      <a:headEnd type="none" w="med" len="med"/>
+                      <a:tailEnd type="none" w="med" len="med"/>
+                    </a:lnL>
+                    <a:lnR w="12700" cap="flat" cmpd="sng" algn="ctr">
+                      <a:solidFill>
+                        <a:srgbClr val="DDDDDD"/>
+                      </a:solidFill>
+                      <a:prstDash val="solid"/>
+                      <a:round/>
+                      <a:headEnd type="none" w="med" len="med"/>
+                      <a:tailEnd type="none" w="med" len="med"/>
+                    </a:lnR>
+                    <a:lnT w="12700" cap="flat" cmpd="sng" algn="ctr">
+                      <a:solidFill>
+                        <a:srgbClr val="DDDDDD"/>
+                      </a:solidFill>
+                      <a:prstDash val="solid"/>
+                      <a:round/>
+                      <a:headEnd type="none" w="med" len="med"/>
+                      <a:tailEnd type="none" w="med" len="med"/>
+                    </a:lnT>
+                    <a:lnB w="12700" cap="flat" cmpd="sng" algn="ctr">
+                      <a:solidFill>
+                        <a:srgbClr val="DDDDDD"/>
+                      </a:solidFill>
+                      <a:prstDash val="solid"/>
+                      <a:round/>
+                      <a:headEnd type="none" w="med" len="med"/>
+                      <a:tailEnd type="none" w="med" len="med"/>
+                    </a:lnB>
+                  </a:tcPr>
+                </a:tc>
+                <a:extLst>
+                  <a:ext uri="{0D108BD9-81ED-4DB2-BD59-A6C34878D82A}">
+                    <a16:rowId xmlns:a16="http://schemas.microsoft.com/office/drawing/2014/main" val="10002"/>
+                  </a:ext>
+                </a:extLst>
+              </a:tr>
+              <a:tr h="868680">
+                <a:tc>
+                  <a:txBody>
+                    <a:bodyPr/>
+                    <a:lstStyle/>
+                    <a:p>
+                      <a:pPr marL="0" indent="0" algn="l">
+                        <a:buNone/>
+                      </a:pPr>
+                      <a:r>
+                        <a:rPr lang="en-US" sz="1300" b="1" dirty="0">
+                          <a:solidFill>
+                            <a:srgbClr val="222629"/>
+                          </a:solidFill>
+                          <a:latin typeface="Calibri" pitchFamily="34" charset="0"/>
+                          <a:ea typeface="Calibri" pitchFamily="34" charset="-122"/>
+                          <a:cs typeface="Calibri" pitchFamily="34" charset="-120"/>
+                        </a:rPr>
+                        <a:t>Round 2</a:t>
+                      </a:r>
+                      <a:endParaRPr lang="en-US" sz="1300" dirty="0">
+                        <a:latin typeface="Calibri" charset="0"/>
+                        <a:ea typeface="Calibri" charset="0"/>
+                        <a:cs typeface="Calibri" charset="0"/>
+                      </a:endParaRPr>
+                    </a:p>
+                  </a:txBody>
+                  <a:tcPr anchor="ctr">
+                    <a:lnL w="12700" cap="flat" cmpd="sng" algn="ctr">
+                      <a:solidFill>
+                        <a:srgbClr val="DDDDDD"/>
+                      </a:solidFill>
+                      <a:prstDash val="solid"/>
+                      <a:round/>
+                      <a:headEnd type="none" w="med" len="med"/>
+                      <a:tailEnd type="none" w="med" len="med"/>
+                    </a:lnL>
+                    <a:lnR w="12700" cap="flat" cmpd="sng" algn="ctr">
+                      <a:solidFill>
+                        <a:srgbClr val="DDDDDD"/>
+                      </a:solidFill>
+                      <a:prstDash val="solid"/>
+                      <a:round/>
+                      <a:headEnd type="none" w="med" len="med"/>
+                      <a:tailEnd type="none" w="med" len="med"/>
+                    </a:lnR>
+                    <a:lnT w="12700" cap="flat" cmpd="sng" algn="ctr">
+                      <a:solidFill>
+                        <a:srgbClr val="DDDDDD"/>
+                      </a:solidFill>
+                      <a:prstDash val="solid"/>
+                      <a:round/>
+                      <a:headEnd type="none" w="med" len="med"/>
+                      <a:tailEnd type="none" w="med" len="med"/>
+                    </a:lnT>
+                    <a:lnB w="12700" cap="flat" cmpd="sng" algn="ctr">
+                      <a:solidFill>
+                        <a:srgbClr val="DDDDDD"/>
+                      </a:solidFill>
+                      <a:prstDash val="solid"/>
+                      <a:round/>
+                      <a:headEnd type="none" w="med" len="med"/>
+                      <a:tailEnd type="none" w="med" len="med"/>
+                    </a:lnB>
+                    <a:solidFill>
+                      <a:srgbClr val="F0F2F4"/>
+                    </a:solidFill>
+                  </a:tcPr>
+                </a:tc>
+                <a:tc>
+                  <a:txBody>
+                    <a:bodyPr/>
+                    <a:lstStyle/>
+                    <a:p>
+                      <a:pPr marL="0" indent="0" algn="ctr">
+                        <a:buNone/>
+                      </a:pPr>
+                      <a:r>
+                        <a:rPr lang="en-US" sz="1300" dirty="0">
+                          <a:solidFill>
+                            <a:srgbClr val="222629"/>
+                          </a:solidFill>
+                          <a:latin typeface="Calibri" pitchFamily="34" charset="0"/>
+                          <a:ea typeface="Calibri" pitchFamily="34" charset="-122"/>
+                          <a:cs typeface="Calibri" pitchFamily="34" charset="-120"/>
+                        </a:rPr>
+                        <a:t>0.4991</a:t>
+                      </a:r>
+                      <a:endParaRPr lang="en-US" sz="1300" dirty="0">
+                        <a:latin typeface="Calibri" charset="0"/>
+                        <a:ea typeface="Calibri" charset="0"/>
+                        <a:cs typeface="Calibri" charset="0"/>
+                      </a:endParaRPr>
+                    </a:p>
+                  </a:txBody>
+                  <a:tcPr anchor="ctr">
+                    <a:lnL w="12700" cap="flat" cmpd="sng" algn="ctr">
+                      <a:solidFill>
+                        <a:srgbClr val="DDDDDD"/>
+                      </a:solidFill>
+                      <a:prstDash val="solid"/>
+                      <a:round/>
+                      <a:headEnd type="none" w="med" len="med"/>
+                      <a:tailEnd type="none" w="med" len="med"/>
+                    </a:lnL>
+                    <a:lnR w="12700" cap="flat" cmpd="sng" algn="ctr">
+                      <a:solidFill>
+                        <a:srgbClr val="DDDDDD"/>
+                      </a:solidFill>
+                      <a:prstDash val="solid"/>
+                      <a:round/>
+                      <a:headEnd type="none" w="med" len="med"/>
+                      <a:tailEnd type="none" w="med" len="med"/>
+                    </a:lnR>
+                    <a:lnT w="12700" cap="flat" cmpd="sng" algn="ctr">
+                      <a:solidFill>
+                        <a:srgbClr val="DDDDDD"/>
+                      </a:solidFill>
+                      <a:prstDash val="solid"/>
+                      <a:round/>
+                      <a:headEnd type="none" w="med" len="med"/>
+                      <a:tailEnd type="none" w="med" len="med"/>
+                    </a:lnT>
+                    <a:lnB w="12700" cap="flat" cmpd="sng" algn="ctr">
+                      <a:solidFill>
+                        <a:srgbClr val="DDDDDD"/>
+                      </a:solidFill>
+                      <a:prstDash val="solid"/>
+                      <a:round/>
+                      <a:headEnd type="none" w="med" len="med"/>
+                      <a:tailEnd type="none" w="med" len="med"/>
+                    </a:lnB>
+                    <a:solidFill>
+                      <a:srgbClr val="F0F2F4"/>
+                    </a:solidFill>
+                  </a:tcPr>
+                </a:tc>
+                <a:tc>
+                  <a:txBody>
+                    <a:bodyPr/>
+                    <a:lstStyle/>
+                    <a:p>
+                      <a:pPr marL="0" indent="0" algn="l">
+                        <a:buNone/>
+                      </a:pPr>
+                      <a:r>
+                        <a:rPr lang="en-US" sz="1300" dirty="0">
+                          <a:solidFill>
+                            <a:srgbClr val="222629"/>
+                          </a:solidFill>
+                          <a:latin typeface="Calibri" pitchFamily="34" charset="0"/>
+                          <a:ea typeface="Calibri" pitchFamily="34" charset="-122"/>
+                          <a:cs typeface="Calibri" pitchFamily="34" charset="-120"/>
+                        </a:rPr>
+                        <a:t>Widened the grid (round 1 hit the edges) and allowed skipping a morphological step</a:t>
+                      </a:r>
+                      <a:endParaRPr lang="en-US" sz="1300" dirty="0">
+                        <a:latin typeface="Calibri" charset="0"/>
+                        <a:ea typeface="Calibri" charset="0"/>
+                        <a:cs typeface="Calibri" charset="0"/>
+                      </a:endParaRPr>
+                    </a:p>
+                  </a:txBody>
+                  <a:tcPr anchor="ctr">
+                    <a:lnL w="12700" cap="flat" cmpd="sng" algn="ctr">
+                      <a:solidFill>
+                        <a:srgbClr val="DDDDDD"/>
+                      </a:solidFill>
+                      <a:prstDash val="solid"/>
+                      <a:round/>
+                      <a:headEnd type="none" w="med" len="med"/>
+                      <a:tailEnd type="none" w="med" len="med"/>
+                    </a:lnL>
+                    <a:lnR w="12700" cap="flat" cmpd="sng" algn="ctr">
+                      <a:solidFill>
+                        <a:srgbClr val="DDDDDD"/>
+                      </a:solidFill>
+                      <a:prstDash val="solid"/>
+                      <a:round/>
+                      <a:headEnd type="none" w="med" len="med"/>
+                      <a:tailEnd type="none" w="med" len="med"/>
+                    </a:lnR>
+                    <a:lnT w="12700" cap="flat" cmpd="sng" algn="ctr">
+                      <a:solidFill>
+                        <a:srgbClr val="DDDDDD"/>
+                      </a:solidFill>
+                      <a:prstDash val="solid"/>
+                      <a:round/>
+                      <a:headEnd type="none" w="med" len="med"/>
+                      <a:tailEnd type="none" w="med" len="med"/>
+                    </a:lnT>
+                    <a:lnB w="12700" cap="flat" cmpd="sng" algn="ctr">
+                      <a:solidFill>
+                        <a:srgbClr val="DDDDDD"/>
+                      </a:solidFill>
+                      <a:prstDash val="solid"/>
+                      <a:round/>
+                      <a:headEnd type="none" w="med" len="med"/>
+                      <a:tailEnd type="none" w="med" len="med"/>
+                    </a:lnB>
+                  </a:tcPr>
+                </a:tc>
+                <a:extLst>
+                  <a:ext uri="{0D108BD9-81ED-4DB2-BD59-A6C34878D82A}">
+                    <a16:rowId xmlns:a16="http://schemas.microsoft.com/office/drawing/2014/main" val="10003"/>
+                  </a:ext>
+                </a:extLst>
+              </a:tr>
+              <a:tr h="868680">
+                <a:tc>
+                  <a:txBody>
+                    <a:bodyPr/>
+                    <a:lstStyle/>
+                    <a:p>
+                      <a:pPr marL="0" indent="0" algn="l">
+                        <a:buNone/>
+                      </a:pPr>
+                      <a:r>
+                        <a:rPr lang="en-US" sz="1300" b="1" dirty="0">
+                          <a:solidFill>
+                            <a:srgbClr val="B5670F"/>
+                          </a:solidFill>
+                          <a:latin typeface="Calibri" pitchFamily="34" charset="0"/>
+                          <a:ea typeface="Calibri" pitchFamily="34" charset="-122"/>
+                          <a:cs typeface="Calibri" pitchFamily="34" charset="-120"/>
+                        </a:rPr>
+                        <a:t>Round 3</a:t>
+                      </a:r>
+                      <a:endParaRPr lang="en-US" sz="1300" dirty="0">
+                        <a:latin typeface="Calibri" charset="0"/>
+                        <a:ea typeface="Calibri" charset="0"/>
+                        <a:cs typeface="Calibri" charset="0"/>
+                      </a:endParaRPr>
+                    </a:p>
+                  </a:txBody>
+                  <a:tcPr anchor="ctr">
+                    <a:lnL w="12700" cap="flat" cmpd="sng" algn="ctr">
+                      <a:solidFill>
+                        <a:srgbClr val="DDDDDD"/>
+                      </a:solidFill>
+                      <a:prstDash val="solid"/>
+                      <a:round/>
+                      <a:headEnd type="none" w="med" len="med"/>
+                      <a:tailEnd type="none" w="med" len="med"/>
+                    </a:lnL>
+                    <a:lnR w="12700" cap="flat" cmpd="sng" algn="ctr">
+                      <a:solidFill>
+                        <a:srgbClr val="DDDDDD"/>
+                      </a:solidFill>
+                      <a:prstDash val="solid"/>
+                      <a:round/>
+                      <a:headEnd type="none" w="med" len="med"/>
+                      <a:tailEnd type="none" w="med" len="med"/>
+                    </a:lnR>
+                    <a:lnT w="12700" cap="flat" cmpd="sng" algn="ctr">
+                      <a:solidFill>
+                        <a:srgbClr val="DDDDDD"/>
+                      </a:solidFill>
+                      <a:prstDash val="solid"/>
+                      <a:round/>
+                      <a:headEnd type="none" w="med" len="med"/>
+                      <a:tailEnd type="none" w="med" len="med"/>
+                    </a:lnT>
+                    <a:lnB w="12700" cap="flat" cmpd="sng" algn="ctr">
+                      <a:solidFill>
+                        <a:srgbClr val="DDDDDD"/>
+                      </a:solidFill>
+                      <a:prstDash val="solid"/>
+                      <a:round/>
+                      <a:headEnd type="none" w="med" len="med"/>
+                      <a:tailEnd type="none" w="med" len="med"/>
+                    </a:lnB>
+                    <a:solidFill>
+                      <a:srgbClr val="FBEEDD"/>
+                    </a:solidFill>
+                  </a:tcPr>
+                </a:tc>
+                <a:tc>
+                  <a:txBody>
+                    <a:bodyPr/>
+                    <a:lstStyle/>
+                    <a:p>
+                      <a:pPr marL="0" indent="0" algn="ctr">
+                        <a:buNone/>
+                      </a:pPr>
+                      <a:r>
+                        <a:rPr lang="en-US" sz="1300" b="1" dirty="0">
+                          <a:solidFill>
+                            <a:srgbClr val="B5670F"/>
+                          </a:solidFill>
+                          <a:latin typeface="Calibri" pitchFamily="34" charset="0"/>
+                          <a:ea typeface="Calibri" pitchFamily="34" charset="-122"/>
+                          <a:cs typeface="Calibri" pitchFamily="34" charset="-120"/>
+                        </a:rPr>
+                        <a:t>0.5024</a:t>
+                      </a:r>
+                      <a:endParaRPr lang="en-US" sz="1300" dirty="0">
+                        <a:latin typeface="Calibri" charset="0"/>
+                        <a:ea typeface="Calibri" charset="0"/>
+                        <a:cs typeface="Calibri" charset="0"/>
+                      </a:endParaRPr>
+                    </a:p>
+                  </a:txBody>
+                  <a:tcPr anchor="ctr">
+                    <a:lnL w="12700" cap="flat" cmpd="sng" algn="ctr">
+                      <a:solidFill>
+                        <a:srgbClr val="DDDDDD"/>
+                      </a:solidFill>
+                      <a:prstDash val="solid"/>
+                      <a:round/>
+                      <a:headEnd type="none" w="med" len="med"/>
+                      <a:tailEnd type="none" w="med" len="med"/>
+                    </a:lnL>
+                    <a:lnR w="12700" cap="flat" cmpd="sng" algn="ctr">
+                      <a:solidFill>
+                        <a:srgbClr val="DDDDDD"/>
+                      </a:solidFill>
+                      <a:prstDash val="solid"/>
+                      <a:round/>
+                      <a:headEnd type="none" w="med" len="med"/>
+                      <a:tailEnd type="none" w="med" len="med"/>
+                    </a:lnR>
+                    <a:lnT w="12700" cap="flat" cmpd="sng" algn="ctr">
+                      <a:solidFill>
+                        <a:srgbClr val="DDDDDD"/>
+                      </a:solidFill>
+                      <a:prstDash val="solid"/>
+                      <a:round/>
+                      <a:headEnd type="none" w="med" len="med"/>
+                      <a:tailEnd type="none" w="med" len="med"/>
+                    </a:lnT>
+                    <a:lnB w="12700" cap="flat" cmpd="sng" algn="ctr">
+                      <a:solidFill>
+                        <a:srgbClr val="DDDDDD"/>
+                      </a:solidFill>
+                      <a:prstDash val="solid"/>
+                      <a:round/>
+                      <a:headEnd type="none" w="med" len="med"/>
+                      <a:tailEnd type="none" w="med" len="med"/>
+                    </a:lnB>
+                    <a:solidFill>
+                      <a:srgbClr val="FBEEDD"/>
+                    </a:solidFill>
+                  </a:tcPr>
+                </a:tc>
+                <a:tc>
+                  <a:txBody>
+                    <a:bodyPr/>
+                    <a:lstStyle/>
+                    <a:p>
+                      <a:pPr marL="0" indent="0" algn="l">
+                        <a:buNone/>
+                      </a:pPr>
+                      <a:r>
+                        <a:rPr lang="en-US" sz="1300" dirty="0">
+                          <a:solidFill>
+                            <a:srgbClr val="222629"/>
+                          </a:solidFill>
+                          <a:latin typeface="Calibri" pitchFamily="34" charset="0"/>
+                          <a:ea typeface="Calibri" pitchFamily="34" charset="-122"/>
+                          <a:cs typeface="Calibri" pitchFamily="34" charset="-120"/>
+                        </a:rPr>
+                        <a:t>Area counted as true pixel count, shape criterion changed from aspect ratio to circularity, and a train/test split picks the "good and stable" set (gap only 0.001)</a:t>
+                      </a:r>
+                      <a:endParaRPr lang="en-US" sz="1300" dirty="0">
+                        <a:latin typeface="Calibri" charset="0"/>
+                        <a:ea typeface="Calibri" charset="0"/>
+                        <a:cs typeface="Calibri" charset="0"/>
+                      </a:endParaRPr>
+                    </a:p>
+                  </a:txBody>
+                  <a:tcPr anchor="ctr">
+                    <a:lnL w="12700" cap="flat" cmpd="sng" algn="ctr">
+                      <a:solidFill>
+                        <a:srgbClr val="DDDDDD"/>
+                      </a:solidFill>
+                      <a:prstDash val="solid"/>
+                      <a:round/>
+                      <a:headEnd type="none" w="med" len="med"/>
+                      <a:tailEnd type="none" w="med" len="med"/>
+                    </a:lnL>
+                    <a:lnR w="12700" cap="flat" cmpd="sng" algn="ctr">
+                      <a:solidFill>
+                        <a:srgbClr val="DDDDDD"/>
+                      </a:solidFill>
+                      <a:prstDash val="solid"/>
+                      <a:round/>
+                      <a:headEnd type="none" w="med" len="med"/>
+                      <a:tailEnd type="none" w="med" len="med"/>
+                    </a:lnR>
+                    <a:lnT w="12700" cap="flat" cmpd="sng" algn="ctr">
+                      <a:solidFill>
+                        <a:srgbClr val="DDDDDD"/>
+                      </a:solidFill>
+                      <a:prstDash val="solid"/>
+                      <a:round/>
+                      <a:headEnd type="none" w="med" len="med"/>
+                      <a:tailEnd type="none" w="med" len="med"/>
+                    </a:lnT>
+                    <a:lnB w="12700" cap="flat" cmpd="sng" algn="ctr">
+                      <a:solidFill>
+                        <a:srgbClr val="DDDDDD"/>
+                      </a:solidFill>
+                      <a:prstDash val="solid"/>
+                      <a:round/>
+                      <a:headEnd type="none" w="med" len="med"/>
+                      <a:tailEnd type="none" w="med" len="med"/>
+                    </a:lnB>
+                    <a:solidFill>
+                      <a:srgbClr val="FBEEDD"/>
+                    </a:solidFill>
+                  </a:tcPr>
+                </a:tc>
+                <a:extLst>
+                  <a:ext uri="{0D108BD9-81ED-4DB2-BD59-A6C34878D82A}">
+                    <a16:rowId xmlns:a16="http://schemas.microsoft.com/office/drawing/2014/main" val="10004"/>
+                  </a:ext>
+                </a:extLst>
+              </a:tr>
+            </a:tbl>
+          </a:graphicData>
+        </a:graphic>
+      </p:graphicFrame>
     </p:spTree>
   </p:cSld>
   <p:clrMapOvr>
@@ -2966,6 +3234,7 @@
         <a:solidFill>
           <a:srgbClr val="F4F4F2"/>
         </a:solidFill>
+        <a:effectLst/>
       </p:bgPr>
     </p:bg>
     <p:spTree>
@@ -3003,7 +3272,7 @@
           <a:bodyPr wrap="square" rtlCol="0" anchor="ctr"/>
           <a:lstStyle/>
           <a:p>
-            <a:pPr indent="0" marL="0">
+            <a:pPr marL="0" indent="0">
               <a:buNone/>
             </a:pPr>
             <a:r>
@@ -3042,11 +3311,11 @@
           <a:bodyPr wrap="square" rtlCol="0" anchor="ctr"/>
           <a:lstStyle/>
           <a:p>
-            <a:pPr indent="0" marL="0">
+            <a:pPr marL="0" indent="0">
               <a:buNone/>
             </a:pPr>
             <a:r>
-              <a:rPr lang="en-US" sz="1500" i="1" dirty="0">
+              <a:rPr lang="en-US" sz="1500" dirty="0">
                 <a:solidFill>
                   <a:srgbClr val="5B6770"/>
                 </a:solidFill>
@@ -3062,22 +3331,22 @@
       </p:sp>
       <p:pic>
         <p:nvPicPr>
-          <p:cNvPr id="4" name="Image 0" descr="/sessions/eager-charming-feynman/mnt/MiniProject/docs/figures/success_cases.png">    </p:cNvPr>
+          <p:cNvPr id="4" name="Image 0" descr="/sessions/eager-charming-feynman/mnt/MiniProject/docs/figures/success_cases.png"/>
           <p:cNvPicPr>
             <a:picLocks noChangeAspect="1"/>
           </p:cNvPicPr>
           <p:nvPr/>
         </p:nvPicPr>
         <p:blipFill>
-          <a:blip r:embed="rId1"/>
+          <a:blip r:embed="rId3"/>
           <a:stretch>
             <a:fillRect/>
           </a:stretch>
         </p:blipFill>
         <p:spPr>
           <a:xfrm>
-            <a:off x="1472626" y="1691640"/>
-            <a:ext cx="3546987" cy="3383280"/>
+            <a:off x="1123728" y="1756079"/>
+            <a:ext cx="4291579" cy="4093507"/>
           </a:xfrm>
           <a:prstGeom prst="rect">
             <a:avLst/>
@@ -3092,7 +3361,7 @@
         </p:nvSpPr>
         <p:spPr>
           <a:xfrm>
-            <a:off x="640080" y="5120640"/>
+            <a:off x="640079" y="5768114"/>
             <a:ext cx="5212080" cy="365760"/>
           </a:xfrm>
           <a:prstGeom prst="rect">
@@ -3105,7 +3374,7 @@
           <a:bodyPr wrap="square" rtlCol="0" anchor="ctr"/>
           <a:lstStyle/>
           <a:p>
-            <a:pPr algn="ctr" indent="0" marL="0">
+            <a:pPr marL="0" indent="0" algn="ctr">
               <a:buNone/>
             </a:pPr>
             <a:r>
@@ -3125,22 +3394,22 @@
       </p:sp>
       <p:pic>
         <p:nvPicPr>
-          <p:cNvPr id="6" name="Image 1" descr="/sessions/eager-charming-feynman/mnt/MiniProject/docs/figures/failure_cases.png">    </p:cNvPr>
+          <p:cNvPr id="6" name="Image 1" descr="/sessions/eager-charming-feynman/mnt/MiniProject/docs/figures/failure_cases.png"/>
           <p:cNvPicPr>
             <a:picLocks noChangeAspect="1"/>
           </p:cNvPicPr>
           <p:nvPr/>
         </p:nvPicPr>
         <p:blipFill>
-          <a:blip r:embed="rId2"/>
+          <a:blip r:embed="rId4"/>
           <a:stretch>
             <a:fillRect/>
           </a:stretch>
         </p:blipFill>
         <p:spPr>
           <a:xfrm>
-            <a:off x="7141906" y="1691640"/>
-            <a:ext cx="3546987" cy="3383280"/>
+            <a:off x="6688738" y="1691640"/>
+            <a:ext cx="4379534" cy="4177402"/>
           </a:xfrm>
           <a:prstGeom prst="rect">
             <a:avLst/>
@@ -3155,7 +3424,7 @@
         </p:nvSpPr>
         <p:spPr>
           <a:xfrm>
-            <a:off x="6309360" y="5120640"/>
+            <a:off x="6309359" y="5758386"/>
             <a:ext cx="5212080" cy="365760"/>
           </a:xfrm>
           <a:prstGeom prst="rect">
@@ -3168,7 +3437,7 @@
           <a:bodyPr wrap="square" rtlCol="0" anchor="ctr"/>
           <a:lstStyle/>
           <a:p>
-            <a:pPr algn="ctr" indent="0" marL="0">
+            <a:pPr marL="0" indent="0" algn="ctr">
               <a:buNone/>
             </a:pPr>
             <a:r>
@@ -3183,48 +3452,6 @@
               <a:t>Low scores — some are ground-truth issues, not detection errors</a:t>
             </a:r>
             <a:endParaRPr lang="en-US" sz="1200" dirty="0"/>
-          </a:p>
-        </p:txBody>
-      </p:sp>
-      <p:sp>
-        <p:nvSpPr>
-          <p:cNvPr id="8" name="Text 4"/>
-          <p:cNvSpPr/>
-          <p:nvPr/>
-        </p:nvSpPr>
-        <p:spPr>
-          <a:xfrm>
-            <a:off x="640080" y="5623560"/>
-            <a:ext cx="10881360" cy="822960"/>
-          </a:xfrm>
-          <a:prstGeom prst="rect">
-            <a:avLst/>
-          </a:prstGeom>
-          <a:noFill/>
-          <a:ln/>
-        </p:spPr>
-        <p:txBody>
-          <a:bodyPr wrap="square" rtlCol="0" anchor="t"/>
-          <a:lstStyle/>
-          <a:p>
-            <a:pPr algn="ctr" indent="0" marL="0">
-              <a:lnSpc>
-                <a:spcPct val="115000"/>
-              </a:lnSpc>
-              <a:buNone/>
-            </a:pPr>
-            <a:r>
-              <a:rPr lang="en-US" sz="1300" i="1" dirty="0">
-                <a:solidFill>
-                  <a:srgbClr val="5B6770"/>
-                </a:solidFill>
-                <a:latin typeface="Calibri" pitchFamily="34" charset="0"/>
-                <a:ea typeface="Calibri" pitchFamily="34" charset="-122"/>
-                <a:cs typeface="Calibri" pitchFamily="34" charset="-120"/>
-              </a:rPr>
-              <a:t>Image 021: the system finds real crazing on the painted lane line that CrackForest did not annotate → a pixel metric punishes finding what the annotator did not draw</a:t>
-            </a:r>
-            <a:endParaRPr lang="en-US" sz="1300" dirty="0"/>
           </a:p>
         </p:txBody>
       </p:sp>
@@ -3244,6 +3471,7 @@
         <a:solidFill>
           <a:srgbClr val="2E3338"/>
         </a:solidFill>
+        <a:effectLst/>
       </p:bgPr>
     </p:bg>
     <p:spTree>
@@ -3262,6 +3490,86 @@
       </p:grpSpPr>
       <p:sp>
         <p:nvSpPr>
+          <p:cNvPr id="29" name="Shape 2">
+            <a:extLst>
+              <a:ext uri="{FF2B5EF4-FFF2-40B4-BE49-F238E27FC236}">
+                <a16:creationId xmlns:a16="http://schemas.microsoft.com/office/drawing/2014/main" id="{3FF8DC1C-BB3A-1ECA-43D2-67C1A4A82D01}"/>
+              </a:ext>
+            </a:extLst>
+          </p:cNvPr>
+          <p:cNvSpPr/>
+          <p:nvPr/>
+        </p:nvSpPr>
+        <p:spPr>
+          <a:xfrm>
+            <a:off x="7900805" y="2272381"/>
+            <a:ext cx="3306626" cy="2313237"/>
+          </a:xfrm>
+          <a:prstGeom prst="roundRect">
+            <a:avLst>
+              <a:gd name="adj" fmla="val 3182"/>
+            </a:avLst>
+          </a:prstGeom>
+          <a:solidFill>
+            <a:srgbClr val="3A4046"/>
+          </a:solidFill>
+          <a:ln w="12700">
+            <a:solidFill>
+              <a:srgbClr val="4E555B"/>
+            </a:solidFill>
+            <a:prstDash val="solid"/>
+          </a:ln>
+        </p:spPr>
+        <p:txBody>
+          <a:bodyPr/>
+          <a:lstStyle/>
+          <a:p>
+            <a:endParaRPr lang="en-US"/>
+          </a:p>
+        </p:txBody>
+      </p:sp>
+      <p:sp>
+        <p:nvSpPr>
+          <p:cNvPr id="27" name="Shape 2">
+            <a:extLst>
+              <a:ext uri="{FF2B5EF4-FFF2-40B4-BE49-F238E27FC236}">
+                <a16:creationId xmlns:a16="http://schemas.microsoft.com/office/drawing/2014/main" id="{C41723E4-E0E2-EB85-7307-FD83A3FD29AE}"/>
+              </a:ext>
+            </a:extLst>
+          </p:cNvPr>
+          <p:cNvSpPr/>
+          <p:nvPr/>
+        </p:nvSpPr>
+        <p:spPr>
+          <a:xfrm>
+            <a:off x="4422194" y="2272382"/>
+            <a:ext cx="3306626" cy="2313237"/>
+          </a:xfrm>
+          <a:prstGeom prst="roundRect">
+            <a:avLst>
+              <a:gd name="adj" fmla="val 3182"/>
+            </a:avLst>
+          </a:prstGeom>
+          <a:solidFill>
+            <a:srgbClr val="3A4046"/>
+          </a:solidFill>
+          <a:ln w="12700">
+            <a:solidFill>
+              <a:srgbClr val="4E555B"/>
+            </a:solidFill>
+            <a:prstDash val="solid"/>
+          </a:ln>
+        </p:spPr>
+        <p:txBody>
+          <a:bodyPr/>
+          <a:lstStyle/>
+          <a:p>
+            <a:endParaRPr lang="en-US"/>
+          </a:p>
+        </p:txBody>
+      </p:sp>
+      <p:sp>
+        <p:nvSpPr>
           <p:cNvPr id="2" name="Text 0"/>
           <p:cNvSpPr/>
           <p:nvPr/>
@@ -3281,7 +3589,7 @@
           <a:bodyPr wrap="square" rtlCol="0" anchor="ctr"/>
           <a:lstStyle/>
           <a:p>
-            <a:pPr indent="0" marL="0">
+            <a:pPr marL="0" indent="0">
               <a:buNone/>
             </a:pPr>
             <a:r>
@@ -3320,11 +3628,11 @@
           <a:bodyPr wrap="square" rtlCol="0" anchor="ctr"/>
           <a:lstStyle/>
           <a:p>
-            <a:pPr indent="0" marL="0">
+            <a:pPr marL="0" indent="0">
               <a:buNone/>
             </a:pPr>
             <a:r>
-              <a:rPr lang="en-US" sz="1700" i="1" dirty="0">
+              <a:rPr lang="en-US" sz="1700" dirty="0">
                 <a:solidFill>
                   <a:srgbClr val="E8871E"/>
                 </a:solidFill>
@@ -3332,7 +3640,7 @@
                 <a:ea typeface="Calibri" pitchFamily="34" charset="-122"/>
                 <a:cs typeface="Calibri" pitchFamily="34" charset="-120"/>
               </a:rPr>
-              <a:t>The pipeline runs at 7.0 ms/image (143 img/s) — light enough for small hardware</a:t>
+              <a:t>The pipeline runs at 7.0 ms/image (143 img/s). Light enough for small hardware</a:t>
             </a:r>
             <a:endParaRPr lang="en-US" sz="1700" dirty="0"/>
           </a:p>
@@ -3346,8 +3654,8 @@
         </p:nvSpPr>
         <p:spPr>
           <a:xfrm>
-            <a:off x="731520" y="2286000"/>
-            <a:ext cx="2651760" cy="2011680"/>
+            <a:off x="943583" y="2272383"/>
+            <a:ext cx="3306626" cy="2313237"/>
           </a:xfrm>
           <a:prstGeom prst="roundRect">
             <a:avLst>
@@ -3364,6 +3672,13 @@
             <a:prstDash val="solid"/>
           </a:ln>
         </p:spPr>
+        <p:txBody>
+          <a:bodyPr/>
+          <a:lstStyle/>
+          <a:p>
+            <a:endParaRPr lang="en-US"/>
+          </a:p>
+        </p:txBody>
       </p:sp>
       <p:sp>
         <p:nvSpPr>
@@ -3373,7 +3688,7 @@
         </p:nvSpPr>
         <p:spPr>
           <a:xfrm>
-            <a:off x="1005840" y="2560320"/>
+            <a:off x="1217903" y="2546704"/>
             <a:ext cx="594360" cy="594360"/>
           </a:xfrm>
           <a:prstGeom prst="ellipse">
@@ -3384,6 +3699,13 @@
           </a:solidFill>
           <a:ln/>
         </p:spPr>
+        <p:txBody>
+          <a:bodyPr/>
+          <a:lstStyle/>
+          <a:p>
+            <a:endParaRPr lang="en-US"/>
+          </a:p>
+        </p:txBody>
       </p:sp>
       <p:sp>
         <p:nvSpPr>
@@ -3393,7 +3715,7 @@
         </p:nvSpPr>
         <p:spPr>
           <a:xfrm>
-            <a:off x="1005840" y="2560320"/>
+            <a:off x="1217903" y="2546704"/>
             <a:ext cx="594360" cy="594360"/>
           </a:xfrm>
           <a:prstGeom prst="rect">
@@ -3406,7 +3728,7 @@
           <a:bodyPr wrap="square" rtlCol="0" anchor="ctr"/>
           <a:lstStyle/>
           <a:p>
-            <a:pPr algn="ctr" indent="0" marL="0">
+            <a:pPr marL="0" indent="0" algn="ctr">
               <a:buNone/>
             </a:pPr>
             <a:r>
@@ -3432,7 +3754,7 @@
         </p:nvSpPr>
         <p:spPr>
           <a:xfrm>
-            <a:off x="1005840" y="3246120"/>
+            <a:off x="1217903" y="3232504"/>
             <a:ext cx="2103120" cy="365760"/>
           </a:xfrm>
           <a:prstGeom prst="rect">
@@ -3445,7 +3767,7 @@
           <a:bodyPr wrap="square" rtlCol="0" anchor="ctr"/>
           <a:lstStyle/>
           <a:p>
-            <a:pPr indent="0" marL="0">
+            <a:pPr marL="0" indent="0">
               <a:buNone/>
             </a:pPr>
             <a:r>
@@ -3471,8 +3793,8 @@
         </p:nvSpPr>
         <p:spPr>
           <a:xfrm>
-            <a:off x="1005840" y="3611880"/>
-            <a:ext cx="2148840" cy="640080"/>
+            <a:off x="1217902" y="3689704"/>
+            <a:ext cx="2555651" cy="640080"/>
           </a:xfrm>
           <a:prstGeom prst="rect">
             <a:avLst/>
@@ -3484,7 +3806,7 @@
           <a:bodyPr wrap="square" rtlCol="0" anchor="t"/>
           <a:lstStyle/>
           <a:p>
-            <a:pPr indent="0" marL="0">
+            <a:pPr marL="0" indent="0">
               <a:lnSpc>
                 <a:spcPct val="115000"/>
               </a:lnSpc>
@@ -3507,40 +3829,13 @@
       </p:sp>
       <p:sp>
         <p:nvSpPr>
-          <p:cNvPr id="9" name="Shape 7"/>
-          <p:cNvSpPr/>
-          <p:nvPr/>
-        </p:nvSpPr>
-        <p:spPr>
-          <a:xfrm>
-            <a:off x="3566160" y="2286000"/>
-            <a:ext cx="2651760" cy="2011680"/>
-          </a:xfrm>
-          <a:prstGeom prst="roundRect">
-            <a:avLst>
-              <a:gd name="adj" fmla="val 3182"/>
-            </a:avLst>
-          </a:prstGeom>
-          <a:solidFill>
-            <a:srgbClr val="3A4046"/>
-          </a:solidFill>
-          <a:ln w="12700">
-            <a:solidFill>
-              <a:srgbClr val="4E555B"/>
-            </a:solidFill>
-            <a:prstDash val="solid"/>
-          </a:ln>
-        </p:spPr>
-      </p:sp>
-      <p:sp>
-        <p:nvSpPr>
-          <p:cNvPr id="10" name="Shape 8"/>
-          <p:cNvSpPr/>
-          <p:nvPr/>
-        </p:nvSpPr>
-        <p:spPr>
-          <a:xfrm>
-            <a:off x="3840480" y="2560320"/>
+          <p:cNvPr id="15" name="Shape 13"/>
+          <p:cNvSpPr/>
+          <p:nvPr/>
+        </p:nvSpPr>
+        <p:spPr>
+          <a:xfrm>
+            <a:off x="4665580" y="2540382"/>
             <a:ext cx="594360" cy="594360"/>
           </a:xfrm>
           <a:prstGeom prst="ellipse">
@@ -3551,16 +3846,23 @@
           </a:solidFill>
           <a:ln/>
         </p:spPr>
-      </p:sp>
-      <p:sp>
-        <p:nvSpPr>
-          <p:cNvPr id="11" name="Text 9"/>
-          <p:cNvSpPr/>
-          <p:nvPr/>
-        </p:nvSpPr>
-        <p:spPr>
-          <a:xfrm>
-            <a:off x="3840480" y="2560320"/>
+        <p:txBody>
+          <a:bodyPr/>
+          <a:lstStyle/>
+          <a:p>
+            <a:endParaRPr lang="en-US"/>
+          </a:p>
+        </p:txBody>
+      </p:sp>
+      <p:sp>
+        <p:nvSpPr>
+          <p:cNvPr id="16" name="Text 14"/>
+          <p:cNvSpPr/>
+          <p:nvPr/>
+        </p:nvSpPr>
+        <p:spPr>
+          <a:xfrm>
+            <a:off x="4665580" y="2540382"/>
             <a:ext cx="594360" cy="594360"/>
           </a:xfrm>
           <a:prstGeom prst="rect">
@@ -3573,7 +3875,7 @@
           <a:bodyPr wrap="square" rtlCol="0" anchor="ctr"/>
           <a:lstStyle/>
           <a:p>
-            <a:pPr algn="ctr" indent="0" marL="0">
+            <a:pPr marL="0" indent="0" algn="ctr">
               <a:buNone/>
             </a:pPr>
             <a:r>
@@ -3583,7 +3885,6 @@
                 </a:solidFill>
                 <a:latin typeface="Cambria" pitchFamily="34" charset="0"/>
                 <a:ea typeface="Cambria" pitchFamily="34" charset="-122"/>
-                <a:cs typeface="Cambria" pitchFamily="34" charset="-120"/>
               </a:rPr>
               <a:t>2</a:t>
             </a:r>
@@ -3593,13 +3894,13 @@
       </p:sp>
       <p:sp>
         <p:nvSpPr>
-          <p:cNvPr id="12" name="Text 10"/>
-          <p:cNvSpPr/>
-          <p:nvPr/>
-        </p:nvSpPr>
-        <p:spPr>
-          <a:xfrm>
-            <a:off x="3840480" y="3246120"/>
+          <p:cNvPr id="17" name="Text 15"/>
+          <p:cNvSpPr/>
+          <p:nvPr/>
+        </p:nvSpPr>
+        <p:spPr>
+          <a:xfrm>
+            <a:off x="4688440" y="3212562"/>
             <a:ext cx="2103120" cy="365760"/>
           </a:xfrm>
           <a:prstGeom prst="rect">
@@ -3612,174 +3913,7 @@
           <a:bodyPr wrap="square" rtlCol="0" anchor="ctr"/>
           <a:lstStyle/>
           <a:p>
-            <a:pPr indent="0" marL="0">
-              <a:buNone/>
-            </a:pPr>
-            <a:r>
-              <a:rPr lang="en-US" sz="1600" b="1" dirty="0">
-                <a:solidFill>
-                  <a:srgbClr val="FFFFFF"/>
-                </a:solidFill>
-                <a:latin typeface="Cambria" pitchFamily="34" charset="0"/>
-                <a:ea typeface="Cambria" pitchFamily="34" charset="-122"/>
-                <a:cs typeface="Cambria" pitchFamily="34" charset="-120"/>
-              </a:rPr>
-              <a:t>Improve step 4</a:t>
-            </a:r>
-            <a:endParaRPr lang="en-US" sz="1600" dirty="0"/>
-          </a:p>
-        </p:txBody>
-      </p:sp>
-      <p:sp>
-        <p:nvSpPr>
-          <p:cNvPr id="13" name="Text 11"/>
-          <p:cNvSpPr/>
-          <p:nvPr/>
-        </p:nvSpPr>
-        <p:spPr>
-          <a:xfrm>
-            <a:off x="3840480" y="3611880"/>
-            <a:ext cx="2148840" cy="640080"/>
-          </a:xfrm>
-          <a:prstGeom prst="rect">
-            <a:avLst/>
-          </a:prstGeom>
-          <a:noFill/>
-          <a:ln/>
-        </p:spPr>
-        <p:txBody>
-          <a:bodyPr wrap="square" rtlCol="0" anchor="t"/>
-          <a:lstStyle/>
-          <a:p>
-            <a:pPr indent="0" marL="0">
-              <a:lnSpc>
-                <a:spcPct val="115000"/>
-              </a:lnSpc>
-              <a:buNone/>
-            </a:pPr>
-            <a:r>
-              <a:rPr lang="en-US" sz="1200" dirty="0">
-                <a:solidFill>
-                  <a:srgbClr val="CBD1D6"/>
-                </a:solidFill>
-                <a:latin typeface="Calibri" pitchFamily="34" charset="0"/>
-                <a:ea typeface="Calibri" pitchFamily="34" charset="-122"/>
-                <a:cs typeface="Calibri" pitchFamily="34" charset="-120"/>
-              </a:rPr>
-              <a:t>It still discards 20.2% of found crack pixels — recoverable</a:t>
-            </a:r>
-            <a:endParaRPr lang="en-US" sz="1200" dirty="0"/>
-          </a:p>
-        </p:txBody>
-      </p:sp>
-      <p:sp>
-        <p:nvSpPr>
-          <p:cNvPr id="14" name="Shape 12"/>
-          <p:cNvSpPr/>
-          <p:nvPr/>
-        </p:nvSpPr>
-        <p:spPr>
-          <a:xfrm>
-            <a:off x="6400800" y="2286000"/>
-            <a:ext cx="2651760" cy="2011680"/>
-          </a:xfrm>
-          <a:prstGeom prst="roundRect">
-            <a:avLst>
-              <a:gd name="adj" fmla="val 3182"/>
-            </a:avLst>
-          </a:prstGeom>
-          <a:solidFill>
-            <a:srgbClr val="3A4046"/>
-          </a:solidFill>
-          <a:ln w="12700">
-            <a:solidFill>
-              <a:srgbClr val="4E555B"/>
-            </a:solidFill>
-            <a:prstDash val="solid"/>
-          </a:ln>
-        </p:spPr>
-      </p:sp>
-      <p:sp>
-        <p:nvSpPr>
-          <p:cNvPr id="15" name="Shape 13"/>
-          <p:cNvSpPr/>
-          <p:nvPr/>
-        </p:nvSpPr>
-        <p:spPr>
-          <a:xfrm>
-            <a:off x="6675120" y="2560320"/>
-            <a:ext cx="594360" cy="594360"/>
-          </a:xfrm>
-          <a:prstGeom prst="ellipse">
-            <a:avLst/>
-          </a:prstGeom>
-          <a:solidFill>
-            <a:srgbClr val="E8871E"/>
-          </a:solidFill>
-          <a:ln/>
-        </p:spPr>
-      </p:sp>
-      <p:sp>
-        <p:nvSpPr>
-          <p:cNvPr id="16" name="Text 14"/>
-          <p:cNvSpPr/>
-          <p:nvPr/>
-        </p:nvSpPr>
-        <p:spPr>
-          <a:xfrm>
-            <a:off x="6675120" y="2560320"/>
-            <a:ext cx="594360" cy="594360"/>
-          </a:xfrm>
-          <a:prstGeom prst="rect">
-            <a:avLst/>
-          </a:prstGeom>
-          <a:noFill/>
-          <a:ln/>
-        </p:spPr>
-        <p:txBody>
-          <a:bodyPr wrap="square" rtlCol="0" anchor="ctr"/>
-          <a:lstStyle/>
-          <a:p>
-            <a:pPr algn="ctr" indent="0" marL="0">
-              <a:buNone/>
-            </a:pPr>
-            <a:r>
-              <a:rPr lang="en-US" sz="2000" b="1" dirty="0">
-                <a:solidFill>
-                  <a:srgbClr val="FFFFFF"/>
-                </a:solidFill>
-                <a:latin typeface="Cambria" pitchFamily="34" charset="0"/>
-                <a:ea typeface="Cambria" pitchFamily="34" charset="-122"/>
-                <a:cs typeface="Cambria" pitchFamily="34" charset="-120"/>
-              </a:rPr>
-              <a:t>3</a:t>
-            </a:r>
-            <a:endParaRPr lang="en-US" sz="2000" dirty="0"/>
-          </a:p>
-        </p:txBody>
-      </p:sp>
-      <p:sp>
-        <p:nvSpPr>
-          <p:cNvPr id="17" name="Text 15"/>
-          <p:cNvSpPr/>
-          <p:nvPr/>
-        </p:nvSpPr>
-        <p:spPr>
-          <a:xfrm>
-            <a:off x="6675120" y="3246120"/>
-            <a:ext cx="2103120" cy="365760"/>
-          </a:xfrm>
-          <a:prstGeom prst="rect">
-            <a:avLst/>
-          </a:prstGeom>
-          <a:noFill/>
-          <a:ln/>
-        </p:spPr>
-        <p:txBody>
-          <a:bodyPr wrap="square" rtlCol="0" anchor="ctr"/>
-          <a:lstStyle/>
-          <a:p>
-            <a:pPr indent="0" marL="0">
+            <a:pPr marL="0" indent="0">
               <a:buNone/>
             </a:pPr>
             <a:r>
@@ -3805,8 +3939,8 @@
         </p:nvSpPr>
         <p:spPr>
           <a:xfrm>
-            <a:off x="6675120" y="3611880"/>
-            <a:ext cx="2148840" cy="640080"/>
+            <a:off x="4688439" y="3689704"/>
+            <a:ext cx="2442129" cy="640080"/>
           </a:xfrm>
           <a:prstGeom prst="rect">
             <a:avLst/>
@@ -3818,7 +3952,7 @@
           <a:bodyPr wrap="square" rtlCol="0" anchor="t"/>
           <a:lstStyle/>
           <a:p>
-            <a:pPr indent="0" marL="0">
+            <a:pPr marL="0" indent="0">
               <a:lnSpc>
                 <a:spcPct val="115000"/>
               </a:lnSpc>
@@ -3841,40 +3975,13 @@
       </p:sp>
       <p:sp>
         <p:nvSpPr>
-          <p:cNvPr id="19" name="Shape 17"/>
-          <p:cNvSpPr/>
-          <p:nvPr/>
-        </p:nvSpPr>
-        <p:spPr>
-          <a:xfrm>
-            <a:off x="9235440" y="2286000"/>
-            <a:ext cx="2651760" cy="2011680"/>
-          </a:xfrm>
-          <a:prstGeom prst="roundRect">
-            <a:avLst>
-              <a:gd name="adj" fmla="val 3182"/>
-            </a:avLst>
-          </a:prstGeom>
-          <a:solidFill>
-            <a:srgbClr val="3A4046"/>
-          </a:solidFill>
-          <a:ln w="12700">
-            <a:solidFill>
-              <a:srgbClr val="4E555B"/>
-            </a:solidFill>
-            <a:prstDash val="solid"/>
-          </a:ln>
-        </p:spPr>
-      </p:sp>
-      <p:sp>
-        <p:nvSpPr>
           <p:cNvPr id="20" name="Shape 18"/>
           <p:cNvSpPr/>
           <p:nvPr/>
         </p:nvSpPr>
         <p:spPr>
           <a:xfrm>
-            <a:off x="9509760" y="2560320"/>
+            <a:off x="8094580" y="2546704"/>
             <a:ext cx="594360" cy="594360"/>
           </a:xfrm>
           <a:prstGeom prst="ellipse">
@@ -3885,6 +3992,13 @@
           </a:solidFill>
           <a:ln/>
         </p:spPr>
+        <p:txBody>
+          <a:bodyPr/>
+          <a:lstStyle/>
+          <a:p>
+            <a:endParaRPr lang="en-US"/>
+          </a:p>
+        </p:txBody>
       </p:sp>
       <p:sp>
         <p:nvSpPr>
@@ -3894,7 +4008,7 @@
         </p:nvSpPr>
         <p:spPr>
           <a:xfrm>
-            <a:off x="9509760" y="2560320"/>
+            <a:off x="8094580" y="2544273"/>
             <a:ext cx="594360" cy="594360"/>
           </a:xfrm>
           <a:prstGeom prst="rect">
@@ -3907,7 +4021,7 @@
           <a:bodyPr wrap="square" rtlCol="0" anchor="ctr"/>
           <a:lstStyle/>
           <a:p>
-            <a:pPr algn="ctr" indent="0" marL="0">
+            <a:pPr marL="0" indent="0" algn="ctr">
               <a:buNone/>
             </a:pPr>
             <a:r>
@@ -3917,9 +4031,8 @@
                 </a:solidFill>
                 <a:latin typeface="Cambria" pitchFamily="34" charset="0"/>
                 <a:ea typeface="Cambria" pitchFamily="34" charset="-122"/>
-                <a:cs typeface="Cambria" pitchFamily="34" charset="-120"/>
               </a:rPr>
-              <a:t>4</a:t>
+              <a:t>3</a:t>
             </a:r>
             <a:endParaRPr lang="en-US" sz="2000" dirty="0"/>
           </a:p>
@@ -3933,7 +4046,7 @@
         </p:nvSpPr>
         <p:spPr>
           <a:xfrm>
-            <a:off x="9509760" y="3246120"/>
+            <a:off x="8094580" y="3227645"/>
             <a:ext cx="2103120" cy="365760"/>
           </a:xfrm>
           <a:prstGeom prst="rect">
@@ -3946,7 +4059,7 @@
           <a:bodyPr wrap="square" rtlCol="0" anchor="ctr"/>
           <a:lstStyle/>
           <a:p>
-            <a:pPr indent="0" marL="0">
+            <a:pPr marL="0" indent="0">
               <a:buNone/>
             </a:pPr>
             <a:r>
@@ -3972,8 +4085,8 @@
         </p:nvSpPr>
         <p:spPr>
           <a:xfrm>
-            <a:off x="9509760" y="3611880"/>
-            <a:ext cx="2148840" cy="640080"/>
+            <a:off x="8094579" y="3689704"/>
+            <a:ext cx="2401565" cy="640080"/>
           </a:xfrm>
           <a:prstGeom prst="rect">
             <a:avLst/>
@@ -3985,7 +4098,7 @@
           <a:bodyPr wrap="square" rtlCol="0" anchor="t"/>
           <a:lstStyle/>
           <a:p>
-            <a:pPr indent="0" marL="0">
+            <a:pPr marL="0" indent="0">
               <a:lnSpc>
                 <a:spcPct val="115000"/>
               </a:lnSpc>
@@ -4006,104 +4119,6 @@
           </a:p>
         </p:txBody>
       </p:sp>
-      <p:sp>
-        <p:nvSpPr>
-          <p:cNvPr id="24" name="Text 22"/>
-          <p:cNvSpPr/>
-          <p:nvPr/>
-        </p:nvSpPr>
-        <p:spPr>
-          <a:xfrm>
-            <a:off x="731520" y="4709160"/>
-            <a:ext cx="10789920" cy="822960"/>
-          </a:xfrm>
-          <a:prstGeom prst="rect">
-            <a:avLst/>
-          </a:prstGeom>
-          <a:noFill/>
-          <a:ln/>
-        </p:spPr>
-        <p:txBody>
-          <a:bodyPr wrap="square" rtlCol="0" anchor="t"/>
-          <a:lstStyle/>
-          <a:p>
-            <a:pPr indent="0" marL="0">
-              <a:lnSpc>
-                <a:spcPct val="125000"/>
-              </a:lnSpc>
-              <a:buNone/>
-            </a:pPr>
-            <a:r>
-              <a:rPr lang="en-US" sz="1500" b="1" dirty="0">
-                <a:solidFill>
-                  <a:srgbClr val="E8871E"/>
-                </a:solidFill>
-                <a:latin typeface="Calibri" pitchFamily="34" charset="0"/>
-                <a:ea typeface="Calibri" pitchFamily="34" charset="-122"/>
-                <a:cs typeface="Calibri" pitchFamily="34" charset="-120"/>
-              </a:rPr>
-              <a:t>In short: </a:t>
-            </a:r>
-            <a:pPr indent="0" marL="0">
-              <a:lnSpc>
-                <a:spcPct val="125000"/>
-              </a:lnSpc>
-              <a:buNone/>
-            </a:pPr>
-            <a:r>
-              <a:rPr lang="en-US" sz="1500" dirty="0">
-                <a:solidFill>
-                  <a:srgbClr val="FFFFFF"/>
-                </a:solidFill>
-                <a:latin typeface="Calibri" pitchFamily="34" charset="0"/>
-                <a:ea typeface="Calibri" pitchFamily="34" charset="-122"/>
-                <a:cs typeface="Calibri" pitchFamily="34" charset="-120"/>
-              </a:rPr>
-              <a:t>systematically tuned traditional image processing reaches Dice 0.5024 on real images, and Adaptive Threshold beats Otsu/Canny/Sobel on 102 of 118 images.</a:t>
-            </a:r>
-            <a:endParaRPr lang="en-US" sz="1500" dirty="0"/>
-          </a:p>
-        </p:txBody>
-      </p:sp>
-      <p:sp>
-        <p:nvSpPr>
-          <p:cNvPr id="25" name="Text 23"/>
-          <p:cNvSpPr/>
-          <p:nvPr/>
-        </p:nvSpPr>
-        <p:spPr>
-          <a:xfrm>
-            <a:off x="731520" y="5715000"/>
-            <a:ext cx="10698480" cy="640080"/>
-          </a:xfrm>
-          <a:prstGeom prst="rect">
-            <a:avLst/>
-          </a:prstGeom>
-          <a:noFill/>
-          <a:ln/>
-        </p:spPr>
-        <p:txBody>
-          <a:bodyPr wrap="square" rtlCol="0" anchor="ctr"/>
-          <a:lstStyle/>
-          <a:p>
-            <a:pPr indent="0" marL="0">
-              <a:buNone/>
-            </a:pPr>
-            <a:r>
-              <a:rPr lang="en-US" sz="2600" b="1" dirty="0">
-                <a:solidFill>
-                  <a:srgbClr val="FFFFFF"/>
-                </a:solidFill>
-                <a:latin typeface="Cambria" pitchFamily="34" charset="0"/>
-                <a:ea typeface="Cambria" pitchFamily="34" charset="-122"/>
-                <a:cs typeface="Cambria" pitchFamily="34" charset="-120"/>
-              </a:rPr>
-              <a:t>Thank you</a:t>
-            </a:r>
-            <a:endParaRPr lang="en-US" sz="2600" dirty="0"/>
-          </a:p>
-        </p:txBody>
-      </p:sp>
     </p:spTree>
   </p:cSld>
   <p:clrMapOvr>
@@ -4120,6 +4135,7 @@
         <a:solidFill>
           <a:srgbClr val="F4F4F2"/>
         </a:solidFill>
+        <a:effectLst/>
       </p:bgPr>
     </p:bg>
     <p:spTree>
@@ -4157,7 +4173,7 @@
           <a:bodyPr wrap="square" rtlCol="0" anchor="ctr"/>
           <a:lstStyle/>
           <a:p>
-            <a:pPr indent="0" marL="0">
+            <a:pPr marL="0" indent="0">
               <a:buNone/>
             </a:pPr>
             <a:r>
@@ -4177,14 +4193,14 @@
       </p:sp>
       <p:sp>
         <p:nvSpPr>
-          <p:cNvPr id="3" name="Text 1"/>
-          <p:cNvSpPr/>
-          <p:nvPr/>
-        </p:nvSpPr>
-        <p:spPr>
-          <a:xfrm>
-            <a:off x="658368" y="1170432"/>
-            <a:ext cx="10881360" cy="457200"/>
+          <p:cNvPr id="4" name="Text 2"/>
+          <p:cNvSpPr/>
+          <p:nvPr/>
+        </p:nvSpPr>
+        <p:spPr>
+          <a:xfrm>
+            <a:off x="640080" y="1920240"/>
+            <a:ext cx="5760720" cy="2926080"/>
           </a:xfrm>
           <a:prstGeom prst="rect">
             <a:avLst/>
@@ -4193,49 +4209,10 @@
           <a:ln/>
         </p:spPr>
         <p:txBody>
-          <a:bodyPr wrap="square" rtlCol="0" anchor="ctr"/>
-          <a:lstStyle/>
-          <a:p>
-            <a:pPr indent="0" marL="0">
-              <a:buNone/>
-            </a:pPr>
-            <a:r>
-              <a:rPr lang="en-US" sz="1500" i="1" dirty="0">
-                <a:solidFill>
-                  <a:srgbClr val="5B6770"/>
-                </a:solidFill>
-                <a:latin typeface="Calibri" pitchFamily="34" charset="0"/>
-                <a:ea typeface="Calibri" pitchFamily="34" charset="-122"/>
-                <a:cs typeface="Calibri" pitchFamily="34" charset="-120"/>
-              </a:rPr>
-              <a:t>Why automatic crack detection matters</a:t>
-            </a:r>
-            <a:endParaRPr lang="en-US" sz="1500" dirty="0"/>
-          </a:p>
-        </p:txBody>
-      </p:sp>
-      <p:sp>
-        <p:nvSpPr>
-          <p:cNvPr id="4" name="Text 2"/>
-          <p:cNvSpPr/>
-          <p:nvPr/>
-        </p:nvSpPr>
-        <p:spPr>
-          <a:xfrm>
-            <a:off x="640080" y="1920240"/>
-            <a:ext cx="5760720" cy="2926080"/>
-          </a:xfrm>
-          <a:prstGeom prst="rect">
-            <a:avLst/>
-          </a:prstGeom>
-          <a:noFill/>
-          <a:ln/>
-        </p:spPr>
-        <p:txBody>
           <a:bodyPr wrap="square" rtlCol="0" anchor="t"/>
           <a:lstStyle/>
           <a:p>
-            <a:pPr indent="0" marL="0">
+            <a:pPr marL="0" indent="0">
               <a:lnSpc>
                 <a:spcPct val="130000"/>
               </a:lnSpc>
@@ -4282,13 +4259,20 @@
             <a:prstDash val="solid"/>
           </a:ln>
           <a:effectLst>
-            <a:outerShdw sx="100000" sy="100000" kx="0" ky="0" algn="bl" rotWithShape="0" blurRad="76200" dist="25400" dir="5400000">
+            <a:outerShdw blurRad="76200" dist="25400" dir="5400000" algn="bl" rotWithShape="0">
               <a:srgbClr val="BBBBBB">
                 <a:alpha val="50000"/>
               </a:srgbClr>
             </a:outerShdw>
           </a:effectLst>
         </p:spPr>
+        <p:txBody>
+          <a:bodyPr/>
+          <a:lstStyle/>
+          <a:p>
+            <a:endParaRPr lang="en-US"/>
+          </a:p>
+        </p:txBody>
       </p:sp>
       <p:sp>
         <p:nvSpPr>
@@ -4309,6 +4293,13 @@
           </a:solidFill>
           <a:ln/>
         </p:spPr>
+        <p:txBody>
+          <a:bodyPr/>
+          <a:lstStyle/>
+          <a:p>
+            <a:endParaRPr lang="en-US"/>
+          </a:p>
+        </p:txBody>
       </p:sp>
       <p:sp>
         <p:nvSpPr>
@@ -4331,7 +4322,7 @@
           <a:bodyPr wrap="square" rtlCol="0" anchor="ctr"/>
           <a:lstStyle/>
           <a:p>
-            <a:pPr algn="ctr" indent="0" marL="0">
+            <a:pPr marL="0" indent="0" algn="ctr">
               <a:buNone/>
             </a:pPr>
             <a:r>
@@ -4370,7 +4361,7 @@
           <a:bodyPr wrap="square" rtlCol="0" anchor="ctr"/>
           <a:lstStyle/>
           <a:p>
-            <a:pPr indent="0" marL="0">
+            <a:pPr marL="0" indent="0">
               <a:lnSpc>
                 <a:spcPct val="105000"/>
               </a:lnSpc>
@@ -4388,12 +4379,6 @@
               <a:t>Manual inspection is slow
 </a:t>
             </a:r>
-            <a:pPr indent="0" marL="0">
-              <a:lnSpc>
-                <a:spcPct val="105000"/>
-              </a:lnSpc>
-              <a:buNone/>
-            </a:pPr>
             <a:r>
               <a:rPr lang="en-US" sz="1200" dirty="0">
                 <a:solidFill>
@@ -4435,13 +4420,20 @@
             <a:prstDash val="solid"/>
           </a:ln>
           <a:effectLst>
-            <a:outerShdw sx="100000" sy="100000" kx="0" ky="0" algn="bl" rotWithShape="0" blurRad="76200" dist="25400" dir="5400000">
+            <a:outerShdw blurRad="76200" dist="25400" dir="5400000" algn="bl" rotWithShape="0">
               <a:srgbClr val="BBBBBB">
                 <a:alpha val="50000"/>
               </a:srgbClr>
             </a:outerShdw>
           </a:effectLst>
         </p:spPr>
+        <p:txBody>
+          <a:bodyPr/>
+          <a:lstStyle/>
+          <a:p>
+            <a:endParaRPr lang="en-US"/>
+          </a:p>
+        </p:txBody>
       </p:sp>
       <p:sp>
         <p:nvSpPr>
@@ -4462,6 +4454,13 @@
           </a:solidFill>
           <a:ln/>
         </p:spPr>
+        <p:txBody>
+          <a:bodyPr/>
+          <a:lstStyle/>
+          <a:p>
+            <a:endParaRPr lang="en-US"/>
+          </a:p>
+        </p:txBody>
       </p:sp>
       <p:sp>
         <p:nvSpPr>
@@ -4484,7 +4483,7 @@
           <a:bodyPr wrap="square" rtlCol="0" anchor="ctr"/>
           <a:lstStyle/>
           <a:p>
-            <a:pPr algn="ctr" indent="0" marL="0">
+            <a:pPr marL="0" indent="0" algn="ctr">
               <a:buNone/>
             </a:pPr>
             <a:r>
@@ -4523,7 +4522,7 @@
           <a:bodyPr wrap="square" rtlCol="0" anchor="ctr"/>
           <a:lstStyle/>
           <a:p>
-            <a:pPr indent="0" marL="0">
+            <a:pPr marL="0" indent="0">
               <a:lnSpc>
                 <a:spcPct val="105000"/>
               </a:lnSpc>
@@ -4541,12 +4540,6 @@
               <a:t>Results vary by inspector
 </a:t>
             </a:r>
-            <a:pPr indent="0" marL="0">
-              <a:lnSpc>
-                <a:spcPct val="105000"/>
-              </a:lnSpc>
-              <a:buNone/>
-            </a:pPr>
             <a:r>
               <a:rPr lang="en-US" sz="1200" dirty="0">
                 <a:solidFill>
@@ -4588,13 +4581,20 @@
             <a:prstDash val="solid"/>
           </a:ln>
           <a:effectLst>
-            <a:outerShdw sx="100000" sy="100000" kx="0" ky="0" algn="bl" rotWithShape="0" blurRad="76200" dist="25400" dir="5400000">
+            <a:outerShdw blurRad="76200" dist="25400" dir="5400000" algn="bl" rotWithShape="0">
               <a:srgbClr val="BBBBBB">
                 <a:alpha val="50000"/>
               </a:srgbClr>
             </a:outerShdw>
           </a:effectLst>
         </p:spPr>
+        <p:txBody>
+          <a:bodyPr/>
+          <a:lstStyle/>
+          <a:p>
+            <a:endParaRPr lang="en-US"/>
+          </a:p>
+        </p:txBody>
       </p:sp>
       <p:sp>
         <p:nvSpPr>
@@ -4615,6 +4615,13 @@
           </a:solidFill>
           <a:ln/>
         </p:spPr>
+        <p:txBody>
+          <a:bodyPr/>
+          <a:lstStyle/>
+          <a:p>
+            <a:endParaRPr lang="en-US"/>
+          </a:p>
+        </p:txBody>
       </p:sp>
       <p:sp>
         <p:nvSpPr>
@@ -4637,7 +4644,7 @@
           <a:bodyPr wrap="square" rtlCol="0" anchor="ctr"/>
           <a:lstStyle/>
           <a:p>
-            <a:pPr algn="ctr" indent="0" marL="0">
+            <a:pPr marL="0" indent="0" algn="ctr">
               <a:buNone/>
             </a:pPr>
             <a:r>
@@ -4676,7 +4683,7 @@
           <a:bodyPr wrap="square" rtlCol="0" anchor="ctr"/>
           <a:lstStyle/>
           <a:p>
-            <a:pPr indent="0" marL="0">
+            <a:pPr marL="0" indent="0">
               <a:lnSpc>
                 <a:spcPct val="105000"/>
               </a:lnSpc>
@@ -4694,12 +4701,6 @@
               <a:t>Needs a screening aid
 </a:t>
             </a:r>
-            <a:pPr indent="0" marL="0">
-              <a:lnSpc>
-                <a:spcPct val="105000"/>
-              </a:lnSpc>
-              <a:buNone/>
-            </a:pPr>
             <a:r>
               <a:rPr lang="en-US" sz="1200" dirty="0">
                 <a:solidFill>
@@ -4731,6 +4732,7 @@
         <a:solidFill>
           <a:srgbClr val="F4F4F2"/>
         </a:solidFill>
+        <a:effectLst/>
       </p:bgPr>
     </p:bg>
     <p:spTree>
@@ -4768,7 +4770,7 @@
           <a:bodyPr wrap="square" rtlCol="0" anchor="ctr"/>
           <a:lstStyle/>
           <a:p>
-            <a:pPr indent="0" marL="0">
+            <a:pPr marL="0" indent="0">
               <a:buNone/>
             </a:pPr>
             <a:r>
@@ -4807,6 +4809,13 @@
           </a:solidFill>
           <a:ln/>
         </p:spPr>
+        <p:txBody>
+          <a:bodyPr/>
+          <a:lstStyle/>
+          <a:p>
+            <a:endParaRPr lang="en-US"/>
+          </a:p>
+        </p:txBody>
       </p:sp>
       <p:sp>
         <p:nvSpPr>
@@ -4829,7 +4838,7 @@
           <a:bodyPr wrap="square" rtlCol="0" anchor="ctr"/>
           <a:lstStyle/>
           <a:p>
-            <a:pPr indent="0" marL="0">
+            <a:pPr marL="0" indent="0">
               <a:lnSpc>
                 <a:spcPct val="115000"/>
               </a:lnSpc>
@@ -4846,12 +4855,6 @@
               </a:rPr>
               <a:t>Objective   </a:t>
             </a:r>
-            <a:pPr indent="0" marL="0">
-              <a:lnSpc>
-                <a:spcPct val="115000"/>
-              </a:lnSpc>
-              <a:buNone/>
-            </a:pPr>
             <a:r>
               <a:rPr lang="en-US" sz="1600" dirty="0">
                 <a:solidFill>
@@ -4869,18 +4872,18 @@
       </p:sp>
       <p:sp>
         <p:nvSpPr>
-          <p:cNvPr id="5" name="Shape 3"/>
-          <p:cNvSpPr/>
-          <p:nvPr/>
-        </p:nvSpPr>
-        <p:spPr>
-          <a:xfrm>
-            <a:off x="640080" y="2743200"/>
-            <a:ext cx="5349240" cy="1600200"/>
+          <p:cNvPr id="6" name="Shape 4"/>
+          <p:cNvSpPr/>
+          <p:nvPr/>
+        </p:nvSpPr>
+        <p:spPr>
+          <a:xfrm>
+            <a:off x="640080" y="2651760"/>
+            <a:ext cx="5349240" cy="1554480"/>
           </a:xfrm>
           <a:prstGeom prst="roundRect">
             <a:avLst>
-              <a:gd name="adj" fmla="val 3429"/>
+              <a:gd name="adj" fmla="val 3529"/>
             </a:avLst>
           </a:prstGeom>
           <a:solidFill>
@@ -4893,16 +4896,23 @@
             <a:prstDash val="solid"/>
           </a:ln>
         </p:spPr>
-      </p:sp>
-      <p:sp>
-        <p:nvSpPr>
-          <p:cNvPr id="6" name="Shape 4"/>
-          <p:cNvSpPr/>
-          <p:nvPr/>
-        </p:nvSpPr>
-        <p:spPr>
-          <a:xfrm>
-            <a:off x="914400" y="3054096"/>
+        <p:txBody>
+          <a:bodyPr/>
+          <a:lstStyle/>
+          <a:p>
+            <a:endParaRPr lang="en-US"/>
+          </a:p>
+        </p:txBody>
+      </p:sp>
+      <p:sp>
+        <p:nvSpPr>
+          <p:cNvPr id="7" name="Shape 5"/>
+          <p:cNvSpPr/>
+          <p:nvPr/>
+        </p:nvSpPr>
+        <p:spPr>
+          <a:xfrm>
+            <a:off x="914400" y="2962656"/>
             <a:ext cx="128016" cy="128016"/>
           </a:xfrm>
           <a:prstGeom prst="rect">
@@ -4913,16 +4923,23 @@
           </a:solidFill>
           <a:ln/>
         </p:spPr>
-      </p:sp>
-      <p:sp>
-        <p:nvSpPr>
-          <p:cNvPr id="7" name="Text 5"/>
-          <p:cNvSpPr/>
-          <p:nvPr/>
-        </p:nvSpPr>
-        <p:spPr>
-          <a:xfrm>
-            <a:off x="1143000" y="2944368"/>
+        <p:txBody>
+          <a:bodyPr/>
+          <a:lstStyle/>
+          <a:p>
+            <a:endParaRPr lang="en-US"/>
+          </a:p>
+        </p:txBody>
+      </p:sp>
+      <p:sp>
+        <p:nvSpPr>
+          <p:cNvPr id="8" name="Text 6"/>
+          <p:cNvSpPr/>
+          <p:nvPr/>
+        </p:nvSpPr>
+        <p:spPr>
+          <a:xfrm>
+            <a:off x="1143000" y="2852928"/>
             <a:ext cx="4617720" cy="365760"/>
           </a:xfrm>
           <a:prstGeom prst="rect">
@@ -4935,7 +4952,7 @@
           <a:bodyPr wrap="square" rtlCol="0" anchor="ctr"/>
           <a:lstStyle/>
           <a:p>
-            <a:pPr indent="0" marL="0">
+            <a:pPr marL="0" indent="0">
               <a:buNone/>
             </a:pPr>
             <a:r>
@@ -4955,13 +4972,13 @@
       </p:sp>
       <p:sp>
         <p:nvSpPr>
-          <p:cNvPr id="8" name="Text 6"/>
-          <p:cNvSpPr/>
-          <p:nvPr/>
-        </p:nvSpPr>
-        <p:spPr>
-          <a:xfrm>
-            <a:off x="914400" y="3401568"/>
+          <p:cNvPr id="9" name="Text 7"/>
+          <p:cNvSpPr/>
+          <p:nvPr/>
+        </p:nvSpPr>
+        <p:spPr>
+          <a:xfrm>
+            <a:off x="914400" y="3310128"/>
             <a:ext cx="4800600" cy="822960"/>
           </a:xfrm>
           <a:prstGeom prst="rect">
@@ -4974,7 +4991,7 @@
           <a:bodyPr wrap="square" rtlCol="0" anchor="t"/>
           <a:lstStyle/>
           <a:p>
-            <a:pPr indent="0" marL="0">
+            <a:pPr marL="0" indent="0">
               <a:lnSpc>
                 <a:spcPct val="115000"/>
               </a:lnSpc>
@@ -4989,7 +5006,7 @@
                 <a:ea typeface="Calibri" pitchFamily="34" charset="-122"/>
                 <a:cs typeface="Calibri" pitchFamily="34" charset="-120"/>
               </a:rPr>
-              <a:t>Traditional image processing only (OpenCV); no deep learning, to prove the underlying math</a:t>
+              <a:t>Traditional image processing only (OpenCV). No deep learning</a:t>
             </a:r>
             <a:endParaRPr lang="en-US" sz="1350" dirty="0"/>
           </a:p>
@@ -4997,18 +5014,18 @@
       </p:sp>
       <p:sp>
         <p:nvSpPr>
-          <p:cNvPr id="9" name="Shape 7"/>
-          <p:cNvSpPr/>
-          <p:nvPr/>
-        </p:nvSpPr>
-        <p:spPr>
-          <a:xfrm>
-            <a:off x="6172200" y="2743200"/>
-            <a:ext cx="5349240" cy="1600200"/>
+          <p:cNvPr id="10" name="Shape 8"/>
+          <p:cNvSpPr/>
+          <p:nvPr/>
+        </p:nvSpPr>
+        <p:spPr>
+          <a:xfrm>
+            <a:off x="6172200" y="2651760"/>
+            <a:ext cx="5349240" cy="1554480"/>
           </a:xfrm>
           <a:prstGeom prst="roundRect">
             <a:avLst>
-              <a:gd name="adj" fmla="val 3429"/>
+              <a:gd name="adj" fmla="val 3529"/>
             </a:avLst>
           </a:prstGeom>
           <a:solidFill>
@@ -5021,16 +5038,23 @@
             <a:prstDash val="solid"/>
           </a:ln>
         </p:spPr>
-      </p:sp>
-      <p:sp>
-        <p:nvSpPr>
-          <p:cNvPr id="10" name="Shape 8"/>
-          <p:cNvSpPr/>
-          <p:nvPr/>
-        </p:nvSpPr>
-        <p:spPr>
-          <a:xfrm>
-            <a:off x="6446520" y="3054096"/>
+        <p:txBody>
+          <a:bodyPr/>
+          <a:lstStyle/>
+          <a:p>
+            <a:endParaRPr lang="en-US"/>
+          </a:p>
+        </p:txBody>
+      </p:sp>
+      <p:sp>
+        <p:nvSpPr>
+          <p:cNvPr id="11" name="Shape 9"/>
+          <p:cNvSpPr/>
+          <p:nvPr/>
+        </p:nvSpPr>
+        <p:spPr>
+          <a:xfrm>
+            <a:off x="6446520" y="2962656"/>
             <a:ext cx="128016" cy="128016"/>
           </a:xfrm>
           <a:prstGeom prst="rect">
@@ -5041,16 +5065,23 @@
           </a:solidFill>
           <a:ln/>
         </p:spPr>
-      </p:sp>
-      <p:sp>
-        <p:nvSpPr>
-          <p:cNvPr id="11" name="Text 9"/>
-          <p:cNvSpPr/>
-          <p:nvPr/>
-        </p:nvSpPr>
-        <p:spPr>
-          <a:xfrm>
-            <a:off x="6675120" y="2944368"/>
+        <p:txBody>
+          <a:bodyPr/>
+          <a:lstStyle/>
+          <a:p>
+            <a:endParaRPr lang="en-US"/>
+          </a:p>
+        </p:txBody>
+      </p:sp>
+      <p:sp>
+        <p:nvSpPr>
+          <p:cNvPr id="12" name="Text 10"/>
+          <p:cNvSpPr/>
+          <p:nvPr/>
+        </p:nvSpPr>
+        <p:spPr>
+          <a:xfrm>
+            <a:off x="6675120" y="2852928"/>
             <a:ext cx="4617720" cy="365760"/>
           </a:xfrm>
           <a:prstGeom prst="rect">
@@ -5063,7 +5094,7 @@
           <a:bodyPr wrap="square" rtlCol="0" anchor="ctr"/>
           <a:lstStyle/>
           <a:p>
-            <a:pPr indent="0" marL="0">
+            <a:pPr marL="0" indent="0">
               <a:buNone/>
             </a:pPr>
             <a:r>
@@ -5083,13 +5114,13 @@
       </p:sp>
       <p:sp>
         <p:nvSpPr>
-          <p:cNvPr id="12" name="Text 10"/>
-          <p:cNvSpPr/>
-          <p:nvPr/>
-        </p:nvSpPr>
-        <p:spPr>
-          <a:xfrm>
-            <a:off x="6446520" y="3401568"/>
+          <p:cNvPr id="13" name="Text 11"/>
+          <p:cNvSpPr/>
+          <p:nvPr/>
+        </p:nvSpPr>
+        <p:spPr>
+          <a:xfrm>
+            <a:off x="6446520" y="3310128"/>
             <a:ext cx="4800600" cy="822960"/>
           </a:xfrm>
           <a:prstGeom prst="rect">
@@ -5102,7 +5133,7 @@
           <a:bodyPr wrap="square" rtlCol="0" anchor="t"/>
           <a:lstStyle/>
           <a:p>
-            <a:pPr indent="0" marL="0">
+            <a:pPr marL="0" indent="0">
               <a:lnSpc>
                 <a:spcPct val="115000"/>
               </a:lnSpc>
@@ -5125,18 +5156,18 @@
       </p:sp>
       <p:sp>
         <p:nvSpPr>
-          <p:cNvPr id="13" name="Shape 11"/>
-          <p:cNvSpPr/>
-          <p:nvPr/>
-        </p:nvSpPr>
-        <p:spPr>
-          <a:xfrm>
-            <a:off x="640080" y="4526280"/>
-            <a:ext cx="5349240" cy="1600200"/>
+          <p:cNvPr id="18" name="Shape 16"/>
+          <p:cNvSpPr/>
+          <p:nvPr/>
+        </p:nvSpPr>
+        <p:spPr>
+          <a:xfrm>
+            <a:off x="3314700" y="4425696"/>
+            <a:ext cx="5349240" cy="1554480"/>
           </a:xfrm>
           <a:prstGeom prst="roundRect">
             <a:avLst>
-              <a:gd name="adj" fmla="val 3429"/>
+              <a:gd name="adj" fmla="val 3529"/>
             </a:avLst>
           </a:prstGeom>
           <a:solidFill>
@@ -5149,16 +5180,23 @@
             <a:prstDash val="solid"/>
           </a:ln>
         </p:spPr>
-      </p:sp>
-      <p:sp>
-        <p:nvSpPr>
-          <p:cNvPr id="14" name="Shape 12"/>
-          <p:cNvSpPr/>
-          <p:nvPr/>
-        </p:nvSpPr>
-        <p:spPr>
-          <a:xfrm>
-            <a:off x="914400" y="4837176"/>
+        <p:txBody>
+          <a:bodyPr/>
+          <a:lstStyle/>
+          <a:p>
+            <a:endParaRPr lang="en-US"/>
+          </a:p>
+        </p:txBody>
+      </p:sp>
+      <p:sp>
+        <p:nvSpPr>
+          <p:cNvPr id="19" name="Shape 17"/>
+          <p:cNvSpPr/>
+          <p:nvPr/>
+        </p:nvSpPr>
+        <p:spPr>
+          <a:xfrm>
+            <a:off x="3589020" y="4736592"/>
             <a:ext cx="128016" cy="128016"/>
           </a:xfrm>
           <a:prstGeom prst="rect">
@@ -5169,16 +5207,23 @@
           </a:solidFill>
           <a:ln/>
         </p:spPr>
-      </p:sp>
-      <p:sp>
-        <p:nvSpPr>
-          <p:cNvPr id="15" name="Text 13"/>
-          <p:cNvSpPr/>
-          <p:nvPr/>
-        </p:nvSpPr>
-        <p:spPr>
-          <a:xfrm>
-            <a:off x="1143000" y="4727448"/>
+        <p:txBody>
+          <a:bodyPr/>
+          <a:lstStyle/>
+          <a:p>
+            <a:endParaRPr lang="en-US"/>
+          </a:p>
+        </p:txBody>
+      </p:sp>
+      <p:sp>
+        <p:nvSpPr>
+          <p:cNvPr id="20" name="Text 18"/>
+          <p:cNvSpPr/>
+          <p:nvPr/>
+        </p:nvSpPr>
+        <p:spPr>
+          <a:xfrm>
+            <a:off x="3817620" y="4626864"/>
             <a:ext cx="4617720" cy="365760"/>
           </a:xfrm>
           <a:prstGeom prst="rect">
@@ -5191,135 +5236,7 @@
           <a:bodyPr wrap="square" rtlCol="0" anchor="ctr"/>
           <a:lstStyle/>
           <a:p>
-            <a:pPr indent="0" marL="0">
-              <a:buNone/>
-            </a:pPr>
-            <a:r>
-              <a:rPr lang="en-US" sz="1800" b="1" dirty="0">
-                <a:solidFill>
-                  <a:srgbClr val="222629"/>
-                </a:solidFill>
-                <a:latin typeface="Cambria" pitchFamily="34" charset="0"/>
-                <a:ea typeface="Cambria" pitchFamily="34" charset="-122"/>
-                <a:cs typeface="Cambria" pitchFamily="34" charset="-120"/>
-              </a:rPr>
-              <a:t>Task split</a:t>
-            </a:r>
-            <a:endParaRPr lang="en-US" sz="1800" dirty="0"/>
-          </a:p>
-        </p:txBody>
-      </p:sp>
-      <p:sp>
-        <p:nvSpPr>
-          <p:cNvPr id="16" name="Text 14"/>
-          <p:cNvSpPr/>
-          <p:nvPr/>
-        </p:nvSpPr>
-        <p:spPr>
-          <a:xfrm>
-            <a:off x="914400" y="5184648"/>
-            <a:ext cx="4800600" cy="822960"/>
-          </a:xfrm>
-          <a:prstGeom prst="rect">
-            <a:avLst/>
-          </a:prstGeom>
-          <a:noFill/>
-          <a:ln/>
-        </p:spPr>
-        <p:txBody>
-          <a:bodyPr wrap="square" rtlCol="0" anchor="t"/>
-          <a:lstStyle/>
-          <a:p>
-            <a:pPr indent="0" marL="0">
-              <a:lnSpc>
-                <a:spcPct val="115000"/>
-              </a:lnSpc>
-              <a:buNone/>
-            </a:pPr>
-            <a:r>
-              <a:rPr lang="en-US" sz="1350" dirty="0">
-                <a:solidFill>
-                  <a:srgbClr val="5B6770"/>
-                </a:solidFill>
-                <a:latin typeface="Calibri" pitchFamily="34" charset="0"/>
-                <a:ea typeface="Calibri" pitchFamily="34" charset="-122"/>
-                <a:cs typeface="Calibri" pitchFamily="34" charset="-120"/>
-              </a:rPr>
-              <a:t>Member 1 image prep · Member 2 algorithm &amp; tuning · Member 3 evaluation &amp; summary</a:t>
-            </a:r>
-            <a:endParaRPr lang="en-US" sz="1350" dirty="0"/>
-          </a:p>
-        </p:txBody>
-      </p:sp>
-      <p:sp>
-        <p:nvSpPr>
-          <p:cNvPr id="17" name="Shape 15"/>
-          <p:cNvSpPr/>
-          <p:nvPr/>
-        </p:nvSpPr>
-        <p:spPr>
-          <a:xfrm>
-            <a:off x="6172200" y="4526280"/>
-            <a:ext cx="5349240" cy="1600200"/>
-          </a:xfrm>
-          <a:prstGeom prst="roundRect">
-            <a:avLst>
-              <a:gd name="adj" fmla="val 3429"/>
-            </a:avLst>
-          </a:prstGeom>
-          <a:solidFill>
-            <a:srgbClr val="FFFFFF"/>
-          </a:solidFill>
-          <a:ln w="12700">
-            <a:solidFill>
-              <a:srgbClr val="DDDDDD"/>
-            </a:solidFill>
-            <a:prstDash val="solid"/>
-          </a:ln>
-        </p:spPr>
-      </p:sp>
-      <p:sp>
-        <p:nvSpPr>
-          <p:cNvPr id="18" name="Shape 16"/>
-          <p:cNvSpPr/>
-          <p:nvPr/>
-        </p:nvSpPr>
-        <p:spPr>
-          <a:xfrm>
-            <a:off x="6446520" y="4837176"/>
-            <a:ext cx="128016" cy="128016"/>
-          </a:xfrm>
-          <a:prstGeom prst="rect">
-            <a:avLst/>
-          </a:prstGeom>
-          <a:solidFill>
-            <a:srgbClr val="E8871E"/>
-          </a:solidFill>
-          <a:ln/>
-        </p:spPr>
-      </p:sp>
-      <p:sp>
-        <p:nvSpPr>
-          <p:cNvPr id="19" name="Text 17"/>
-          <p:cNvSpPr/>
-          <p:nvPr/>
-        </p:nvSpPr>
-        <p:spPr>
-          <a:xfrm>
-            <a:off x="6675120" y="4727448"/>
-            <a:ext cx="4617720" cy="365760"/>
-          </a:xfrm>
-          <a:prstGeom prst="rect">
-            <a:avLst/>
-          </a:prstGeom>
-          <a:noFill/>
-          <a:ln/>
-        </p:spPr>
-        <p:txBody>
-          <a:bodyPr wrap="square" rtlCol="0" anchor="ctr"/>
-          <a:lstStyle/>
-          <a:p>
-            <a:pPr indent="0" marL="0">
+            <a:pPr marL="0" indent="0">
               <a:buNone/>
             </a:pPr>
             <a:r>
@@ -5339,13 +5256,13 @@
       </p:sp>
       <p:sp>
         <p:nvSpPr>
-          <p:cNvPr id="20" name="Text 18"/>
-          <p:cNvSpPr/>
-          <p:nvPr/>
-        </p:nvSpPr>
-        <p:spPr>
-          <a:xfrm>
-            <a:off x="6446520" y="5184648"/>
+          <p:cNvPr id="21" name="Text 19"/>
+          <p:cNvSpPr/>
+          <p:nvPr/>
+        </p:nvSpPr>
+        <p:spPr>
+          <a:xfrm>
+            <a:off x="3589020" y="5084064"/>
             <a:ext cx="4800600" cy="822960"/>
           </a:xfrm>
           <a:prstGeom prst="rect">
@@ -5358,7 +5275,7 @@
           <a:bodyPr wrap="square" rtlCol="0" anchor="t"/>
           <a:lstStyle/>
           <a:p>
-            <a:pPr indent="0" marL="0">
+            <a:pPr marL="0" indent="0">
               <a:lnSpc>
                 <a:spcPct val="115000"/>
               </a:lnSpc>
@@ -5395,6 +5312,7 @@
         <a:solidFill>
           <a:srgbClr val="F4F4F2"/>
         </a:solidFill>
+        <a:effectLst/>
       </p:bgPr>
     </p:bg>
     <p:spTree>
@@ -5432,7 +5350,7 @@
           <a:bodyPr wrap="square" rtlCol="0" anchor="ctr"/>
           <a:lstStyle/>
           <a:p>
-            <a:pPr indent="0" marL="0">
+            <a:pPr marL="0" indent="0">
               <a:buNone/>
             </a:pPr>
             <a:r>
@@ -5444,69 +5362,30 @@
                 <a:ea typeface="Cambria" pitchFamily="34" charset="-122"/>
                 <a:cs typeface="Cambria" pitchFamily="34" charset="-120"/>
               </a:rPr>
-              <a:t>Pipeline Overview — 4 Steps</a:t>
+              <a:t>Pipeline Overview (4 Steps)</a:t>
             </a:r>
             <a:endParaRPr lang="en-US" sz="3200" dirty="0"/>
           </a:p>
         </p:txBody>
       </p:sp>
-      <p:sp>
-        <p:nvSpPr>
-          <p:cNvPr id="3" name="Text 1"/>
-          <p:cNvSpPr/>
-          <p:nvPr/>
-        </p:nvSpPr>
-        <p:spPr>
-          <a:xfrm>
-            <a:off x="658368" y="1170432"/>
-            <a:ext cx="10881360" cy="457200"/>
-          </a:xfrm>
-          <a:prstGeom prst="rect">
-            <a:avLst/>
-          </a:prstGeom>
-          <a:noFill/>
-          <a:ln/>
-        </p:spPr>
-        <p:txBody>
-          <a:bodyPr wrap="square" rtlCol="0" anchor="ctr"/>
-          <a:lstStyle/>
-          <a:p>
-            <a:pPr indent="0" marL="0">
-              <a:buNone/>
-            </a:pPr>
-            <a:r>
-              <a:rPr lang="en-US" sz="1500" i="1" dirty="0">
-                <a:solidFill>
-                  <a:srgbClr val="5B6770"/>
-                </a:solidFill>
-                <a:latin typeface="Calibri" pitchFamily="34" charset="0"/>
-                <a:ea typeface="Calibri" pitchFamily="34" charset="-122"/>
-                <a:cs typeface="Calibri" pitchFamily="34" charset="-120"/>
-              </a:rPr>
-              <a:t>From a photo to a clean crack mask</a:t>
-            </a:r>
-            <a:endParaRPr lang="en-US" sz="1500" dirty="0"/>
-          </a:p>
-        </p:txBody>
-      </p:sp>
       <p:pic>
         <p:nvPicPr>
-          <p:cNvPr id="4" name="Image 0" descr="/sessions/eager-charming-feynman/mnt/MiniProject/docs/figures/pipeline_stages.png">    </p:cNvPr>
+          <p:cNvPr id="4" name="Image 0" descr="/sessions/eager-charming-feynman/mnt/MiniProject/docs/figures/pipeline_stages.png"/>
           <p:cNvPicPr>
             <a:picLocks noChangeAspect="1"/>
           </p:cNvPicPr>
           <p:nvPr/>
         </p:nvPicPr>
         <p:blipFill>
-          <a:blip r:embed="rId1"/>
+          <a:blip r:embed="rId3"/>
           <a:stretch>
             <a:fillRect/>
           </a:stretch>
         </p:blipFill>
         <p:spPr>
           <a:xfrm>
-            <a:off x="1737360" y="1828800"/>
-            <a:ext cx="8686800" cy="2834640"/>
+            <a:off x="1021906" y="1361872"/>
+            <a:ext cx="10117708" cy="3301568"/>
           </a:xfrm>
           <a:prstGeom prst="rect">
             <a:avLst/>
@@ -5534,14 +5413,11 @@
           <a:bodyPr wrap="square" rtlCol="0" anchor="ctr"/>
           <a:lstStyle/>
           <a:p>
-            <a:pPr algn="ctr" indent="0" marL="0">
+            <a:pPr marL="0" indent="0" algn="ctr">
               <a:buNone/>
             </a:pPr>
             <a:r>
               <a:rPr lang="en-US" sz="1400" i="1" dirty="0">
-                <a:solidFill>
-                  <a:srgbClr val="B5670F"/>
-                </a:solidFill>
                 <a:latin typeface="Calibri" pitchFamily="34" charset="0"/>
                 <a:ea typeface="Calibri" pitchFamily="34" charset="-122"/>
                 <a:cs typeface="Calibri" pitchFamily="34" charset="-120"/>
@@ -5549,45 +5425,6 @@
               <a:t>Gray → contrast → Adaptive Threshold (still noisy) → Morphology → shape filter → final,  vs. ground truth</a:t>
             </a:r>
             <a:endParaRPr lang="en-US" sz="1400" dirty="0"/>
-          </a:p>
-        </p:txBody>
-      </p:sp>
-      <p:sp>
-        <p:nvSpPr>
-          <p:cNvPr id="6" name="Text 3"/>
-          <p:cNvSpPr/>
-          <p:nvPr/>
-        </p:nvSpPr>
-        <p:spPr>
-          <a:xfrm>
-            <a:off x="640080" y="5349240"/>
-            <a:ext cx="10881360" cy="365760"/>
-          </a:xfrm>
-          <a:prstGeom prst="rect">
-            <a:avLst/>
-          </a:prstGeom>
-          <a:noFill/>
-          <a:ln/>
-        </p:spPr>
-        <p:txBody>
-          <a:bodyPr wrap="square" rtlCol="0" anchor="ctr"/>
-          <a:lstStyle/>
-          <a:p>
-            <a:pPr algn="ctr" indent="0" marL="0">
-              <a:buNone/>
-            </a:pPr>
-            <a:r>
-              <a:rPr lang="en-US" sz="1200" dirty="0">
-                <a:solidFill>
-                  <a:srgbClr val="5B6770"/>
-                </a:solidFill>
-                <a:latin typeface="Calibri" pitchFamily="34" charset="0"/>
-                <a:ea typeface="Calibri" pitchFamily="34" charset="-122"/>
-                <a:cs typeface="Calibri" pitchFamily="34" charset="-120"/>
-              </a:rPr>
-              <a:t>Figure 1 — output of each step (image 001 top row, 074 bottom row)</a:t>
-            </a:r>
-            <a:endParaRPr lang="en-US" sz="1200" dirty="0"/>
           </a:p>
         </p:txBody>
       </p:sp>
@@ -5607,6 +5444,7 @@
         <a:solidFill>
           <a:srgbClr val="F4F4F2"/>
         </a:solidFill>
+        <a:effectLst/>
       </p:bgPr>
     </p:bg>
     <p:spTree>
@@ -5644,7 +5482,7 @@
           <a:bodyPr wrap="square" rtlCol="0" anchor="ctr"/>
           <a:lstStyle/>
           <a:p>
-            <a:pPr indent="0" marL="0">
+            <a:pPr marL="0" indent="0">
               <a:buNone/>
             </a:pPr>
             <a:r>
@@ -5670,7 +5508,7 @@
         </p:nvSpPr>
         <p:spPr>
           <a:xfrm>
-            <a:off x="640080" y="1737360"/>
+            <a:off x="274320" y="1737360"/>
             <a:ext cx="2697480" cy="3566160"/>
           </a:xfrm>
           <a:prstGeom prst="roundRect">
@@ -5688,13 +5526,20 @@
             <a:prstDash val="solid"/>
           </a:ln>
           <a:effectLst>
-            <a:outerShdw sx="100000" sy="100000" kx="0" ky="0" algn="bl" rotWithShape="0" blurRad="76200" dist="25400" dir="5400000">
+            <a:outerShdw blurRad="76200" dist="25400" dir="5400000" algn="bl" rotWithShape="0">
               <a:srgbClr val="BBBBBB">
                 <a:alpha val="45000"/>
               </a:srgbClr>
             </a:outerShdw>
           </a:effectLst>
         </p:spPr>
+        <p:txBody>
+          <a:bodyPr/>
+          <a:lstStyle/>
+          <a:p>
+            <a:endParaRPr lang="en-US"/>
+          </a:p>
+        </p:txBody>
       </p:sp>
       <p:sp>
         <p:nvSpPr>
@@ -5704,7 +5549,7 @@
         </p:nvSpPr>
         <p:spPr>
           <a:xfrm>
-            <a:off x="1623060" y="2057400"/>
+            <a:off x="1257300" y="2057400"/>
             <a:ext cx="731520" cy="731520"/>
           </a:xfrm>
           <a:prstGeom prst="ellipse">
@@ -5715,6 +5560,13 @@
           </a:solidFill>
           <a:ln/>
         </p:spPr>
+        <p:txBody>
+          <a:bodyPr/>
+          <a:lstStyle/>
+          <a:p>
+            <a:endParaRPr lang="en-US"/>
+          </a:p>
+        </p:txBody>
       </p:sp>
       <p:sp>
         <p:nvSpPr>
@@ -5724,7 +5576,7 @@
         </p:nvSpPr>
         <p:spPr>
           <a:xfrm>
-            <a:off x="1623060" y="2057400"/>
+            <a:off x="1257300" y="2057400"/>
             <a:ext cx="731520" cy="731520"/>
           </a:xfrm>
           <a:prstGeom prst="rect">
@@ -5737,7 +5589,7 @@
           <a:bodyPr wrap="square" rtlCol="0" anchor="ctr"/>
           <a:lstStyle/>
           <a:p>
-            <a:pPr algn="ctr" indent="0" marL="0">
+            <a:pPr marL="0" indent="0" algn="ctr">
               <a:buNone/>
             </a:pPr>
             <a:r>
@@ -5763,7 +5615,7 @@
         </p:nvSpPr>
         <p:spPr>
           <a:xfrm>
-            <a:off x="822960" y="2971800"/>
+            <a:off x="457200" y="2971800"/>
             <a:ext cx="2331720" cy="548640"/>
           </a:xfrm>
           <a:prstGeom prst="rect">
@@ -5776,7 +5628,7 @@
           <a:bodyPr wrap="square" rtlCol="0" anchor="ctr"/>
           <a:lstStyle/>
           <a:p>
-            <a:pPr algn="ctr" indent="0" marL="0">
+            <a:pPr marL="0" indent="0" algn="ctr">
               <a:buNone/>
             </a:pPr>
             <a:r>
@@ -5802,7 +5654,7 @@
         </p:nvSpPr>
         <p:spPr>
           <a:xfrm>
-            <a:off x="868680" y="3566160"/>
+            <a:off x="502920" y="3566160"/>
             <a:ext cx="2240280" cy="1554480"/>
           </a:xfrm>
           <a:prstGeom prst="rect">
@@ -5815,7 +5667,7 @@
           <a:bodyPr wrap="square" rtlCol="0" anchor="t"/>
           <a:lstStyle/>
           <a:p>
-            <a:pPr algn="ctr" indent="0" marL="0">
+            <a:pPr marL="0" indent="0" algn="ctr">
               <a:lnSpc>
                 <a:spcPct val="120000"/>
               </a:lnSpc>
@@ -5844,7 +5696,7 @@
         </p:nvSpPr>
         <p:spPr>
           <a:xfrm>
-            <a:off x="3355848" y="3374136"/>
+            <a:off x="2990088" y="3374136"/>
             <a:ext cx="237744" cy="292608"/>
           </a:xfrm>
           <a:prstGeom prst="rightArrow">
@@ -5855,6 +5707,13 @@
           </a:solidFill>
           <a:ln/>
         </p:spPr>
+        <p:txBody>
+          <a:bodyPr/>
+          <a:lstStyle/>
+          <a:p>
+            <a:endParaRPr lang="en-US"/>
+          </a:p>
+        </p:txBody>
       </p:sp>
       <p:sp>
         <p:nvSpPr>
@@ -5864,7 +5723,7 @@
         </p:nvSpPr>
         <p:spPr>
           <a:xfrm>
-            <a:off x="3611880" y="1737360"/>
+            <a:off x="3246120" y="1737360"/>
             <a:ext cx="2697480" cy="3566160"/>
           </a:xfrm>
           <a:prstGeom prst="roundRect">
@@ -5882,13 +5741,20 @@
             <a:prstDash val="solid"/>
           </a:ln>
           <a:effectLst>
-            <a:outerShdw sx="100000" sy="100000" kx="0" ky="0" algn="bl" rotWithShape="0" blurRad="76200" dist="25400" dir="5400000">
+            <a:outerShdw blurRad="76200" dist="25400" dir="5400000" algn="bl" rotWithShape="0">
               <a:srgbClr val="BBBBBB">
                 <a:alpha val="45000"/>
               </a:srgbClr>
             </a:outerShdw>
           </a:effectLst>
         </p:spPr>
+        <p:txBody>
+          <a:bodyPr/>
+          <a:lstStyle/>
+          <a:p>
+            <a:endParaRPr lang="en-US"/>
+          </a:p>
+        </p:txBody>
       </p:sp>
       <p:sp>
         <p:nvSpPr>
@@ -5898,7 +5764,7 @@
         </p:nvSpPr>
         <p:spPr>
           <a:xfrm>
-            <a:off x="4594860" y="2057400"/>
+            <a:off x="4229100" y="2057400"/>
             <a:ext cx="731520" cy="731520"/>
           </a:xfrm>
           <a:prstGeom prst="ellipse">
@@ -5909,6 +5775,13 @@
           </a:solidFill>
           <a:ln/>
         </p:spPr>
+        <p:txBody>
+          <a:bodyPr/>
+          <a:lstStyle/>
+          <a:p>
+            <a:endParaRPr lang="en-US"/>
+          </a:p>
+        </p:txBody>
       </p:sp>
       <p:sp>
         <p:nvSpPr>
@@ -5918,7 +5791,7 @@
         </p:nvSpPr>
         <p:spPr>
           <a:xfrm>
-            <a:off x="4594860" y="2057400"/>
+            <a:off x="4229100" y="2057400"/>
             <a:ext cx="731520" cy="731520"/>
           </a:xfrm>
           <a:prstGeom prst="rect">
@@ -5931,7 +5804,7 @@
           <a:bodyPr wrap="square" rtlCol="0" anchor="ctr"/>
           <a:lstStyle/>
           <a:p>
-            <a:pPr algn="ctr" indent="0" marL="0">
+            <a:pPr marL="0" indent="0" algn="ctr">
               <a:buNone/>
             </a:pPr>
             <a:r>
@@ -5957,7 +5830,7 @@
         </p:nvSpPr>
         <p:spPr>
           <a:xfrm>
-            <a:off x="3794760" y="2971800"/>
+            <a:off x="3429000" y="2971800"/>
             <a:ext cx="2331720" cy="548640"/>
           </a:xfrm>
           <a:prstGeom prst="rect">
@@ -5970,7 +5843,7 @@
           <a:bodyPr wrap="square" rtlCol="0" anchor="ctr"/>
           <a:lstStyle/>
           <a:p>
-            <a:pPr algn="ctr" indent="0" marL="0">
+            <a:pPr marL="0" indent="0" algn="ctr">
               <a:buNone/>
             </a:pPr>
             <a:r>
@@ -5996,7 +5869,7 @@
         </p:nvSpPr>
         <p:spPr>
           <a:xfrm>
-            <a:off x="3840480" y="3566160"/>
+            <a:off x="3474720" y="3566160"/>
             <a:ext cx="2240280" cy="1554480"/>
           </a:xfrm>
           <a:prstGeom prst="rect">
@@ -6009,7 +5882,7 @@
           <a:bodyPr wrap="square" rtlCol="0" anchor="t"/>
           <a:lstStyle/>
           <a:p>
-            <a:pPr algn="ctr" indent="0" marL="0">
+            <a:pPr marL="0" indent="0" algn="ctr">
               <a:lnSpc>
                 <a:spcPct val="120000"/>
               </a:lnSpc>
@@ -6024,7 +5897,29 @@
                 <a:ea typeface="Calibri" pitchFamily="34" charset="-122"/>
                 <a:cs typeface="Calibri" pitchFamily="34" charset="-120"/>
               </a:rPr>
-              <a:t>Adaptive Threshold compares each pixel to its neighbourhood; robust to uneven light</a:t>
+              <a:t>Adaptive Threshold compares each pixel to its </a:t>
+            </a:r>
+            <a:r>
+              <a:rPr lang="en-US" sz="1300" dirty="0" err="1">
+                <a:solidFill>
+                  <a:srgbClr val="5B6770"/>
+                </a:solidFill>
+                <a:latin typeface="Calibri" pitchFamily="34" charset="0"/>
+                <a:ea typeface="Calibri" pitchFamily="34" charset="-122"/>
+                <a:cs typeface="Calibri" pitchFamily="34" charset="-120"/>
+              </a:rPr>
+              <a:t>neighbourhood</a:t>
+            </a:r>
+            <a:r>
+              <a:rPr lang="en-US" sz="1300" dirty="0">
+                <a:solidFill>
+                  <a:srgbClr val="5B6770"/>
+                </a:solidFill>
+                <a:latin typeface="Calibri" pitchFamily="34" charset="0"/>
+                <a:ea typeface="Calibri" pitchFamily="34" charset="-122"/>
+                <a:cs typeface="Calibri" pitchFamily="34" charset="-120"/>
+              </a:rPr>
+              <a:t>; robust to uneven light</a:t>
             </a:r>
             <a:endParaRPr lang="en-US" sz="1300" dirty="0"/>
           </a:p>
@@ -6038,7 +5933,7 @@
         </p:nvSpPr>
         <p:spPr>
           <a:xfrm>
-            <a:off x="6327648" y="3374136"/>
+            <a:off x="5961888" y="3374136"/>
             <a:ext cx="237744" cy="292608"/>
           </a:xfrm>
           <a:prstGeom prst="rightArrow">
@@ -6049,6 +5944,13 @@
           </a:solidFill>
           <a:ln/>
         </p:spPr>
+        <p:txBody>
+          <a:bodyPr/>
+          <a:lstStyle/>
+          <a:p>
+            <a:endParaRPr lang="en-US"/>
+          </a:p>
+        </p:txBody>
       </p:sp>
       <p:sp>
         <p:nvSpPr>
@@ -6058,7 +5960,7 @@
         </p:nvSpPr>
         <p:spPr>
           <a:xfrm>
-            <a:off x="6583680" y="1737360"/>
+            <a:off x="6217920" y="1737360"/>
             <a:ext cx="2697480" cy="3566160"/>
           </a:xfrm>
           <a:prstGeom prst="roundRect">
@@ -6076,13 +5978,20 @@
             <a:prstDash val="solid"/>
           </a:ln>
           <a:effectLst>
-            <a:outerShdw sx="100000" sy="100000" kx="0" ky="0" algn="bl" rotWithShape="0" blurRad="76200" dist="25400" dir="5400000">
+            <a:outerShdw blurRad="76200" dist="25400" dir="5400000" algn="bl" rotWithShape="0">
               <a:srgbClr val="BBBBBB">
                 <a:alpha val="45000"/>
               </a:srgbClr>
             </a:outerShdw>
           </a:effectLst>
         </p:spPr>
+        <p:txBody>
+          <a:bodyPr/>
+          <a:lstStyle/>
+          <a:p>
+            <a:endParaRPr lang="en-US"/>
+          </a:p>
+        </p:txBody>
       </p:sp>
       <p:sp>
         <p:nvSpPr>
@@ -6092,7 +6001,7 @@
         </p:nvSpPr>
         <p:spPr>
           <a:xfrm>
-            <a:off x="7566660" y="2057400"/>
+            <a:off x="7200900" y="2057400"/>
             <a:ext cx="731520" cy="731520"/>
           </a:xfrm>
           <a:prstGeom prst="ellipse">
@@ -6103,6 +6012,13 @@
           </a:solidFill>
           <a:ln/>
         </p:spPr>
+        <p:txBody>
+          <a:bodyPr/>
+          <a:lstStyle/>
+          <a:p>
+            <a:endParaRPr lang="en-US"/>
+          </a:p>
+        </p:txBody>
       </p:sp>
       <p:sp>
         <p:nvSpPr>
@@ -6112,7 +6028,7 @@
         </p:nvSpPr>
         <p:spPr>
           <a:xfrm>
-            <a:off x="7566660" y="2057400"/>
+            <a:off x="7200900" y="2057400"/>
             <a:ext cx="731520" cy="731520"/>
           </a:xfrm>
           <a:prstGeom prst="rect">
@@ -6125,7 +6041,7 @@
           <a:bodyPr wrap="square" rtlCol="0" anchor="ctr"/>
           <a:lstStyle/>
           <a:p>
-            <a:pPr algn="ctr" indent="0" marL="0">
+            <a:pPr marL="0" indent="0" algn="ctr">
               <a:buNone/>
             </a:pPr>
             <a:r>
@@ -6151,7 +6067,7 @@
         </p:nvSpPr>
         <p:spPr>
           <a:xfrm>
-            <a:off x="6766560" y="2971800"/>
+            <a:off x="6400800" y="2971800"/>
             <a:ext cx="2331720" cy="548640"/>
           </a:xfrm>
           <a:prstGeom prst="rect">
@@ -6164,7 +6080,7 @@
           <a:bodyPr wrap="square" rtlCol="0" anchor="ctr"/>
           <a:lstStyle/>
           <a:p>
-            <a:pPr algn="ctr" indent="0" marL="0">
+            <a:pPr marL="0" indent="0" algn="ctr">
               <a:buNone/>
             </a:pPr>
             <a:r>
@@ -6190,7 +6106,7 @@
         </p:nvSpPr>
         <p:spPr>
           <a:xfrm>
-            <a:off x="6812280" y="3566160"/>
+            <a:off x="6446520" y="3566160"/>
             <a:ext cx="2240280" cy="1554480"/>
           </a:xfrm>
           <a:prstGeom prst="rect">
@@ -6203,7 +6119,7 @@
           <a:bodyPr wrap="square" rtlCol="0" anchor="t"/>
           <a:lstStyle/>
           <a:p>
-            <a:pPr algn="ctr" indent="0" marL="0">
+            <a:pPr marL="0" indent="0" algn="ctr">
               <a:lnSpc>
                 <a:spcPct val="120000"/>
               </a:lnSpc>
@@ -6232,7 +6148,7 @@
         </p:nvSpPr>
         <p:spPr>
           <a:xfrm>
-            <a:off x="9299448" y="3374136"/>
+            <a:off x="8933688" y="3374136"/>
             <a:ext cx="237744" cy="292608"/>
           </a:xfrm>
           <a:prstGeom prst="rightArrow">
@@ -6243,6 +6159,13 @@
           </a:solidFill>
           <a:ln/>
         </p:spPr>
+        <p:txBody>
+          <a:bodyPr/>
+          <a:lstStyle/>
+          <a:p>
+            <a:endParaRPr lang="en-US"/>
+          </a:p>
+        </p:txBody>
       </p:sp>
       <p:sp>
         <p:nvSpPr>
@@ -6252,7 +6175,7 @@
         </p:nvSpPr>
         <p:spPr>
           <a:xfrm>
-            <a:off x="9555480" y="1737360"/>
+            <a:off x="9189720" y="1737360"/>
             <a:ext cx="2697480" cy="3566160"/>
           </a:xfrm>
           <a:prstGeom prst="roundRect">
@@ -6270,13 +6193,20 @@
             <a:prstDash val="solid"/>
           </a:ln>
           <a:effectLst>
-            <a:outerShdw sx="100000" sy="100000" kx="0" ky="0" algn="bl" rotWithShape="0" blurRad="76200" dist="25400" dir="5400000">
+            <a:outerShdw blurRad="76200" dist="25400" dir="5400000" algn="bl" rotWithShape="0">
               <a:srgbClr val="BBBBBB">
                 <a:alpha val="45000"/>
               </a:srgbClr>
             </a:outerShdw>
           </a:effectLst>
         </p:spPr>
+        <p:txBody>
+          <a:bodyPr/>
+          <a:lstStyle/>
+          <a:p>
+            <a:endParaRPr lang="en-US"/>
+          </a:p>
+        </p:txBody>
       </p:sp>
       <p:sp>
         <p:nvSpPr>
@@ -6286,7 +6216,7 @@
         </p:nvSpPr>
         <p:spPr>
           <a:xfrm>
-            <a:off x="10538460" y="2057400"/>
+            <a:off x="10172700" y="2057400"/>
             <a:ext cx="731520" cy="731520"/>
           </a:xfrm>
           <a:prstGeom prst="ellipse">
@@ -6297,6 +6227,13 @@
           </a:solidFill>
           <a:ln/>
         </p:spPr>
+        <p:txBody>
+          <a:bodyPr/>
+          <a:lstStyle/>
+          <a:p>
+            <a:endParaRPr lang="en-US"/>
+          </a:p>
+        </p:txBody>
       </p:sp>
       <p:sp>
         <p:nvSpPr>
@@ -6306,7 +6243,7 @@
         </p:nvSpPr>
         <p:spPr>
           <a:xfrm>
-            <a:off x="10538460" y="2057400"/>
+            <a:off x="10172700" y="2057400"/>
             <a:ext cx="731520" cy="731520"/>
           </a:xfrm>
           <a:prstGeom prst="rect">
@@ -6319,7 +6256,7 @@
           <a:bodyPr wrap="square" rtlCol="0" anchor="ctr"/>
           <a:lstStyle/>
           <a:p>
-            <a:pPr algn="ctr" indent="0" marL="0">
+            <a:pPr marL="0" indent="0" algn="ctr">
               <a:buNone/>
             </a:pPr>
             <a:r>
@@ -6345,7 +6282,7 @@
         </p:nvSpPr>
         <p:spPr>
           <a:xfrm>
-            <a:off x="9738360" y="2971800"/>
+            <a:off x="9372600" y="2971800"/>
             <a:ext cx="2331720" cy="548640"/>
           </a:xfrm>
           <a:prstGeom prst="rect">
@@ -6358,7 +6295,7 @@
           <a:bodyPr wrap="square" rtlCol="0" anchor="ctr"/>
           <a:lstStyle/>
           <a:p>
-            <a:pPr algn="ctr" indent="0" marL="0">
+            <a:pPr marL="0" indent="0" algn="ctr">
               <a:buNone/>
             </a:pPr>
             <a:r>
@@ -6384,7 +6321,7 @@
         </p:nvSpPr>
         <p:spPr>
           <a:xfrm>
-            <a:off x="9784080" y="3566160"/>
+            <a:off x="9418320" y="3566160"/>
             <a:ext cx="2240280" cy="1554480"/>
           </a:xfrm>
           <a:prstGeom prst="rect">
@@ -6397,7 +6334,7 @@
           <a:bodyPr wrap="square" rtlCol="0" anchor="t"/>
           <a:lstStyle/>
           <a:p>
-            <a:pPr algn="ctr" indent="0" marL="0">
+            <a:pPr marL="0" indent="0" algn="ctr">
               <a:lnSpc>
                 <a:spcPct val="120000"/>
               </a:lnSpc>
@@ -6418,45 +6355,6 @@
           </a:p>
         </p:txBody>
       </p:sp>
-      <p:sp>
-        <p:nvSpPr>
-          <p:cNvPr id="26" name="Text 24"/>
-          <p:cNvSpPr/>
-          <p:nvPr/>
-        </p:nvSpPr>
-        <p:spPr>
-          <a:xfrm>
-            <a:off x="640080" y="5577840"/>
-            <a:ext cx="10881360" cy="457200"/>
-          </a:xfrm>
-          <a:prstGeom prst="rect">
-            <a:avLst/>
-          </a:prstGeom>
-          <a:noFill/>
-          <a:ln/>
-        </p:spPr>
-        <p:txBody>
-          <a:bodyPr wrap="square" rtlCol="0" anchor="ctr"/>
-          <a:lstStyle/>
-          <a:p>
-            <a:pPr algn="ctr" indent="0" marL="0">
-              <a:buNone/>
-            </a:pPr>
-            <a:r>
-              <a:rPr lang="en-US" sz="1400" i="1" dirty="0">
-                <a:solidFill>
-                  <a:srgbClr val="B5670F"/>
-                </a:solidFill>
-                <a:latin typeface="Calibri" pitchFamily="34" charset="0"/>
-                <a:ea typeface="Calibri" pitchFamily="34" charset="-122"/>
-                <a:cs typeface="Calibri" pitchFamily="34" charset="-120"/>
-              </a:rPr>
-              <a:t>All parameters come from grid search, not guesswork (stored in outputs/tuned_params.json)</a:t>
-            </a:r>
-            <a:endParaRPr lang="en-US" sz="1400" dirty="0"/>
-          </a:p>
-        </p:txBody>
-      </p:sp>
     </p:spTree>
   </p:cSld>
   <p:clrMapOvr>
@@ -6473,6 +6371,7 @@
         <a:solidFill>
           <a:srgbClr val="F4F4F2"/>
         </a:solidFill>
+        <a:effectLst/>
       </p:bgPr>
     </p:bg>
     <p:spTree>
@@ -6510,7 +6409,7 @@
           <a:bodyPr wrap="square" rtlCol="0" anchor="ctr"/>
           <a:lstStyle/>
           <a:p>
-            <a:pPr indent="0" marL="0">
+            <a:pPr marL="0" indent="0">
               <a:buNone/>
             </a:pPr>
             <a:r>
@@ -6522,7 +6421,7 @@
                 <a:ea typeface="Cambria" pitchFamily="34" charset="-122"/>
                 <a:cs typeface="Cambria" pitchFamily="34" charset="-120"/>
               </a:rPr>
-              <a:t>Trustworthy Evaluation</a:t>
+              <a:t>Evaluation</a:t>
             </a:r>
             <a:endParaRPr lang="en-US" sz="3200" dirty="0"/>
           </a:p>
@@ -6530,52 +6429,13 @@
       </p:sp>
       <p:sp>
         <p:nvSpPr>
-          <p:cNvPr id="3" name="Text 1"/>
-          <p:cNvSpPr/>
-          <p:nvPr/>
-        </p:nvSpPr>
-        <p:spPr>
-          <a:xfrm>
-            <a:off x="658368" y="1170432"/>
-            <a:ext cx="10881360" cy="457200"/>
-          </a:xfrm>
-          <a:prstGeom prst="rect">
-            <a:avLst/>
-          </a:prstGeom>
-          <a:noFill/>
-          <a:ln/>
-        </p:spPr>
-        <p:txBody>
-          <a:bodyPr wrap="square" rtlCol="0" anchor="ctr"/>
-          <a:lstStyle/>
-          <a:p>
-            <a:pPr indent="0" marL="0">
-              <a:buNone/>
-            </a:pPr>
-            <a:r>
-              <a:rPr lang="en-US" sz="1500" i="1" dirty="0">
-                <a:solidFill>
-                  <a:srgbClr val="5B6770"/>
-                </a:solidFill>
-                <a:latin typeface="Calibri" pitchFamily="34" charset="0"/>
-                <a:ea typeface="Calibri" pitchFamily="34" charset="-122"/>
-                <a:cs typeface="Calibri" pitchFamily="34" charset="-120"/>
-              </a:rPr>
-              <a:t>Measured per pixel, with a separate train / test split</a:t>
-            </a:r>
-            <a:endParaRPr lang="en-US" sz="1500" dirty="0"/>
-          </a:p>
-        </p:txBody>
-      </p:sp>
-      <p:sp>
-        <p:nvSpPr>
           <p:cNvPr id="4" name="Shape 2"/>
           <p:cNvSpPr/>
           <p:nvPr/>
         </p:nvSpPr>
         <p:spPr>
           <a:xfrm>
-            <a:off x="640080" y="1783080"/>
+            <a:off x="640080" y="1423157"/>
             <a:ext cx="10881360" cy="1234440"/>
           </a:xfrm>
           <a:prstGeom prst="roundRect">
@@ -6593,6 +6453,13 @@
             <a:prstDash val="solid"/>
           </a:ln>
         </p:spPr>
+        <p:txBody>
+          <a:bodyPr/>
+          <a:lstStyle/>
+          <a:p>
+            <a:endParaRPr lang="en-US"/>
+          </a:p>
+        </p:txBody>
       </p:sp>
       <p:sp>
         <p:nvSpPr>
@@ -6602,7 +6469,7 @@
         </p:nvSpPr>
         <p:spPr>
           <a:xfrm>
-            <a:off x="914400" y="2167128"/>
+            <a:off x="914400" y="1807205"/>
             <a:ext cx="475488" cy="475488"/>
           </a:xfrm>
           <a:prstGeom prst="ellipse">
@@ -6613,6 +6480,13 @@
           </a:solidFill>
           <a:ln/>
         </p:spPr>
+        <p:txBody>
+          <a:bodyPr/>
+          <a:lstStyle/>
+          <a:p>
+            <a:endParaRPr lang="en-US"/>
+          </a:p>
+        </p:txBody>
       </p:sp>
       <p:sp>
         <p:nvSpPr>
@@ -6622,7 +6496,7 @@
         </p:nvSpPr>
         <p:spPr>
           <a:xfrm>
-            <a:off x="914400" y="2167128"/>
+            <a:off x="914400" y="1807205"/>
             <a:ext cx="475488" cy="475488"/>
           </a:xfrm>
           <a:prstGeom prst="rect">
@@ -6635,7 +6509,7 @@
           <a:bodyPr wrap="square" rtlCol="0" anchor="ctr"/>
           <a:lstStyle/>
           <a:p>
-            <a:pPr algn="ctr" indent="0" marL="0">
+            <a:pPr marL="0" indent="0" algn="ctr">
               <a:buNone/>
             </a:pPr>
             <a:r>
@@ -6661,7 +6535,7 @@
         </p:nvSpPr>
         <p:spPr>
           <a:xfrm>
-            <a:off x="1600200" y="1920240"/>
+            <a:off x="1600200" y="1560317"/>
             <a:ext cx="9692640" cy="960120"/>
           </a:xfrm>
           <a:prstGeom prst="rect">
@@ -6674,7 +6548,7 @@
           <a:bodyPr wrap="square" rtlCol="0" anchor="ctr"/>
           <a:lstStyle/>
           <a:p>
-            <a:pPr indent="0" marL="0">
+            <a:pPr marL="0" indent="0">
               <a:lnSpc>
                 <a:spcPct val="115000"/>
               </a:lnSpc>
@@ -6689,15 +6563,9 @@
                 <a:ea typeface="Calibri" pitchFamily="34" charset="-122"/>
                 <a:cs typeface="Calibri" pitchFamily="34" charset="-120"/>
               </a:rPr>
-              <a:t>Train / held-out split
+              <a:t>Train / Test split
 </a:t>
             </a:r>
-            <a:pPr indent="0" marL="0">
-              <a:lnSpc>
-                <a:spcPct val="115000"/>
-              </a:lnSpc>
-              <a:buNone/>
-            </a:pPr>
             <a:r>
               <a:rPr lang="en-US" sz="1400" dirty="0">
                 <a:solidFill>
@@ -6721,7 +6589,7 @@
         </p:nvSpPr>
         <p:spPr>
           <a:xfrm>
-            <a:off x="640080" y="3200400"/>
+            <a:off x="640080" y="2840477"/>
             <a:ext cx="10881360" cy="1234440"/>
           </a:xfrm>
           <a:prstGeom prst="roundRect">
@@ -6739,6 +6607,13 @@
             <a:prstDash val="solid"/>
           </a:ln>
         </p:spPr>
+        <p:txBody>
+          <a:bodyPr/>
+          <a:lstStyle/>
+          <a:p>
+            <a:endParaRPr lang="en-US"/>
+          </a:p>
+        </p:txBody>
       </p:sp>
       <p:sp>
         <p:nvSpPr>
@@ -6748,7 +6623,7 @@
         </p:nvSpPr>
         <p:spPr>
           <a:xfrm>
-            <a:off x="914400" y="3584448"/>
+            <a:off x="914400" y="3224525"/>
             <a:ext cx="475488" cy="475488"/>
           </a:xfrm>
           <a:prstGeom prst="ellipse">
@@ -6759,6 +6634,13 @@
           </a:solidFill>
           <a:ln/>
         </p:spPr>
+        <p:txBody>
+          <a:bodyPr/>
+          <a:lstStyle/>
+          <a:p>
+            <a:endParaRPr lang="en-US"/>
+          </a:p>
+        </p:txBody>
       </p:sp>
       <p:sp>
         <p:nvSpPr>
@@ -6768,7 +6650,7 @@
         </p:nvSpPr>
         <p:spPr>
           <a:xfrm>
-            <a:off x="914400" y="3584448"/>
+            <a:off x="914400" y="3224525"/>
             <a:ext cx="475488" cy="475488"/>
           </a:xfrm>
           <a:prstGeom prst="rect">
@@ -6781,7 +6663,7 @@
           <a:bodyPr wrap="square" rtlCol="0" anchor="ctr"/>
           <a:lstStyle/>
           <a:p>
-            <a:pPr algn="ctr" indent="0" marL="0">
+            <a:pPr marL="0" indent="0" algn="ctr">
               <a:buNone/>
             </a:pPr>
             <a:r>
@@ -6807,7 +6689,7 @@
         </p:nvSpPr>
         <p:spPr>
           <a:xfrm>
-            <a:off x="1600200" y="3337560"/>
+            <a:off x="1600200" y="2977637"/>
             <a:ext cx="9692640" cy="960120"/>
           </a:xfrm>
           <a:prstGeom prst="rect">
@@ -6820,7 +6702,7 @@
           <a:bodyPr wrap="square" rtlCol="0" anchor="ctr"/>
           <a:lstStyle/>
           <a:p>
-            <a:pPr indent="0" marL="0">
+            <a:pPr marL="0" indent="0">
               <a:lnSpc>
                 <a:spcPct val="115000"/>
               </a:lnSpc>
@@ -6838,12 +6720,6 @@
               <a:t>Pick good AND stable
 </a:t>
             </a:r>
-            <a:pPr indent="0" marL="0">
-              <a:lnSpc>
-                <a:spcPct val="115000"/>
-              </a:lnSpc>
-              <a:buNone/>
-            </a:pPr>
             <a:r>
               <a:rPr lang="en-US" sz="1400" dirty="0">
                 <a:solidFill>
@@ -6867,7 +6743,7 @@
         </p:nvSpPr>
         <p:spPr>
           <a:xfrm>
-            <a:off x="640080" y="4617720"/>
+            <a:off x="640080" y="4257797"/>
             <a:ext cx="10881360" cy="1234440"/>
           </a:xfrm>
           <a:prstGeom prst="roundRect">
@@ -6885,6 +6761,13 @@
             <a:prstDash val="solid"/>
           </a:ln>
         </p:spPr>
+        <p:txBody>
+          <a:bodyPr/>
+          <a:lstStyle/>
+          <a:p>
+            <a:endParaRPr lang="en-US"/>
+          </a:p>
+        </p:txBody>
       </p:sp>
       <p:sp>
         <p:nvSpPr>
@@ -6894,7 +6777,7 @@
         </p:nvSpPr>
         <p:spPr>
           <a:xfrm>
-            <a:off x="914400" y="5001768"/>
+            <a:off x="914400" y="4641845"/>
             <a:ext cx="475488" cy="475488"/>
           </a:xfrm>
           <a:prstGeom prst="ellipse">
@@ -6905,6 +6788,13 @@
           </a:solidFill>
           <a:ln/>
         </p:spPr>
+        <p:txBody>
+          <a:bodyPr/>
+          <a:lstStyle/>
+          <a:p>
+            <a:endParaRPr lang="en-US"/>
+          </a:p>
+        </p:txBody>
       </p:sp>
       <p:sp>
         <p:nvSpPr>
@@ -6914,7 +6804,7 @@
         </p:nvSpPr>
         <p:spPr>
           <a:xfrm>
-            <a:off x="914400" y="5001768"/>
+            <a:off x="914400" y="4641845"/>
             <a:ext cx="475488" cy="475488"/>
           </a:xfrm>
           <a:prstGeom prst="rect">
@@ -6927,7 +6817,7 @@
           <a:bodyPr wrap="square" rtlCol="0" anchor="ctr"/>
           <a:lstStyle/>
           <a:p>
-            <a:pPr algn="ctr" indent="0" marL="0">
+            <a:pPr marL="0" indent="0" algn="ctr">
               <a:buNone/>
             </a:pPr>
             <a:r>
@@ -6953,7 +6843,7 @@
         </p:nvSpPr>
         <p:spPr>
           <a:xfrm>
-            <a:off x="1600200" y="4754880"/>
+            <a:off x="1600200" y="4394957"/>
             <a:ext cx="9692640" cy="960120"/>
           </a:xfrm>
           <a:prstGeom prst="rect">
@@ -6966,7 +6856,7 @@
           <a:bodyPr wrap="square" rtlCol="0" anchor="ctr"/>
           <a:lstStyle/>
           <a:p>
-            <a:pPr indent="0" marL="0">
+            <a:pPr marL="0" indent="0">
               <a:lnSpc>
                 <a:spcPct val="115000"/>
               </a:lnSpc>
@@ -6984,12 +6874,6 @@
               <a:t>Not Accuracy
 </a:t>
             </a:r>
-            <a:pPr indent="0" marL="0">
-              <a:lnSpc>
-                <a:spcPct val="115000"/>
-              </a:lnSpc>
-              <a:buNone/>
-            </a:pPr>
             <a:r>
               <a:rPr lang="en-US" sz="1400" dirty="0">
                 <a:solidFill>
@@ -7021,6 +6905,7 @@
         <a:solidFill>
           <a:srgbClr val="F4F4F2"/>
         </a:solidFill>
+        <a:effectLst/>
       </p:bgPr>
     </p:bg>
     <p:spTree>
@@ -7058,7 +6943,7 @@
           <a:bodyPr wrap="square" rtlCol="0" anchor="ctr"/>
           <a:lstStyle/>
           <a:p>
-            <a:pPr indent="0" marL="0">
+            <a:pPr marL="0" indent="0">
               <a:buNone/>
             </a:pPr>
             <a:r>
@@ -7097,11 +6982,11 @@
           <a:bodyPr wrap="square" rtlCol="0" anchor="ctr"/>
           <a:lstStyle/>
           <a:p>
-            <a:pPr indent="0" marL="0">
+            <a:pPr marL="0" indent="0">
               <a:buNone/>
             </a:pPr>
             <a:r>
-              <a:rPr lang="en-US" sz="1500" i="1" dirty="0">
+              <a:rPr lang="en-US" sz="1500" dirty="0">
                 <a:solidFill>
                   <a:srgbClr val="5B6770"/>
                 </a:solidFill>
@@ -7117,14 +7002,14 @@
       </p:sp>
       <p:pic>
         <p:nvPicPr>
-          <p:cNvPr id="4" name="Image 0" descr="/sessions/eager-charming-feynman/mnt/MiniProject/docs/figures/metric_diagram.png">    </p:cNvPr>
+          <p:cNvPr id="4" name="Image 0" descr="/sessions/eager-charming-feynman/mnt/MiniProject/docs/figures/metric_diagram.png"/>
           <p:cNvPicPr>
             <a:picLocks noChangeAspect="1"/>
           </p:cNvPicPr>
           <p:nvPr/>
         </p:nvPicPr>
         <p:blipFill>
-          <a:blip r:embed="rId1"/>
+          <a:blip r:embed="rId3"/>
           <a:stretch>
             <a:fillRect/>
           </a:stretch>
@@ -7160,7 +7045,7 @@
           <a:bodyPr wrap="square" rtlCol="0" anchor="ctr"/>
           <a:lstStyle/>
           <a:p>
-            <a:pPr algn="ctr" indent="0" marL="0">
+            <a:pPr marL="0" indent="0" algn="ctr">
               <a:buNone/>
             </a:pPr>
             <a:r>
@@ -7174,9 +7059,6 @@
               </a:rPr>
               <a:t>TP</a:t>
             </a:r>
-            <a:pPr algn="ctr" indent="0" marL="0">
-              <a:buNone/>
-            </a:pPr>
             <a:r>
               <a:rPr lang="en-US" sz="1400" dirty="0">
                 <a:solidFill>
@@ -7188,9 +7070,6 @@
               </a:rPr>
               <a:t> correct   </a:t>
             </a:r>
-            <a:pPr algn="ctr" indent="0" marL="0">
-              <a:buNone/>
-            </a:pPr>
             <a:r>
               <a:rPr lang="en-US" sz="1400" b="1" dirty="0">
                 <a:solidFill>
@@ -7202,9 +7081,6 @@
               </a:rPr>
               <a:t>FP</a:t>
             </a:r>
-            <a:pPr algn="ctr" indent="0" marL="0">
-              <a:buNone/>
-            </a:pPr>
             <a:r>
               <a:rPr lang="en-US" sz="1400" dirty="0">
                 <a:solidFill>
@@ -7216,9 +7092,6 @@
               </a:rPr>
               <a:t> over-predicted   </a:t>
             </a:r>
-            <a:pPr algn="ctr" indent="0" marL="0">
-              <a:buNone/>
-            </a:pPr>
             <a:r>
               <a:rPr lang="en-US" sz="1400" b="1" dirty="0">
                 <a:solidFill>
@@ -7230,9 +7103,6 @@
               </a:rPr>
               <a:t>FN</a:t>
             </a:r>
-            <a:pPr algn="ctr" indent="0" marL="0">
-              <a:buNone/>
-            </a:pPr>
             <a:r>
               <a:rPr lang="en-US" sz="1400" dirty="0">
                 <a:solidFill>
@@ -7269,7 +7139,7 @@
           <a:bodyPr wrap="square" rtlCol="0" anchor="ctr"/>
           <a:lstStyle/>
           <a:p>
-            <a:pPr algn="ctr" indent="0" marL="0">
+            <a:pPr marL="0" indent="0" algn="ctr">
               <a:buNone/>
             </a:pPr>
             <a:r>
@@ -7313,6 +7183,13 @@
             <a:prstDash val="solid"/>
           </a:ln>
         </p:spPr>
+        <p:txBody>
+          <a:bodyPr/>
+          <a:lstStyle/>
+          <a:p>
+            <a:endParaRPr lang="en-US"/>
+          </a:p>
+        </p:txBody>
       </p:sp>
       <p:sp>
         <p:nvSpPr>
@@ -7335,7 +7212,7 @@
           <a:bodyPr wrap="square" rtlCol="0" anchor="ctr"/>
           <a:lstStyle/>
           <a:p>
-            <a:pPr indent="0" marL="0">
+            <a:pPr marL="0" indent="0">
               <a:buNone/>
             </a:pPr>
             <a:r>
@@ -7374,7 +7251,7 @@
           <a:bodyPr wrap="square" rtlCol="0" anchor="ctr"/>
           <a:lstStyle/>
           <a:p>
-            <a:pPr indent="0" marL="0">
+            <a:pPr marL="0" indent="0">
               <a:buNone/>
             </a:pPr>
             <a:r>
@@ -7413,7 +7290,7 @@
           <a:bodyPr wrap="square" rtlCol="0" anchor="ctr"/>
           <a:lstStyle/>
           <a:p>
-            <a:pPr algn="r" indent="0" marL="0">
+            <a:pPr marL="0" indent="0" algn="r">
               <a:buNone/>
             </a:pPr>
             <a:r>
@@ -7452,7 +7329,7 @@
           <a:bodyPr wrap="square" rtlCol="0" anchor="ctr"/>
           <a:lstStyle/>
           <a:p>
-            <a:pPr indent="0" marL="0">
+            <a:pPr marL="0" indent="0">
               <a:buNone/>
             </a:pPr>
             <a:r>
@@ -7496,6 +7373,13 @@
             <a:prstDash val="solid"/>
           </a:ln>
         </p:spPr>
+        <p:txBody>
+          <a:bodyPr/>
+          <a:lstStyle/>
+          <a:p>
+            <a:endParaRPr lang="en-US"/>
+          </a:p>
+        </p:txBody>
       </p:sp>
       <p:sp>
         <p:nvSpPr>
@@ -7518,7 +7402,7 @@
           <a:bodyPr wrap="square" rtlCol="0" anchor="ctr"/>
           <a:lstStyle/>
           <a:p>
-            <a:pPr indent="0" marL="0">
+            <a:pPr marL="0" indent="0">
               <a:buNone/>
             </a:pPr>
             <a:r>
@@ -7557,7 +7441,7 @@
           <a:bodyPr wrap="square" rtlCol="0" anchor="ctr"/>
           <a:lstStyle/>
           <a:p>
-            <a:pPr indent="0" marL="0">
+            <a:pPr marL="0" indent="0">
               <a:buNone/>
             </a:pPr>
             <a:r>
@@ -7596,7 +7480,7 @@
           <a:bodyPr wrap="square" rtlCol="0" anchor="ctr"/>
           <a:lstStyle/>
           <a:p>
-            <a:pPr algn="r" indent="0" marL="0">
+            <a:pPr marL="0" indent="0" algn="r">
               <a:buNone/>
             </a:pPr>
             <a:r>
@@ -7635,7 +7519,7 @@
           <a:bodyPr wrap="square" rtlCol="0" anchor="ctr"/>
           <a:lstStyle/>
           <a:p>
-            <a:pPr indent="0" marL="0">
+            <a:pPr marL="0" indent="0">
               <a:buNone/>
             </a:pPr>
             <a:r>
@@ -7679,6 +7563,13 @@
             <a:prstDash val="solid"/>
           </a:ln>
         </p:spPr>
+        <p:txBody>
+          <a:bodyPr/>
+          <a:lstStyle/>
+          <a:p>
+            <a:endParaRPr lang="en-US"/>
+          </a:p>
+        </p:txBody>
       </p:sp>
       <p:sp>
         <p:nvSpPr>
@@ -7701,7 +7592,7 @@
           <a:bodyPr wrap="square" rtlCol="0" anchor="ctr"/>
           <a:lstStyle/>
           <a:p>
-            <a:pPr indent="0" marL="0">
+            <a:pPr marL="0" indent="0">
               <a:buNone/>
             </a:pPr>
             <a:r>
@@ -7740,7 +7631,7 @@
           <a:bodyPr wrap="square" rtlCol="0" anchor="ctr"/>
           <a:lstStyle/>
           <a:p>
-            <a:pPr indent="0" marL="0">
+            <a:pPr marL="0" indent="0">
               <a:buNone/>
             </a:pPr>
             <a:r>
@@ -7779,7 +7670,7 @@
           <a:bodyPr wrap="square" rtlCol="0" anchor="ctr"/>
           <a:lstStyle/>
           <a:p>
-            <a:pPr algn="r" indent="0" marL="0">
+            <a:pPr marL="0" indent="0" algn="r">
               <a:buNone/>
             </a:pPr>
             <a:r>
@@ -7818,7 +7709,7 @@
           <a:bodyPr wrap="square" rtlCol="0" anchor="ctr"/>
           <a:lstStyle/>
           <a:p>
-            <a:pPr indent="0" marL="0">
+            <a:pPr marL="0" indent="0">
               <a:buNone/>
             </a:pPr>
             <a:r>
@@ -7862,6 +7753,13 @@
             <a:prstDash val="solid"/>
           </a:ln>
         </p:spPr>
+        <p:txBody>
+          <a:bodyPr/>
+          <a:lstStyle/>
+          <a:p>
+            <a:endParaRPr lang="en-US"/>
+          </a:p>
+        </p:txBody>
       </p:sp>
       <p:sp>
         <p:nvSpPr>
@@ -7884,7 +7782,7 @@
           <a:bodyPr wrap="square" rtlCol="0" anchor="ctr"/>
           <a:lstStyle/>
           <a:p>
-            <a:pPr indent="0" marL="0">
+            <a:pPr marL="0" indent="0">
               <a:buNone/>
             </a:pPr>
             <a:r>
@@ -7923,7 +7821,7 @@
           <a:bodyPr wrap="square" rtlCol="0" anchor="ctr"/>
           <a:lstStyle/>
           <a:p>
-            <a:pPr indent="0" marL="0">
+            <a:pPr marL="0" indent="0">
               <a:buNone/>
             </a:pPr>
             <a:r>
@@ -7962,7 +7860,7 @@
           <a:bodyPr wrap="square" rtlCol="0" anchor="ctr"/>
           <a:lstStyle/>
           <a:p>
-            <a:pPr algn="r" indent="0" marL="0">
+            <a:pPr marL="0" indent="0" algn="r">
               <a:buNone/>
             </a:pPr>
             <a:r>
@@ -8001,7 +7899,7 @@
           <a:bodyPr wrap="square" rtlCol="0" anchor="ctr"/>
           <a:lstStyle/>
           <a:p>
-            <a:pPr indent="0" marL="0">
+            <a:pPr marL="0" indent="0">
               <a:buNone/>
             </a:pPr>
             <a:r>
@@ -8035,6 +7933,7 @@
         <a:solidFill>
           <a:srgbClr val="F4F4F2"/>
         </a:solidFill>
+        <a:effectLst/>
       </p:bgPr>
     </p:bg>
     <p:spTree>
@@ -8072,7 +7971,7 @@
           <a:bodyPr wrap="square" rtlCol="0" anchor="ctr"/>
           <a:lstStyle/>
           <a:p>
-            <a:pPr indent="0" marL="0">
+            <a:pPr marL="0" indent="0">
               <a:buNone/>
             </a:pPr>
             <a:r>
@@ -8092,45 +7991,6 @@
       </p:sp>
       <p:sp>
         <p:nvSpPr>
-          <p:cNvPr id="3" name="Text 1"/>
-          <p:cNvSpPr/>
-          <p:nvPr/>
-        </p:nvSpPr>
-        <p:spPr>
-          <a:xfrm>
-            <a:off x="658368" y="1170432"/>
-            <a:ext cx="10881360" cy="457200"/>
-          </a:xfrm>
-          <a:prstGeom prst="rect">
-            <a:avLst/>
-          </a:prstGeom>
-          <a:noFill/>
-          <a:ln/>
-        </p:spPr>
-        <p:txBody>
-          <a:bodyPr wrap="square" rtlCol="0" anchor="ctr"/>
-          <a:lstStyle/>
-          <a:p>
-            <a:pPr indent="0" marL="0">
-              <a:buNone/>
-            </a:pPr>
-            <a:r>
-              <a:rPr lang="en-US" sz="1500" i="1" dirty="0">
-                <a:solidFill>
-                  <a:srgbClr val="5B6770"/>
-                </a:solidFill>
-                <a:latin typeface="Calibri" pitchFamily="34" charset="0"/>
-                <a:ea typeface="Calibri" pitchFamily="34" charset="-122"/>
-                <a:cs typeface="Calibri" pitchFamily="34" charset="-120"/>
-              </a:rPr>
-              <a:t>Mean pixel-level metrics over all 118 real images</a:t>
-            </a:r>
-            <a:endParaRPr lang="en-US" sz="1500" dirty="0"/>
-          </a:p>
-        </p:txBody>
-      </p:sp>
-      <p:sp>
-        <p:nvSpPr>
           <p:cNvPr id="4" name="Shape 2"/>
           <p:cNvSpPr/>
           <p:nvPr/>
@@ -8155,6 +8015,13 @@
             <a:prstDash val="solid"/>
           </a:ln>
         </p:spPr>
+        <p:txBody>
+          <a:bodyPr/>
+          <a:lstStyle/>
+          <a:p>
+            <a:endParaRPr lang="en-US"/>
+          </a:p>
+        </p:txBody>
       </p:sp>
       <p:sp>
         <p:nvSpPr>
@@ -8177,7 +8044,7 @@
           <a:bodyPr wrap="square" rtlCol="0" anchor="ctr"/>
           <a:lstStyle/>
           <a:p>
-            <a:pPr algn="ctr" indent="0" marL="0">
+            <a:pPr marL="0" indent="0" algn="ctr">
               <a:buNone/>
             </a:pPr>
             <a:r>
@@ -8216,7 +8083,7 @@
           <a:bodyPr wrap="square" rtlCol="0" anchor="ctr"/>
           <a:lstStyle/>
           <a:p>
-            <a:pPr algn="ctr" indent="0" marL="0">
+            <a:pPr marL="0" indent="0" algn="ctr">
               <a:buNone/>
             </a:pPr>
             <a:r>
@@ -8255,7 +8122,7 @@
           <a:bodyPr wrap="square" rtlCol="0" anchor="ctr"/>
           <a:lstStyle/>
           <a:p>
-            <a:pPr algn="ctr" indent="0" marL="0">
+            <a:pPr marL="0" indent="0" algn="ctr">
               <a:buNone/>
             </a:pPr>
             <a:r>
@@ -8299,6 +8166,13 @@
             <a:prstDash val="solid"/>
           </a:ln>
         </p:spPr>
+        <p:txBody>
+          <a:bodyPr/>
+          <a:lstStyle/>
+          <a:p>
+            <a:endParaRPr lang="en-US"/>
+          </a:p>
+        </p:txBody>
       </p:sp>
       <p:sp>
         <p:nvSpPr>
@@ -8321,7 +8195,7 @@
           <a:bodyPr wrap="square" rtlCol="0" anchor="ctr"/>
           <a:lstStyle/>
           <a:p>
-            <a:pPr algn="ctr" indent="0" marL="0">
+            <a:pPr marL="0" indent="0" algn="ctr">
               <a:buNone/>
             </a:pPr>
             <a:r>
@@ -8360,7 +8234,7 @@
           <a:bodyPr wrap="square" rtlCol="0" anchor="ctr"/>
           <a:lstStyle/>
           <a:p>
-            <a:pPr algn="ctr" indent="0" marL="0">
+            <a:pPr marL="0" indent="0" algn="ctr">
               <a:buNone/>
             </a:pPr>
             <a:r>
@@ -8399,7 +8273,7 @@
           <a:bodyPr wrap="square" rtlCol="0" anchor="ctr"/>
           <a:lstStyle/>
           <a:p>
-            <a:pPr algn="ctr" indent="0" marL="0">
+            <a:pPr marL="0" indent="0" algn="ctr">
               <a:buNone/>
             </a:pPr>
             <a:r>
@@ -8443,6 +8317,13 @@
             <a:prstDash val="solid"/>
           </a:ln>
         </p:spPr>
+        <p:txBody>
+          <a:bodyPr/>
+          <a:lstStyle/>
+          <a:p>
+            <a:endParaRPr lang="en-US"/>
+          </a:p>
+        </p:txBody>
       </p:sp>
       <p:sp>
         <p:nvSpPr>
@@ -8465,7 +8346,7 @@
           <a:bodyPr wrap="square" rtlCol="0" anchor="ctr"/>
           <a:lstStyle/>
           <a:p>
-            <a:pPr algn="ctr" indent="0" marL="0">
+            <a:pPr marL="0" indent="0" algn="ctr">
               <a:buNone/>
             </a:pPr>
             <a:r>
@@ -8504,7 +8385,7 @@
           <a:bodyPr wrap="square" rtlCol="0" anchor="ctr"/>
           <a:lstStyle/>
           <a:p>
-            <a:pPr algn="ctr" indent="0" marL="0">
+            <a:pPr marL="0" indent="0" algn="ctr">
               <a:buNone/>
             </a:pPr>
             <a:r>
@@ -8543,7 +8424,7 @@
           <a:bodyPr wrap="square" rtlCol="0" anchor="ctr"/>
           <a:lstStyle/>
           <a:p>
-            <a:pPr algn="ctr" indent="0" marL="0">
+            <a:pPr marL="0" indent="0" algn="ctr">
               <a:buNone/>
             </a:pPr>
             <a:r>
@@ -8587,6 +8468,13 @@
             <a:prstDash val="solid"/>
           </a:ln>
         </p:spPr>
+        <p:txBody>
+          <a:bodyPr/>
+          <a:lstStyle/>
+          <a:p>
+            <a:endParaRPr lang="en-US"/>
+          </a:p>
+        </p:txBody>
       </p:sp>
       <p:sp>
         <p:nvSpPr>
@@ -8609,7 +8497,7 @@
           <a:bodyPr wrap="square" rtlCol="0" anchor="ctr"/>
           <a:lstStyle/>
           <a:p>
-            <a:pPr algn="ctr" indent="0" marL="0">
+            <a:pPr marL="0" indent="0" algn="ctr">
               <a:buNone/>
             </a:pPr>
             <a:r>
@@ -8648,7 +8536,7 @@
           <a:bodyPr wrap="square" rtlCol="0" anchor="ctr"/>
           <a:lstStyle/>
           <a:p>
-            <a:pPr algn="ctr" indent="0" marL="0">
+            <a:pPr marL="0" indent="0" algn="ctr">
               <a:buNone/>
             </a:pPr>
             <a:r>
@@ -8687,7 +8575,7 @@
           <a:bodyPr wrap="square" rtlCol="0" anchor="ctr"/>
           <a:lstStyle/>
           <a:p>
-            <a:pPr algn="ctr" indent="0" marL="0">
+            <a:pPr marL="0" indent="0" algn="ctr">
               <a:buNone/>
             </a:pPr>
             <a:r>
@@ -8726,7 +8614,7 @@
           <a:bodyPr wrap="square" rtlCol="0" anchor="ctr"/>
           <a:lstStyle/>
           <a:p>
-            <a:pPr indent="0" marL="0">
+            <a:pPr marL="0" indent="0">
               <a:buNone/>
             </a:pPr>
             <a:r>
@@ -8746,7 +8634,7 @@
       </p:sp>
       <p:graphicFrame>
         <p:nvGraphicFramePr>
-          <p:cNvPr id="9" name="Table 0"/>
+          <p:cNvPr id="21" name="Table 0"/>
           <p:cNvGraphicFramePr>
             <a:graphicFrameLocks noGrp="1"/>
           </p:cNvGraphicFramePr>
@@ -8760,18 +8648,48 @@
         </p:nvGraphicFramePr>
         <p:xfrm>
           <a:off x="640080" y="3977640"/>
-          <a:ext cx="10881360" cy="914400"/>
+          <a:ext cx="10881360" cy="1920240"/>
         </p:xfrm>
         <a:graphic>
           <a:graphicData uri="http://schemas.openxmlformats.org/drawingml/2006/table">
             <a:tbl>
               <a:tblPr/>
               <a:tblGrid>
-                <a:gridCol w="2103120"/>
-                <a:gridCol w="2194560"/>
-                <a:gridCol w="2194560"/>
-                <a:gridCol w="2194560"/>
-                <a:gridCol w="2194560"/>
+                <a:gridCol w="2103120">
+                  <a:extLst>
+                    <a:ext uri="{9D8B030D-6E8A-4147-A177-3AD203B41FA5}">
+                      <a16:colId xmlns:a16="http://schemas.microsoft.com/office/drawing/2014/main" val="20000"/>
+                    </a:ext>
+                  </a:extLst>
+                </a:gridCol>
+                <a:gridCol w="2194560">
+                  <a:extLst>
+                    <a:ext uri="{9D8B030D-6E8A-4147-A177-3AD203B41FA5}">
+                      <a16:colId xmlns:a16="http://schemas.microsoft.com/office/drawing/2014/main" val="20001"/>
+                    </a:ext>
+                  </a:extLst>
+                </a:gridCol>
+                <a:gridCol w="2194560">
+                  <a:extLst>
+                    <a:ext uri="{9D8B030D-6E8A-4147-A177-3AD203B41FA5}">
+                      <a16:colId xmlns:a16="http://schemas.microsoft.com/office/drawing/2014/main" val="20002"/>
+                    </a:ext>
+                  </a:extLst>
+                </a:gridCol>
+                <a:gridCol w="2194560">
+                  <a:extLst>
+                    <a:ext uri="{9D8B030D-6E8A-4147-A177-3AD203B41FA5}">
+                      <a16:colId xmlns:a16="http://schemas.microsoft.com/office/drawing/2014/main" val="20003"/>
+                    </a:ext>
+                  </a:extLst>
+                </a:gridCol>
+                <a:gridCol w="2194560">
+                  <a:extLst>
+                    <a:ext uri="{9D8B030D-6E8A-4147-A177-3AD203B41FA5}">
+                      <a16:colId xmlns:a16="http://schemas.microsoft.com/office/drawing/2014/main" val="20004"/>
+                    </a:ext>
+                  </a:extLst>
+                </a:gridCol>
               </a:tblGrid>
               <a:tr h="384048">
                 <a:tc>
@@ -8779,7 +8697,7 @@
                     <a:bodyPr/>
                     <a:lstStyle/>
                     <a:p>
-                      <a:pPr indent="0" marL="0">
+                      <a:pPr marL="0" indent="0">
                         <a:buNone/>
                       </a:pPr>
                       <a:endParaRPr lang="en-US" sz="1400" dirty="0">
@@ -8789,7 +8707,7 @@
                       </a:endParaRPr>
                     </a:p>
                   </a:txBody>
-                  <a:tcPr marL="91440" marR="91440" marT="45720" marB="45720" anchor="ctr">
+                  <a:tcPr anchor="ctr">
                     <a:lnL w="12700" cap="flat" cmpd="sng" algn="ctr">
                       <a:solidFill>
                         <a:srgbClr val="DDDDDD"/>
@@ -8836,7 +8754,7 @@
                     <a:bodyPr/>
                     <a:lstStyle/>
                     <a:p>
-                      <a:pPr algn="ctr" indent="0" marL="0">
+                      <a:pPr marL="0" indent="0" algn="ctr">
                         <a:buNone/>
                       </a:pPr>
                       <a:r>
@@ -8857,7 +8775,7 @@
                       </a:endParaRPr>
                     </a:p>
                   </a:txBody>
-                  <a:tcPr marL="91440" marR="91440" marT="45720" marB="45720" anchor="ctr">
+                  <a:tcPr anchor="ctr">
                     <a:lnL w="12700" cap="flat" cmpd="sng" algn="ctr">
                       <a:solidFill>
                         <a:srgbClr val="DDDDDD"/>
@@ -8904,7 +8822,7 @@
                     <a:bodyPr/>
                     <a:lstStyle/>
                     <a:p>
-                      <a:pPr algn="ctr" indent="0" marL="0">
+                      <a:pPr marL="0" indent="0" algn="ctr">
                         <a:buNone/>
                       </a:pPr>
                       <a:r>
@@ -8925,7 +8843,7 @@
                       </a:endParaRPr>
                     </a:p>
                   </a:txBody>
-                  <a:tcPr marL="91440" marR="91440" marT="45720" marB="45720" anchor="ctr">
+                  <a:tcPr anchor="ctr">
                     <a:lnL w="12700" cap="flat" cmpd="sng" algn="ctr">
                       <a:solidFill>
                         <a:srgbClr val="DDDDDD"/>
@@ -8972,7 +8890,7 @@
                     <a:bodyPr/>
                     <a:lstStyle/>
                     <a:p>
-                      <a:pPr algn="ctr" indent="0" marL="0">
+                      <a:pPr marL="0" indent="0" algn="ctr">
                         <a:buNone/>
                       </a:pPr>
                       <a:r>
@@ -8993,7 +8911,7 @@
                       </a:endParaRPr>
                     </a:p>
                   </a:txBody>
-                  <a:tcPr marL="91440" marR="91440" marT="45720" marB="45720" anchor="ctr">
+                  <a:tcPr anchor="ctr">
                     <a:lnL w="12700" cap="flat" cmpd="sng" algn="ctr">
                       <a:solidFill>
                         <a:srgbClr val="DDDDDD"/>
@@ -9040,7 +8958,7 @@
                     <a:bodyPr/>
                     <a:lstStyle/>
                     <a:p>
-                      <a:pPr algn="ctr" indent="0" marL="0">
+                      <a:pPr marL="0" indent="0" algn="ctr">
                         <a:buNone/>
                       </a:pPr>
                       <a:r>
@@ -9061,7 +8979,7 @@
                       </a:endParaRPr>
                     </a:p>
                   </a:txBody>
-                  <a:tcPr marL="91440" marR="91440" marT="45720" marB="45720" anchor="ctr">
+                  <a:tcPr anchor="ctr">
                     <a:lnL w="12700" cap="flat" cmpd="sng" algn="ctr">
                       <a:solidFill>
                         <a:srgbClr val="DDDDDD"/>
@@ -9103,6 +9021,11 @@
                     </a:solidFill>
                   </a:tcPr>
                 </a:tc>
+                <a:extLst>
+                  <a:ext uri="{0D108BD9-81ED-4DB2-BD59-A6C34878D82A}">
+                    <a16:rowId xmlns:a16="http://schemas.microsoft.com/office/drawing/2014/main" val="10000"/>
+                  </a:ext>
+                </a:extLst>
               </a:tr>
               <a:tr h="384048">
                 <a:tc>
@@ -9110,7 +9033,7 @@
                     <a:bodyPr/>
                     <a:lstStyle/>
                     <a:p>
-                      <a:pPr algn="l" indent="0" marL="0">
+                      <a:pPr marL="0" indent="0" algn="l">
                         <a:buNone/>
                       </a:pPr>
                       <a:r>
@@ -9131,7 +9054,7 @@
                       </a:endParaRPr>
                     </a:p>
                   </a:txBody>
-                  <a:tcPr marL="91440" marR="91440" marT="45720" marB="45720" anchor="ctr">
+                  <a:tcPr anchor="ctr">
                     <a:lnL w="12700" cap="flat" cmpd="sng" algn="ctr">
                       <a:solidFill>
                         <a:srgbClr val="DDDDDD"/>
@@ -9178,7 +9101,7 @@
                     <a:bodyPr/>
                     <a:lstStyle/>
                     <a:p>
-                      <a:pPr algn="ctr" indent="0" marL="0">
+                      <a:pPr marL="0" indent="0" algn="ctr">
                         <a:buNone/>
                       </a:pPr>
                       <a:r>
@@ -9199,7 +9122,7 @@
                       </a:endParaRPr>
                     </a:p>
                   </a:txBody>
-                  <a:tcPr marL="91440" marR="91440" marT="45720" marB="45720" anchor="ctr">
+                  <a:tcPr anchor="ctr">
                     <a:lnL w="12700" cap="flat" cmpd="sng" algn="ctr">
                       <a:solidFill>
                         <a:srgbClr val="DDDDDD"/>
@@ -9246,7 +9169,7 @@
                     <a:bodyPr/>
                     <a:lstStyle/>
                     <a:p>
-                      <a:pPr algn="ctr" indent="0" marL="0">
+                      <a:pPr marL="0" indent="0" algn="ctr">
                         <a:buNone/>
                       </a:pPr>
                       <a:r>
@@ -9267,7 +9190,7 @@
                       </a:endParaRPr>
                     </a:p>
                   </a:txBody>
-                  <a:tcPr marL="91440" marR="91440" marT="45720" marB="45720" anchor="ctr">
+                  <a:tcPr anchor="ctr">
                     <a:lnL w="12700" cap="flat" cmpd="sng" algn="ctr">
                       <a:solidFill>
                         <a:srgbClr val="DDDDDD"/>
@@ -9314,7 +9237,7 @@
                     <a:bodyPr/>
                     <a:lstStyle/>
                     <a:p>
-                      <a:pPr algn="ctr" indent="0" marL="0">
+                      <a:pPr marL="0" indent="0" algn="ctr">
                         <a:buNone/>
                       </a:pPr>
                       <a:r>
@@ -9335,7 +9258,7 @@
                       </a:endParaRPr>
                     </a:p>
                   </a:txBody>
-                  <a:tcPr marL="91440" marR="91440" marT="45720" marB="45720" anchor="ctr">
+                  <a:tcPr anchor="ctr">
                     <a:lnL w="12700" cap="flat" cmpd="sng" algn="ctr">
                       <a:solidFill>
                         <a:srgbClr val="DDDDDD"/>
@@ -9382,7 +9305,7 @@
                     <a:bodyPr/>
                     <a:lstStyle/>
                     <a:p>
-                      <a:pPr algn="ctr" indent="0" marL="0">
+                      <a:pPr marL="0" indent="0" algn="ctr">
                         <a:buNone/>
                       </a:pPr>
                       <a:r>
@@ -9403,7 +9326,7 @@
                       </a:endParaRPr>
                     </a:p>
                   </a:txBody>
-                  <a:tcPr marL="91440" marR="91440" marT="45720" marB="45720" anchor="ctr">
+                  <a:tcPr anchor="ctr">
                     <a:lnL w="12700" cap="flat" cmpd="sng" algn="ctr">
                       <a:solidFill>
                         <a:srgbClr val="DDDDDD"/>
@@ -9445,6 +9368,11 @@
                     </a:solidFill>
                   </a:tcPr>
                 </a:tc>
+                <a:extLst>
+                  <a:ext uri="{0D108BD9-81ED-4DB2-BD59-A6C34878D82A}">
+                    <a16:rowId xmlns:a16="http://schemas.microsoft.com/office/drawing/2014/main" val="10001"/>
+                  </a:ext>
+                </a:extLst>
               </a:tr>
               <a:tr h="384048">
                 <a:tc>
@@ -9452,7 +9380,7 @@
                     <a:bodyPr/>
                     <a:lstStyle/>
                     <a:p>
-                      <a:pPr algn="l" indent="0" marL="0">
+                      <a:pPr marL="0" indent="0" algn="l">
                         <a:buNone/>
                       </a:pPr>
                       <a:r>
@@ -9473,7 +9401,7 @@
                       </a:endParaRPr>
                     </a:p>
                   </a:txBody>
-                  <a:tcPr marL="91440" marR="91440" marT="45720" marB="45720" anchor="ctr">
+                  <a:tcPr anchor="ctr">
                     <a:lnL w="12700" cap="flat" cmpd="sng" algn="ctr">
                       <a:solidFill>
                         <a:srgbClr val="DDDDDD"/>
@@ -9520,7 +9448,7 @@
                     <a:bodyPr/>
                     <a:lstStyle/>
                     <a:p>
-                      <a:pPr algn="ctr" indent="0" marL="0">
+                      <a:pPr marL="0" indent="0" algn="ctr">
                         <a:buNone/>
                       </a:pPr>
                       <a:r>
@@ -9541,7 +9469,7 @@
                       </a:endParaRPr>
                     </a:p>
                   </a:txBody>
-                  <a:tcPr marL="91440" marR="91440" marT="45720" marB="45720" anchor="ctr">
+                  <a:tcPr anchor="ctr">
                     <a:lnL w="12700" cap="flat" cmpd="sng" algn="ctr">
                       <a:solidFill>
                         <a:srgbClr val="DDDDDD"/>
@@ -9588,7 +9516,7 @@
                     <a:bodyPr/>
                     <a:lstStyle/>
                     <a:p>
-                      <a:pPr algn="ctr" indent="0" marL="0">
+                      <a:pPr marL="0" indent="0" algn="ctr">
                         <a:buNone/>
                       </a:pPr>
                       <a:r>
@@ -9609,7 +9537,7 @@
                       </a:endParaRPr>
                     </a:p>
                   </a:txBody>
-                  <a:tcPr marL="91440" marR="91440" marT="45720" marB="45720" anchor="ctr">
+                  <a:tcPr anchor="ctr">
                     <a:lnL w="12700" cap="flat" cmpd="sng" algn="ctr">
                       <a:solidFill>
                         <a:srgbClr val="DDDDDD"/>
@@ -9656,7 +9584,7 @@
                     <a:bodyPr/>
                     <a:lstStyle/>
                     <a:p>
-                      <a:pPr algn="ctr" indent="0" marL="0">
+                      <a:pPr marL="0" indent="0" algn="ctr">
                         <a:buNone/>
                       </a:pPr>
                       <a:r>
@@ -9677,7 +9605,7 @@
                       </a:endParaRPr>
                     </a:p>
                   </a:txBody>
-                  <a:tcPr marL="91440" marR="91440" marT="45720" marB="45720" anchor="ctr">
+                  <a:tcPr anchor="ctr">
                     <a:lnL w="12700" cap="flat" cmpd="sng" algn="ctr">
                       <a:solidFill>
                         <a:srgbClr val="DDDDDD"/>
@@ -9724,7 +9652,7 @@
                     <a:bodyPr/>
                     <a:lstStyle/>
                     <a:p>
-                      <a:pPr algn="ctr" indent="0" marL="0">
+                      <a:pPr marL="0" indent="0" algn="ctr">
                         <a:buNone/>
                       </a:pPr>
                       <a:r>
@@ -9745,7 +9673,7 @@
                       </a:endParaRPr>
                     </a:p>
                   </a:txBody>
-                  <a:tcPr marL="91440" marR="91440" marT="45720" marB="45720" anchor="ctr">
+                  <a:tcPr anchor="ctr">
                     <a:lnL w="12700" cap="flat" cmpd="sng" algn="ctr">
                       <a:solidFill>
                         <a:srgbClr val="DDDDDD"/>
@@ -9787,6 +9715,11 @@
                     </a:solidFill>
                   </a:tcPr>
                 </a:tc>
+                <a:extLst>
+                  <a:ext uri="{0D108BD9-81ED-4DB2-BD59-A6C34878D82A}">
+                    <a16:rowId xmlns:a16="http://schemas.microsoft.com/office/drawing/2014/main" val="10002"/>
+                  </a:ext>
+                </a:extLst>
               </a:tr>
               <a:tr h="384048">
                 <a:tc>
@@ -9794,7 +9727,7 @@
                     <a:bodyPr/>
                     <a:lstStyle/>
                     <a:p>
-                      <a:pPr algn="l" indent="0" marL="0">
+                      <a:pPr marL="0" indent="0" algn="l">
                         <a:buNone/>
                       </a:pPr>
                       <a:r>
@@ -9815,7 +9748,7 @@
                       </a:endParaRPr>
                     </a:p>
                   </a:txBody>
-                  <a:tcPr marL="91440" marR="91440" marT="45720" marB="45720" anchor="ctr">
+                  <a:tcPr anchor="ctr">
                     <a:lnL w="12700" cap="flat" cmpd="sng" algn="ctr">
                       <a:solidFill>
                         <a:srgbClr val="DDDDDD"/>
@@ -9862,7 +9795,7 @@
                     <a:bodyPr/>
                     <a:lstStyle/>
                     <a:p>
-                      <a:pPr algn="ctr" indent="0" marL="0">
+                      <a:pPr marL="0" indent="0" algn="ctr">
                         <a:buNone/>
                       </a:pPr>
                       <a:r>
@@ -9883,7 +9816,7 @@
                       </a:endParaRPr>
                     </a:p>
                   </a:txBody>
-                  <a:tcPr marL="91440" marR="91440" marT="45720" marB="45720" anchor="ctr">
+                  <a:tcPr anchor="ctr">
                     <a:lnL w="12700" cap="flat" cmpd="sng" algn="ctr">
                       <a:solidFill>
                         <a:srgbClr val="DDDDDD"/>
@@ -9930,7 +9863,7 @@
                     <a:bodyPr/>
                     <a:lstStyle/>
                     <a:p>
-                      <a:pPr algn="ctr" indent="0" marL="0">
+                      <a:pPr marL="0" indent="0" algn="ctr">
                         <a:buNone/>
                       </a:pPr>
                       <a:r>
@@ -9951,7 +9884,7 @@
                       </a:endParaRPr>
                     </a:p>
                   </a:txBody>
-                  <a:tcPr marL="91440" marR="91440" marT="45720" marB="45720" anchor="ctr">
+                  <a:tcPr anchor="ctr">
                     <a:lnL w="12700" cap="flat" cmpd="sng" algn="ctr">
                       <a:solidFill>
                         <a:srgbClr val="DDDDDD"/>
@@ -9998,7 +9931,7 @@
                     <a:bodyPr/>
                     <a:lstStyle/>
                     <a:p>
-                      <a:pPr algn="ctr" indent="0" marL="0">
+                      <a:pPr marL="0" indent="0" algn="ctr">
                         <a:buNone/>
                       </a:pPr>
                       <a:r>
@@ -10019,7 +9952,7 @@
                       </a:endParaRPr>
                     </a:p>
                   </a:txBody>
-                  <a:tcPr marL="91440" marR="91440" marT="45720" marB="45720" anchor="ctr">
+                  <a:tcPr anchor="ctr">
                     <a:lnL w="12700" cap="flat" cmpd="sng" algn="ctr">
                       <a:solidFill>
                         <a:srgbClr val="DDDDDD"/>
@@ -10066,7 +9999,7 @@
                     <a:bodyPr/>
                     <a:lstStyle/>
                     <a:p>
-                      <a:pPr algn="ctr" indent="0" marL="0">
+                      <a:pPr marL="0" indent="0" algn="ctr">
                         <a:buNone/>
                       </a:pPr>
                       <a:r>
@@ -10087,7 +10020,7 @@
                       </a:endParaRPr>
                     </a:p>
                   </a:txBody>
-                  <a:tcPr marL="91440" marR="91440" marT="45720" marB="45720" anchor="ctr">
+                  <a:tcPr anchor="ctr">
                     <a:lnL w="12700" cap="flat" cmpd="sng" algn="ctr">
                       <a:solidFill>
                         <a:srgbClr val="DDDDDD"/>
@@ -10129,6 +10062,11 @@
                     </a:solidFill>
                   </a:tcPr>
                 </a:tc>
+                <a:extLst>
+                  <a:ext uri="{0D108BD9-81ED-4DB2-BD59-A6C34878D82A}">
+                    <a16:rowId xmlns:a16="http://schemas.microsoft.com/office/drawing/2014/main" val="10003"/>
+                  </a:ext>
+                </a:extLst>
               </a:tr>
               <a:tr h="384048">
                 <a:tc>
@@ -10136,7 +10074,7 @@
                     <a:bodyPr/>
                     <a:lstStyle/>
                     <a:p>
-                      <a:pPr algn="l" indent="0" marL="0">
+                      <a:pPr marL="0" indent="0" algn="l">
                         <a:buNone/>
                       </a:pPr>
                       <a:r>
@@ -10157,7 +10095,7 @@
                       </a:endParaRPr>
                     </a:p>
                   </a:txBody>
-                  <a:tcPr marL="91440" marR="91440" marT="45720" marB="45720" anchor="ctr">
+                  <a:tcPr anchor="ctr">
                     <a:lnL w="12700" cap="flat" cmpd="sng" algn="ctr">
                       <a:solidFill>
                         <a:srgbClr val="DDDDDD"/>
@@ -10204,7 +10142,7 @@
                     <a:bodyPr/>
                     <a:lstStyle/>
                     <a:p>
-                      <a:pPr algn="ctr" indent="0" marL="0">
+                      <a:pPr marL="0" indent="0" algn="ctr">
                         <a:buNone/>
                       </a:pPr>
                       <a:r>
@@ -10225,7 +10163,7 @@
                       </a:endParaRPr>
                     </a:p>
                   </a:txBody>
-                  <a:tcPr marL="91440" marR="91440" marT="45720" marB="45720" anchor="ctr">
+                  <a:tcPr anchor="ctr">
                     <a:lnL w="12700" cap="flat" cmpd="sng" algn="ctr">
                       <a:solidFill>
                         <a:srgbClr val="DDDDDD"/>
@@ -10272,7 +10210,7 @@
                     <a:bodyPr/>
                     <a:lstStyle/>
                     <a:p>
-                      <a:pPr algn="ctr" indent="0" marL="0">
+                      <a:pPr marL="0" indent="0" algn="ctr">
                         <a:buNone/>
                       </a:pPr>
                       <a:r>
@@ -10293,7 +10231,7 @@
                       </a:endParaRPr>
                     </a:p>
                   </a:txBody>
-                  <a:tcPr marL="91440" marR="91440" marT="45720" marB="45720" anchor="ctr">
+                  <a:tcPr anchor="ctr">
                     <a:lnL w="12700" cap="flat" cmpd="sng" algn="ctr">
                       <a:solidFill>
                         <a:srgbClr val="DDDDDD"/>
@@ -10340,7 +10278,7 @@
                     <a:bodyPr/>
                     <a:lstStyle/>
                     <a:p>
-                      <a:pPr algn="ctr" indent="0" marL="0">
+                      <a:pPr marL="0" indent="0" algn="ctr">
                         <a:buNone/>
                       </a:pPr>
                       <a:r>
@@ -10361,7 +10299,7 @@
                       </a:endParaRPr>
                     </a:p>
                   </a:txBody>
-                  <a:tcPr marL="91440" marR="91440" marT="45720" marB="45720" anchor="ctr">
+                  <a:tcPr anchor="ctr">
                     <a:lnL w="12700" cap="flat" cmpd="sng" algn="ctr">
                       <a:solidFill>
                         <a:srgbClr val="DDDDDD"/>
@@ -10408,7 +10346,7 @@
                     <a:bodyPr/>
                     <a:lstStyle/>
                     <a:p>
-                      <a:pPr algn="ctr" indent="0" marL="0">
+                      <a:pPr marL="0" indent="0" algn="ctr">
                         <a:buNone/>
                       </a:pPr>
                       <a:r>
@@ -10429,7 +10367,7 @@
                       </a:endParaRPr>
                     </a:p>
                   </a:txBody>
-                  <a:tcPr marL="91440" marR="91440" marT="45720" marB="45720" anchor="ctr">
+                  <a:tcPr anchor="ctr">
                     <a:lnL w="12700" cap="flat" cmpd="sng" algn="ctr">
                       <a:solidFill>
                         <a:srgbClr val="DDDDDD"/>
@@ -10471,6 +10409,11 @@
                     </a:solidFill>
                   </a:tcPr>
                 </a:tc>
+                <a:extLst>
+                  <a:ext uri="{0D108BD9-81ED-4DB2-BD59-A6C34878D82A}">
+                    <a16:rowId xmlns:a16="http://schemas.microsoft.com/office/drawing/2014/main" val="10004"/>
+                  </a:ext>
+                </a:extLst>
               </a:tr>
             </a:tbl>
           </a:graphicData>
@@ -10497,7 +10440,7 @@
           <a:bodyPr wrap="square" rtlCol="0" anchor="ctr"/>
           <a:lstStyle/>
           <a:p>
-            <a:pPr indent="0" marL="0">
+            <a:pPr marL="0" indent="0">
               <a:buNone/>
             </a:pPr>
             <a:r>
@@ -10531,6 +10474,7 @@
         <a:solidFill>
           <a:srgbClr val="F4F4F2"/>
         </a:solidFill>
+        <a:effectLst/>
       </p:bgPr>
     </p:bg>
     <p:spTree>
@@ -10568,7 +10512,7 @@
           <a:bodyPr wrap="square" rtlCol="0" anchor="ctr"/>
           <a:lstStyle/>
           <a:p>
-            <a:pPr indent="0" marL="0">
+            <a:pPr marL="0" indent="0">
               <a:buNone/>
             </a:pPr>
             <a:r>
@@ -10583,45 +10527,6 @@
               <a:t>Compared to Other Methods</a:t>
             </a:r>
             <a:endParaRPr lang="en-US" sz="3200" dirty="0"/>
-          </a:p>
-        </p:txBody>
-      </p:sp>
-      <p:sp>
-        <p:nvSpPr>
-          <p:cNvPr id="3" name="Text 1"/>
-          <p:cNvSpPr/>
-          <p:nvPr/>
-        </p:nvSpPr>
-        <p:spPr>
-          <a:xfrm>
-            <a:off x="658368" y="1170432"/>
-            <a:ext cx="10881360" cy="457200"/>
-          </a:xfrm>
-          <a:prstGeom prst="rect">
-            <a:avLst/>
-          </a:prstGeom>
-          <a:noFill/>
-          <a:ln/>
-        </p:spPr>
-        <p:txBody>
-          <a:bodyPr wrap="square" rtlCol="0" anchor="ctr"/>
-          <a:lstStyle/>
-          <a:p>
-            <a:pPr indent="0" marL="0">
-              <a:buNone/>
-            </a:pPr>
-            <a:r>
-              <a:rPr lang="en-US" sz="1500" i="1" dirty="0">
-                <a:solidFill>
-                  <a:srgbClr val="5B6770"/>
-                </a:solidFill>
-                <a:latin typeface="Calibri" pitchFamily="34" charset="0"/>
-                <a:ea typeface="Calibri" pitchFamily="34" charset="-122"/>
-                <a:cs typeface="Calibri" pitchFamily="34" charset="-120"/>
-              </a:rPr>
-              <a:t>Every method tuned the same way, all four steps active</a:t>
-            </a:r>
-            <a:endParaRPr lang="en-US" sz="1500" dirty="0"/>
           </a:p>
         </p:txBody>
       </p:sp>
@@ -10641,18 +10546,48 @@
         </p:nvGraphicFramePr>
         <p:xfrm>
           <a:off x="640080" y="1783080"/>
-          <a:ext cx="5577840" cy="914400"/>
+          <a:ext cx="5577840" cy="2286000"/>
         </p:xfrm>
         <a:graphic>
           <a:graphicData uri="http://schemas.openxmlformats.org/drawingml/2006/table">
             <a:tbl>
               <a:tblPr/>
               <a:tblGrid>
-                <a:gridCol w="1188720"/>
-                <a:gridCol w="1280160"/>
-                <a:gridCol w="1005840"/>
-                <a:gridCol w="822960"/>
-                <a:gridCol w="1280160"/>
+                <a:gridCol w="1188720">
+                  <a:extLst>
+                    <a:ext uri="{9D8B030D-6E8A-4147-A177-3AD203B41FA5}">
+                      <a16:colId xmlns:a16="http://schemas.microsoft.com/office/drawing/2014/main" val="20000"/>
+                    </a:ext>
+                  </a:extLst>
+                </a:gridCol>
+                <a:gridCol w="1280160">
+                  <a:extLst>
+                    <a:ext uri="{9D8B030D-6E8A-4147-A177-3AD203B41FA5}">
+                      <a16:colId xmlns:a16="http://schemas.microsoft.com/office/drawing/2014/main" val="20001"/>
+                    </a:ext>
+                  </a:extLst>
+                </a:gridCol>
+                <a:gridCol w="1005840">
+                  <a:extLst>
+                    <a:ext uri="{9D8B030D-6E8A-4147-A177-3AD203B41FA5}">
+                      <a16:colId xmlns:a16="http://schemas.microsoft.com/office/drawing/2014/main" val="20002"/>
+                    </a:ext>
+                  </a:extLst>
+                </a:gridCol>
+                <a:gridCol w="822960">
+                  <a:extLst>
+                    <a:ext uri="{9D8B030D-6E8A-4147-A177-3AD203B41FA5}">
+                      <a16:colId xmlns:a16="http://schemas.microsoft.com/office/drawing/2014/main" val="20003"/>
+                    </a:ext>
+                  </a:extLst>
+                </a:gridCol>
+                <a:gridCol w="1280160">
+                  <a:extLst>
+                    <a:ext uri="{9D8B030D-6E8A-4147-A177-3AD203B41FA5}">
+                      <a16:colId xmlns:a16="http://schemas.microsoft.com/office/drawing/2014/main" val="20004"/>
+                    </a:ext>
+                  </a:extLst>
+                </a:gridCol>
               </a:tblGrid>
               <a:tr h="457200">
                 <a:tc>
@@ -10660,7 +10595,7 @@
                     <a:bodyPr/>
                     <a:lstStyle/>
                     <a:p>
-                      <a:pPr algn="ctr" indent="0" marL="0">
+                      <a:pPr marL="0" indent="0" algn="ctr">
                         <a:buNone/>
                       </a:pPr>
                       <a:r>
@@ -10681,7 +10616,7 @@
                       </a:endParaRPr>
                     </a:p>
                   </a:txBody>
-                  <a:tcPr marL="91440" marR="91440" marT="45720" marB="45720" anchor="ctr">
+                  <a:tcPr anchor="ctr">
                     <a:lnL w="12700" cap="flat" cmpd="sng" algn="ctr">
                       <a:solidFill>
                         <a:srgbClr val="DDDDDD"/>
@@ -10728,7 +10663,7 @@
                     <a:bodyPr/>
                     <a:lstStyle/>
                     <a:p>
-                      <a:pPr algn="ctr" indent="0" marL="0">
+                      <a:pPr marL="0" indent="0" algn="ctr">
                         <a:buNone/>
                       </a:pPr>
                       <a:r>
@@ -10749,7 +10684,7 @@
                       </a:endParaRPr>
                     </a:p>
                   </a:txBody>
-                  <a:tcPr marL="91440" marR="91440" marT="45720" marB="45720" anchor="ctr">
+                  <a:tcPr anchor="ctr">
                     <a:lnL w="12700" cap="flat" cmpd="sng" algn="ctr">
                       <a:solidFill>
                         <a:srgbClr val="DDDDDD"/>
@@ -10796,7 +10731,7 @@
                     <a:bodyPr/>
                     <a:lstStyle/>
                     <a:p>
-                      <a:pPr algn="ctr" indent="0" marL="0">
+                      <a:pPr marL="0" indent="0" algn="ctr">
                         <a:buNone/>
                       </a:pPr>
                       <a:r>
@@ -10817,7 +10752,7 @@
                       </a:endParaRPr>
                     </a:p>
                   </a:txBody>
-                  <a:tcPr marL="91440" marR="91440" marT="45720" marB="45720" anchor="ctr">
+                  <a:tcPr anchor="ctr">
                     <a:lnL w="12700" cap="flat" cmpd="sng" algn="ctr">
                       <a:solidFill>
                         <a:srgbClr val="DDDDDD"/>
@@ -10864,7 +10799,7 @@
                     <a:bodyPr/>
                     <a:lstStyle/>
                     <a:p>
-                      <a:pPr algn="ctr" indent="0" marL="0">
+                      <a:pPr marL="0" indent="0" algn="ctr">
                         <a:buNone/>
                       </a:pPr>
                       <a:r>
@@ -10885,7 +10820,7 @@
                       </a:endParaRPr>
                     </a:p>
                   </a:txBody>
-                  <a:tcPr marL="91440" marR="91440" marT="45720" marB="45720" anchor="ctr">
+                  <a:tcPr anchor="ctr">
                     <a:lnL w="12700" cap="flat" cmpd="sng" algn="ctr">
                       <a:solidFill>
                         <a:srgbClr val="DDDDDD"/>
@@ -10932,7 +10867,7 @@
                     <a:bodyPr/>
                     <a:lstStyle/>
                     <a:p>
-                      <a:pPr algn="ctr" indent="0" marL="0">
+                      <a:pPr marL="0" indent="0" algn="ctr">
                         <a:buNone/>
                       </a:pPr>
                       <a:r>
@@ -10953,7 +10888,7 @@
                       </a:endParaRPr>
                     </a:p>
                   </a:txBody>
-                  <a:tcPr marL="91440" marR="91440" marT="45720" marB="45720" anchor="ctr">
+                  <a:tcPr anchor="ctr">
                     <a:lnL w="12700" cap="flat" cmpd="sng" algn="ctr">
                       <a:solidFill>
                         <a:srgbClr val="DDDDDD"/>
@@ -10995,6 +10930,11 @@
                     </a:solidFill>
                   </a:tcPr>
                 </a:tc>
+                <a:extLst>
+                  <a:ext uri="{0D108BD9-81ED-4DB2-BD59-A6C34878D82A}">
+                    <a16:rowId xmlns:a16="http://schemas.microsoft.com/office/drawing/2014/main" val="10000"/>
+                  </a:ext>
+                </a:extLst>
               </a:tr>
               <a:tr h="457200">
                 <a:tc>
@@ -11002,7 +10942,7 @@
                     <a:bodyPr/>
                     <a:lstStyle/>
                     <a:p>
-                      <a:pPr algn="l" indent="0" marL="0">
+                      <a:pPr marL="0" indent="0" algn="l">
                         <a:buNone/>
                       </a:pPr>
                       <a:r>
@@ -11023,7 +10963,7 @@
                       </a:endParaRPr>
                     </a:p>
                   </a:txBody>
-                  <a:tcPr marL="91440" marR="91440" marT="45720" marB="45720" anchor="ctr">
+                  <a:tcPr anchor="ctr">
                     <a:lnL w="12700" cap="flat" cmpd="sng" algn="ctr">
                       <a:solidFill>
                         <a:srgbClr val="DDDDDD"/>
@@ -11070,7 +11010,7 @@
                     <a:bodyPr/>
                     <a:lstStyle/>
                     <a:p>
-                      <a:pPr algn="ctr" indent="0" marL="0">
+                      <a:pPr marL="0" indent="0" algn="ctr">
                         <a:buNone/>
                       </a:pPr>
                       <a:r>
@@ -11091,7 +11031,7 @@
                       </a:endParaRPr>
                     </a:p>
                   </a:txBody>
-                  <a:tcPr marL="91440" marR="91440" marT="45720" marB="45720" anchor="ctr">
+                  <a:tcPr anchor="ctr">
                     <a:lnL w="12700" cap="flat" cmpd="sng" algn="ctr">
                       <a:solidFill>
                         <a:srgbClr val="DDDDDD"/>
@@ -11138,7 +11078,7 @@
                     <a:bodyPr/>
                     <a:lstStyle/>
                     <a:p>
-                      <a:pPr algn="ctr" indent="0" marL="0">
+                      <a:pPr marL="0" indent="0" algn="ctr">
                         <a:buNone/>
                       </a:pPr>
                       <a:r>
@@ -11159,7 +11099,7 @@
                       </a:endParaRPr>
                     </a:p>
                   </a:txBody>
-                  <a:tcPr marL="91440" marR="91440" marT="45720" marB="45720" anchor="ctr">
+                  <a:tcPr anchor="ctr">
                     <a:lnL w="12700" cap="flat" cmpd="sng" algn="ctr">
                       <a:solidFill>
                         <a:srgbClr val="DDDDDD"/>
@@ -11206,7 +11146,7 @@
                     <a:bodyPr/>
                     <a:lstStyle/>
                     <a:p>
-                      <a:pPr algn="ctr" indent="0" marL="0">
+                      <a:pPr marL="0" indent="0" algn="ctr">
                         <a:buNone/>
                       </a:pPr>
                       <a:r>
@@ -11227,7 +11167,7 @@
                       </a:endParaRPr>
                     </a:p>
                   </a:txBody>
-                  <a:tcPr marL="91440" marR="91440" marT="45720" marB="45720" anchor="ctr">
+                  <a:tcPr anchor="ctr">
                     <a:lnL w="12700" cap="flat" cmpd="sng" algn="ctr">
                       <a:solidFill>
                         <a:srgbClr val="DDDDDD"/>
@@ -11274,7 +11214,7 @@
                     <a:bodyPr/>
                     <a:lstStyle/>
                     <a:p>
-                      <a:pPr algn="ctr" indent="0" marL="0">
+                      <a:pPr marL="0" indent="0" algn="ctr">
                         <a:buNone/>
                       </a:pPr>
                       <a:r>
@@ -11295,7 +11235,7 @@
                       </a:endParaRPr>
                     </a:p>
                   </a:txBody>
-                  <a:tcPr marL="91440" marR="91440" marT="45720" marB="45720" anchor="ctr">
+                  <a:tcPr anchor="ctr">
                     <a:lnL w="12700" cap="flat" cmpd="sng" algn="ctr">
                       <a:solidFill>
                         <a:srgbClr val="DDDDDD"/>
@@ -11337,6 +11277,11 @@
                     </a:solidFill>
                   </a:tcPr>
                 </a:tc>
+                <a:extLst>
+                  <a:ext uri="{0D108BD9-81ED-4DB2-BD59-A6C34878D82A}">
+                    <a16:rowId xmlns:a16="http://schemas.microsoft.com/office/drawing/2014/main" val="10001"/>
+                  </a:ext>
+                </a:extLst>
               </a:tr>
               <a:tr h="457200">
                 <a:tc>
@@ -11344,7 +11289,7 @@
                     <a:bodyPr/>
                     <a:lstStyle/>
                     <a:p>
-                      <a:pPr algn="l" indent="0" marL="0">
+                      <a:pPr marL="0" indent="0" algn="l">
                         <a:buNone/>
                       </a:pPr>
                       <a:r>
@@ -11365,7 +11310,7 @@
                       </a:endParaRPr>
                     </a:p>
                   </a:txBody>
-                  <a:tcPr marL="91440" marR="91440" marT="45720" marB="45720" anchor="ctr">
+                  <a:tcPr anchor="ctr">
                     <a:lnL w="12700" cap="flat" cmpd="sng" algn="ctr">
                       <a:solidFill>
                         <a:srgbClr val="DDDDDD"/>
@@ -11412,7 +11357,7 @@
                     <a:bodyPr/>
                     <a:lstStyle/>
                     <a:p>
-                      <a:pPr algn="ctr" indent="0" marL="0">
+                      <a:pPr marL="0" indent="0" algn="ctr">
                         <a:buNone/>
                       </a:pPr>
                       <a:r>
@@ -11433,7 +11378,7 @@
                       </a:endParaRPr>
                     </a:p>
                   </a:txBody>
-                  <a:tcPr marL="91440" marR="91440" marT="45720" marB="45720" anchor="ctr">
+                  <a:tcPr anchor="ctr">
                     <a:lnL w="12700" cap="flat" cmpd="sng" algn="ctr">
                       <a:solidFill>
                         <a:srgbClr val="DDDDDD"/>
@@ -11480,7 +11425,7 @@
                     <a:bodyPr/>
                     <a:lstStyle/>
                     <a:p>
-                      <a:pPr algn="ctr" indent="0" marL="0">
+                      <a:pPr marL="0" indent="0" algn="ctr">
                         <a:buNone/>
                       </a:pPr>
                       <a:r>
@@ -11501,7 +11446,7 @@
                       </a:endParaRPr>
                     </a:p>
                   </a:txBody>
-                  <a:tcPr marL="91440" marR="91440" marT="45720" marB="45720" anchor="ctr">
+                  <a:tcPr anchor="ctr">
                     <a:lnL w="12700" cap="flat" cmpd="sng" algn="ctr">
                       <a:solidFill>
                         <a:srgbClr val="DDDDDD"/>
@@ -11548,7 +11493,7 @@
                     <a:bodyPr/>
                     <a:lstStyle/>
                     <a:p>
-                      <a:pPr algn="ctr" indent="0" marL="0">
+                      <a:pPr marL="0" indent="0" algn="ctr">
                         <a:buNone/>
                       </a:pPr>
                       <a:r>
@@ -11569,7 +11514,7 @@
                       </a:endParaRPr>
                     </a:p>
                   </a:txBody>
-                  <a:tcPr marL="91440" marR="91440" marT="45720" marB="45720" anchor="ctr">
+                  <a:tcPr anchor="ctr">
                     <a:lnL w="12700" cap="flat" cmpd="sng" algn="ctr">
                       <a:solidFill>
                         <a:srgbClr val="DDDDDD"/>
@@ -11616,7 +11561,7 @@
                     <a:bodyPr/>
                     <a:lstStyle/>
                     <a:p>
-                      <a:pPr algn="ctr" indent="0" marL="0">
+                      <a:pPr marL="0" indent="0" algn="ctr">
                         <a:buNone/>
                       </a:pPr>
                       <a:r>
@@ -11637,7 +11582,7 @@
                       </a:endParaRPr>
                     </a:p>
                   </a:txBody>
-                  <a:tcPr marL="91440" marR="91440" marT="45720" marB="45720" anchor="ctr">
+                  <a:tcPr anchor="ctr">
                     <a:lnL w="12700" cap="flat" cmpd="sng" algn="ctr">
                       <a:solidFill>
                         <a:srgbClr val="DDDDDD"/>
@@ -11679,6 +11624,11 @@
                     </a:solidFill>
                   </a:tcPr>
                 </a:tc>
+                <a:extLst>
+                  <a:ext uri="{0D108BD9-81ED-4DB2-BD59-A6C34878D82A}">
+                    <a16:rowId xmlns:a16="http://schemas.microsoft.com/office/drawing/2014/main" val="10002"/>
+                  </a:ext>
+                </a:extLst>
               </a:tr>
               <a:tr h="457200">
                 <a:tc>
@@ -11686,7 +11636,7 @@
                     <a:bodyPr/>
                     <a:lstStyle/>
                     <a:p>
-                      <a:pPr algn="l" indent="0" marL="0">
+                      <a:pPr marL="0" indent="0" algn="l">
                         <a:buNone/>
                       </a:pPr>
                       <a:r>
@@ -11707,7 +11657,7 @@
                       </a:endParaRPr>
                     </a:p>
                   </a:txBody>
-                  <a:tcPr marL="91440" marR="91440" marT="45720" marB="45720" anchor="ctr">
+                  <a:tcPr anchor="ctr">
                     <a:lnL w="12700" cap="flat" cmpd="sng" algn="ctr">
                       <a:solidFill>
                         <a:srgbClr val="DDDDDD"/>
@@ -11754,7 +11704,7 @@
                     <a:bodyPr/>
                     <a:lstStyle/>
                     <a:p>
-                      <a:pPr algn="ctr" indent="0" marL="0">
+                      <a:pPr marL="0" indent="0" algn="ctr">
                         <a:buNone/>
                       </a:pPr>
                       <a:r>
@@ -11775,7 +11725,7 @@
                       </a:endParaRPr>
                     </a:p>
                   </a:txBody>
-                  <a:tcPr marL="91440" marR="91440" marT="45720" marB="45720" anchor="ctr">
+                  <a:tcPr anchor="ctr">
                     <a:lnL w="12700" cap="flat" cmpd="sng" algn="ctr">
                       <a:solidFill>
                         <a:srgbClr val="DDDDDD"/>
@@ -11822,7 +11772,7 @@
                     <a:bodyPr/>
                     <a:lstStyle/>
                     <a:p>
-                      <a:pPr algn="ctr" indent="0" marL="0">
+                      <a:pPr marL="0" indent="0" algn="ctr">
                         <a:buNone/>
                       </a:pPr>
                       <a:r>
@@ -11843,7 +11793,7 @@
                       </a:endParaRPr>
                     </a:p>
                   </a:txBody>
-                  <a:tcPr marL="91440" marR="91440" marT="45720" marB="45720" anchor="ctr">
+                  <a:tcPr anchor="ctr">
                     <a:lnL w="12700" cap="flat" cmpd="sng" algn="ctr">
                       <a:solidFill>
                         <a:srgbClr val="DDDDDD"/>
@@ -11890,7 +11840,7 @@
                     <a:bodyPr/>
                     <a:lstStyle/>
                     <a:p>
-                      <a:pPr algn="ctr" indent="0" marL="0">
+                      <a:pPr marL="0" indent="0" algn="ctr">
                         <a:buNone/>
                       </a:pPr>
                       <a:r>
@@ -11911,7 +11861,7 @@
                       </a:endParaRPr>
                     </a:p>
                   </a:txBody>
-                  <a:tcPr marL="91440" marR="91440" marT="45720" marB="45720" anchor="ctr">
+                  <a:tcPr anchor="ctr">
                     <a:lnL w="12700" cap="flat" cmpd="sng" algn="ctr">
                       <a:solidFill>
                         <a:srgbClr val="DDDDDD"/>
@@ -11958,7 +11908,7 @@
                     <a:bodyPr/>
                     <a:lstStyle/>
                     <a:p>
-                      <a:pPr algn="ctr" indent="0" marL="0">
+                      <a:pPr marL="0" indent="0" algn="ctr">
                         <a:buNone/>
                       </a:pPr>
                       <a:r>
@@ -11979,7 +11929,7 @@
                       </a:endParaRPr>
                     </a:p>
                   </a:txBody>
-                  <a:tcPr marL="91440" marR="91440" marT="45720" marB="45720" anchor="ctr">
+                  <a:tcPr anchor="ctr">
                     <a:lnL w="12700" cap="flat" cmpd="sng" algn="ctr">
                       <a:solidFill>
                         <a:srgbClr val="DDDDDD"/>
@@ -12021,6 +11971,11 @@
                     </a:solidFill>
                   </a:tcPr>
                 </a:tc>
+                <a:extLst>
+                  <a:ext uri="{0D108BD9-81ED-4DB2-BD59-A6C34878D82A}">
+                    <a16:rowId xmlns:a16="http://schemas.microsoft.com/office/drawing/2014/main" val="10003"/>
+                  </a:ext>
+                </a:extLst>
               </a:tr>
               <a:tr h="457200">
                 <a:tc>
@@ -12028,7 +11983,7 @@
                     <a:bodyPr/>
                     <a:lstStyle/>
                     <a:p>
-                      <a:pPr algn="l" indent="0" marL="0">
+                      <a:pPr marL="0" indent="0" algn="l">
                         <a:buNone/>
                       </a:pPr>
                       <a:r>
@@ -12049,7 +12004,7 @@
                       </a:endParaRPr>
                     </a:p>
                   </a:txBody>
-                  <a:tcPr marL="91440" marR="91440" marT="45720" marB="45720" anchor="ctr">
+                  <a:tcPr anchor="ctr">
                     <a:lnL w="12700" cap="flat" cmpd="sng" algn="ctr">
                       <a:solidFill>
                         <a:srgbClr val="DDDDDD"/>
@@ -12096,7 +12051,7 @@
                     <a:bodyPr/>
                     <a:lstStyle/>
                     <a:p>
-                      <a:pPr algn="ctr" indent="0" marL="0">
+                      <a:pPr marL="0" indent="0" algn="ctr">
                         <a:buNone/>
                       </a:pPr>
                       <a:r>
@@ -12117,7 +12072,7 @@
                       </a:endParaRPr>
                     </a:p>
                   </a:txBody>
-                  <a:tcPr marL="91440" marR="91440" marT="45720" marB="45720" anchor="ctr">
+                  <a:tcPr anchor="ctr">
                     <a:lnL w="12700" cap="flat" cmpd="sng" algn="ctr">
                       <a:solidFill>
                         <a:srgbClr val="DDDDDD"/>
@@ -12164,7 +12119,7 @@
                     <a:bodyPr/>
                     <a:lstStyle/>
                     <a:p>
-                      <a:pPr algn="ctr" indent="0" marL="0">
+                      <a:pPr marL="0" indent="0" algn="ctr">
                         <a:buNone/>
                       </a:pPr>
                       <a:r>
@@ -12185,7 +12140,7 @@
                       </a:endParaRPr>
                     </a:p>
                   </a:txBody>
-                  <a:tcPr marL="91440" marR="91440" marT="45720" marB="45720" anchor="ctr">
+                  <a:tcPr anchor="ctr">
                     <a:lnL w="12700" cap="flat" cmpd="sng" algn="ctr">
                       <a:solidFill>
                         <a:srgbClr val="DDDDDD"/>
@@ -12232,7 +12187,7 @@
                     <a:bodyPr/>
                     <a:lstStyle/>
                     <a:p>
-                      <a:pPr algn="ctr" indent="0" marL="0">
+                      <a:pPr marL="0" indent="0" algn="ctr">
                         <a:buNone/>
                       </a:pPr>
                       <a:r>
@@ -12253,7 +12208,7 @@
                       </a:endParaRPr>
                     </a:p>
                   </a:txBody>
-                  <a:tcPr marL="91440" marR="91440" marT="45720" marB="45720" anchor="ctr">
+                  <a:tcPr anchor="ctr">
                     <a:lnL w="12700" cap="flat" cmpd="sng" algn="ctr">
                       <a:solidFill>
                         <a:srgbClr val="DDDDDD"/>
@@ -12300,7 +12255,7 @@
                     <a:bodyPr/>
                     <a:lstStyle/>
                     <a:p>
-                      <a:pPr algn="ctr" indent="0" marL="0">
+                      <a:pPr marL="0" indent="0" algn="ctr">
                         <a:buNone/>
                       </a:pPr>
                       <a:r>
@@ -12321,7 +12276,7 @@
                       </a:endParaRPr>
                     </a:p>
                   </a:txBody>
-                  <a:tcPr marL="91440" marR="91440" marT="45720" marB="45720" anchor="ctr">
+                  <a:tcPr anchor="ctr">
                     <a:lnL w="12700" cap="flat" cmpd="sng" algn="ctr">
                       <a:solidFill>
                         <a:srgbClr val="DDDDDD"/>
@@ -12363,6 +12318,11 @@
                     </a:solidFill>
                   </a:tcPr>
                 </a:tc>
+                <a:extLst>
+                  <a:ext uri="{0D108BD9-81ED-4DB2-BD59-A6C34878D82A}">
+                    <a16:rowId xmlns:a16="http://schemas.microsoft.com/office/drawing/2014/main" val="10004"/>
+                  </a:ext>
+                </a:extLst>
               </a:tr>
             </a:tbl>
           </a:graphicData>
@@ -12389,7 +12349,7 @@
           <a:bodyPr wrap="square" rtlCol="0" anchor="t"/>
           <a:lstStyle/>
           <a:p>
-            <a:pPr indent="0" marL="0">
+            <a:pPr marL="0" indent="0">
               <a:lnSpc>
                 <a:spcPct val="125000"/>
               </a:lnSpc>
@@ -12412,14 +12372,14 @@
       </p:sp>
       <p:pic>
         <p:nvPicPr>
-          <p:cNvPr id="6" name="Image 0" descr="/sessions/eager-charming-feynman/mnt/MiniProject/docs/figures/method_comparison.png">    </p:cNvPr>
+          <p:cNvPr id="6" name="Image 0" descr="/sessions/eager-charming-feynman/mnt/MiniProject/docs/figures/method_comparison.png"/>
           <p:cNvPicPr>
             <a:picLocks noChangeAspect="1"/>
           </p:cNvPicPr>
           <p:nvPr/>
         </p:nvPicPr>
         <p:blipFill>
-          <a:blip r:embed="rId1"/>
+          <a:blip r:embed="rId3"/>
           <a:stretch>
             <a:fillRect/>
           </a:stretch>
@@ -12434,45 +12394,6 @@
           </a:prstGeom>
         </p:spPr>
       </p:pic>
-      <p:sp>
-        <p:nvSpPr>
-          <p:cNvPr id="7" name="Text 3"/>
-          <p:cNvSpPr/>
-          <p:nvPr/>
-        </p:nvSpPr>
-        <p:spPr>
-          <a:xfrm>
-            <a:off x="6400800" y="5806440"/>
-            <a:ext cx="5120640" cy="365760"/>
-          </a:xfrm>
-          <a:prstGeom prst="rect">
-            <a:avLst/>
-          </a:prstGeom>
-          <a:noFill/>
-          <a:ln/>
-        </p:spPr>
-        <p:txBody>
-          <a:bodyPr wrap="square" rtlCol="0" anchor="ctr"/>
-          <a:lstStyle/>
-          <a:p>
-            <a:pPr algn="ctr" indent="0" marL="0">
-              <a:buNone/>
-            </a:pPr>
-            <a:r>
-              <a:rPr lang="en-US" sz="1200" dirty="0">
-                <a:solidFill>
-                  <a:srgbClr val="5B6770"/>
-                </a:solidFill>
-                <a:latin typeface="Calibri" pitchFamily="34" charset="0"/>
-                <a:ea typeface="Calibri" pitchFamily="34" charset="-122"/>
-                <a:cs typeface="Calibri" pitchFamily="34" charset="-120"/>
-              </a:rPr>
-              <a:t>Figure 2 — masks from each method on the same image</a:t>
-            </a:r>
-            <a:endParaRPr lang="en-US" sz="1200" dirty="0"/>
-          </a:p>
-        </p:txBody>
-      </p:sp>
     </p:spTree>
   </p:cSld>
   <p:clrMapOvr>
@@ -12774,4 +12695,319 @@
     </a:ext>
   </a:extLst>
 </a:theme>
+</file>
+
+<file path=ppt/theme/theme2.xml><?xml version="1.0" encoding="utf-8"?>
+<a:theme xmlns:a="http://schemas.openxmlformats.org/drawingml/2006/main" name="Office Theme">
+  <a:themeElements>
+    <a:clrScheme name="Office">
+      <a:dk1>
+        <a:sysClr val="windowText" lastClr="000000"/>
+      </a:dk1>
+      <a:lt1>
+        <a:sysClr val="window" lastClr="FFFFFF"/>
+      </a:lt1>
+      <a:dk2>
+        <a:srgbClr val="0E2841"/>
+      </a:dk2>
+      <a:lt2>
+        <a:srgbClr val="E8E8E8"/>
+      </a:lt2>
+      <a:accent1>
+        <a:srgbClr val="156082"/>
+      </a:accent1>
+      <a:accent2>
+        <a:srgbClr val="E97132"/>
+      </a:accent2>
+      <a:accent3>
+        <a:srgbClr val="196B24"/>
+      </a:accent3>
+      <a:accent4>
+        <a:srgbClr val="0F9ED5"/>
+      </a:accent4>
+      <a:accent5>
+        <a:srgbClr val="A02B93"/>
+      </a:accent5>
+      <a:accent6>
+        <a:srgbClr val="4EA72E"/>
+      </a:accent6>
+      <a:hlink>
+        <a:srgbClr val="467886"/>
+      </a:hlink>
+      <a:folHlink>
+        <a:srgbClr val="96607D"/>
+      </a:folHlink>
+    </a:clrScheme>
+    <a:fontScheme name="Office">
+      <a:majorFont>
+        <a:latin typeface="Aptos Display" panose="02110004020202020204"/>
+        <a:ea typeface=""/>
+        <a:cs typeface=""/>
+        <a:font script="Jpan" typeface="游ゴシック Light"/>
+        <a:font script="Hang" typeface="맑은 고딕"/>
+        <a:font script="Hans" typeface="等线 Light"/>
+        <a:font script="Hant" typeface="新細明體"/>
+        <a:font script="Arab" typeface="Times New Roman"/>
+        <a:font script="Hebr" typeface="Times New Roman"/>
+        <a:font script="Thai" typeface="Angsana New"/>
+        <a:font script="Ethi" typeface="Nyala"/>
+        <a:font script="Beng" typeface="Vrinda"/>
+        <a:font script="Gujr" typeface="Shruti"/>
+        <a:font script="Khmr" typeface="MoolBoran"/>
+        <a:font script="Knda" typeface="Tunga"/>
+        <a:font script="Guru" typeface="Raavi"/>
+        <a:font script="Cans" typeface="Euphemia"/>
+        <a:font script="Cher" typeface="Plantagenet Cherokee"/>
+        <a:font script="Yiii" typeface="Microsoft Yi Baiti"/>
+        <a:font script="Tibt" typeface="Microsoft Himalaya"/>
+        <a:font script="Thaa" typeface="MV Boli"/>
+        <a:font script="Deva" typeface="Mangal"/>
+        <a:font script="Telu" typeface="Gautami"/>
+        <a:font script="Taml" typeface="Latha"/>
+        <a:font script="Syrc" typeface="Estrangelo Edessa"/>
+        <a:font script="Orya" typeface="Kalinga"/>
+        <a:font script="Mlym" typeface="Kartika"/>
+        <a:font script="Laoo" typeface="DokChampa"/>
+        <a:font script="Sinh" typeface="Iskoola Pota"/>
+        <a:font script="Mong" typeface="Mongolian Baiti"/>
+        <a:font script="Viet" typeface="Times New Roman"/>
+        <a:font script="Uigh" typeface="Microsoft Uighur"/>
+        <a:font script="Geor" typeface="Sylfaen"/>
+        <a:font script="Armn" typeface="Arial"/>
+        <a:font script="Bugi" typeface="Leelawadee UI"/>
+        <a:font script="Bopo" typeface="Microsoft JhengHei"/>
+        <a:font script="Java" typeface="Javanese Text"/>
+        <a:font script="Lisu" typeface="Segoe UI"/>
+        <a:font script="Mymr" typeface="Myanmar Text"/>
+        <a:font script="Nkoo" typeface="Ebrima"/>
+        <a:font script="Olck" typeface="Nirmala UI"/>
+        <a:font script="Osma" typeface="Ebrima"/>
+        <a:font script="Phag" typeface="Phagspa"/>
+        <a:font script="Syrn" typeface="Estrangelo Edessa"/>
+        <a:font script="Syrj" typeface="Estrangelo Edessa"/>
+        <a:font script="Syre" typeface="Estrangelo Edessa"/>
+        <a:font script="Sora" typeface="Nirmala UI"/>
+        <a:font script="Tale" typeface="Microsoft Tai Le"/>
+        <a:font script="Talu" typeface="Microsoft New Tai Lue"/>
+        <a:font script="Tfng" typeface="Ebrima"/>
+      </a:majorFont>
+      <a:minorFont>
+        <a:latin typeface="Aptos" panose="02110004020202020204"/>
+        <a:ea typeface=""/>
+        <a:cs typeface=""/>
+        <a:font script="Jpan" typeface="游ゴシック"/>
+        <a:font script="Hang" typeface="맑은 고딕"/>
+        <a:font script="Hans" typeface="等线"/>
+        <a:font script="Hant" typeface="新細明體"/>
+        <a:font script="Arab" typeface="Arial"/>
+        <a:font script="Hebr" typeface="Arial"/>
+        <a:font script="Thai" typeface="Cordia New"/>
+        <a:font script="Ethi" typeface="Nyala"/>
+        <a:font script="Beng" typeface="Vrinda"/>
+        <a:font script="Gujr" typeface="Shruti"/>
+        <a:font script="Khmr" typeface="DaunPenh"/>
+        <a:font script="Knda" typeface="Tunga"/>
+        <a:font script="Guru" typeface="Raavi"/>
+        <a:font script="Cans" typeface="Euphemia"/>
+        <a:font script="Cher" typeface="Plantagenet Cherokee"/>
+        <a:font script="Yiii" typeface="Microsoft Yi Baiti"/>
+        <a:font script="Tibt" typeface="Microsoft Himalaya"/>
+        <a:font script="Thaa" typeface="MV Boli"/>
+        <a:font script="Deva" typeface="Mangal"/>
+        <a:font script="Telu" typeface="Gautami"/>
+        <a:font script="Taml" typeface="Latha"/>
+        <a:font script="Syrc" typeface="Estrangelo Edessa"/>
+        <a:font script="Orya" typeface="Kalinga"/>
+        <a:font script="Mlym" typeface="Kartika"/>
+        <a:font script="Laoo" typeface="DokChampa"/>
+        <a:font script="Sinh" typeface="Iskoola Pota"/>
+        <a:font script="Mong" typeface="Mongolian Baiti"/>
+        <a:font script="Viet" typeface="Arial"/>
+        <a:font script="Uigh" typeface="Microsoft Uighur"/>
+        <a:font script="Geor" typeface="Sylfaen"/>
+        <a:font script="Armn" typeface="Arial"/>
+        <a:font script="Bugi" typeface="Leelawadee UI"/>
+        <a:font script="Bopo" typeface="Microsoft JhengHei"/>
+        <a:font script="Java" typeface="Javanese Text"/>
+        <a:font script="Lisu" typeface="Segoe UI"/>
+        <a:font script="Mymr" typeface="Myanmar Text"/>
+        <a:font script="Nkoo" typeface="Ebrima"/>
+        <a:font script="Olck" typeface="Nirmala UI"/>
+        <a:font script="Osma" typeface="Ebrima"/>
+        <a:font script="Phag" typeface="Phagspa"/>
+        <a:font script="Syrn" typeface="Estrangelo Edessa"/>
+        <a:font script="Syrj" typeface="Estrangelo Edessa"/>
+        <a:font script="Syre" typeface="Estrangelo Edessa"/>
+        <a:font script="Sora" typeface="Nirmala UI"/>
+        <a:font script="Tale" typeface="Microsoft Tai Le"/>
+        <a:font script="Talu" typeface="Microsoft New Tai Lue"/>
+        <a:font script="Tfng" typeface="Ebrima"/>
+      </a:minorFont>
+    </a:fontScheme>
+    <a:fmtScheme name="Office">
+      <a:fillStyleLst>
+        <a:solidFill>
+          <a:schemeClr val="phClr"/>
+        </a:solidFill>
+        <a:gradFill rotWithShape="1">
+          <a:gsLst>
+            <a:gs pos="0">
+              <a:schemeClr val="phClr">
+                <a:lumMod val="110000"/>
+                <a:satMod val="105000"/>
+                <a:tint val="67000"/>
+              </a:schemeClr>
+            </a:gs>
+            <a:gs pos="50000">
+              <a:schemeClr val="phClr">
+                <a:lumMod val="105000"/>
+                <a:satMod val="103000"/>
+                <a:tint val="73000"/>
+              </a:schemeClr>
+            </a:gs>
+            <a:gs pos="100000">
+              <a:schemeClr val="phClr">
+                <a:lumMod val="105000"/>
+                <a:satMod val="109000"/>
+                <a:tint val="81000"/>
+              </a:schemeClr>
+            </a:gs>
+          </a:gsLst>
+          <a:lin ang="5400000" scaled="0"/>
+        </a:gradFill>
+        <a:gradFill rotWithShape="1">
+          <a:gsLst>
+            <a:gs pos="0">
+              <a:schemeClr val="phClr">
+                <a:satMod val="103000"/>
+                <a:lumMod val="102000"/>
+                <a:tint val="94000"/>
+              </a:schemeClr>
+            </a:gs>
+            <a:gs pos="50000">
+              <a:schemeClr val="phClr">
+                <a:satMod val="110000"/>
+                <a:lumMod val="100000"/>
+                <a:shade val="100000"/>
+              </a:schemeClr>
+            </a:gs>
+            <a:gs pos="100000">
+              <a:schemeClr val="phClr">
+                <a:lumMod val="99000"/>
+                <a:satMod val="120000"/>
+                <a:shade val="78000"/>
+              </a:schemeClr>
+            </a:gs>
+          </a:gsLst>
+          <a:lin ang="5400000" scaled="0"/>
+        </a:gradFill>
+      </a:fillStyleLst>
+      <a:lnStyleLst>
+        <a:ln w="12700" cap="flat" cmpd="sng" algn="ctr">
+          <a:solidFill>
+            <a:schemeClr val="phClr"/>
+          </a:solidFill>
+          <a:prstDash val="solid"/>
+          <a:miter lim="800000"/>
+        </a:ln>
+        <a:ln w="19050" cap="flat" cmpd="sng" algn="ctr">
+          <a:solidFill>
+            <a:schemeClr val="phClr"/>
+          </a:solidFill>
+          <a:prstDash val="solid"/>
+          <a:miter lim="800000"/>
+        </a:ln>
+        <a:ln w="25400" cap="flat" cmpd="sng" algn="ctr">
+          <a:solidFill>
+            <a:schemeClr val="phClr"/>
+          </a:solidFill>
+          <a:prstDash val="solid"/>
+          <a:miter lim="800000"/>
+        </a:ln>
+      </a:lnStyleLst>
+      <a:effectStyleLst>
+        <a:effectStyle>
+          <a:effectLst/>
+        </a:effectStyle>
+        <a:effectStyle>
+          <a:effectLst/>
+        </a:effectStyle>
+        <a:effectStyle>
+          <a:effectLst>
+            <a:outerShdw blurRad="57150" dist="19050" dir="5400000" algn="ctr" rotWithShape="0">
+              <a:srgbClr val="000000">
+                <a:alpha val="63000"/>
+              </a:srgbClr>
+            </a:outerShdw>
+          </a:effectLst>
+        </a:effectStyle>
+      </a:effectStyleLst>
+      <a:bgFillStyleLst>
+        <a:solidFill>
+          <a:schemeClr val="phClr"/>
+        </a:solidFill>
+        <a:solidFill>
+          <a:schemeClr val="phClr">
+            <a:tint val="95000"/>
+            <a:satMod val="170000"/>
+          </a:schemeClr>
+        </a:solidFill>
+        <a:gradFill rotWithShape="1">
+          <a:gsLst>
+            <a:gs pos="0">
+              <a:schemeClr val="phClr">
+                <a:tint val="93000"/>
+                <a:satMod val="150000"/>
+                <a:shade val="98000"/>
+                <a:lumMod val="102000"/>
+              </a:schemeClr>
+            </a:gs>
+            <a:gs pos="50000">
+              <a:schemeClr val="phClr">
+                <a:tint val="98000"/>
+                <a:satMod val="130000"/>
+                <a:shade val="90000"/>
+                <a:lumMod val="103000"/>
+              </a:schemeClr>
+            </a:gs>
+            <a:gs pos="100000">
+              <a:schemeClr val="phClr">
+                <a:shade val="63000"/>
+                <a:satMod val="120000"/>
+              </a:schemeClr>
+            </a:gs>
+          </a:gsLst>
+          <a:lin ang="5400000" scaled="0"/>
+        </a:gradFill>
+      </a:bgFillStyleLst>
+    </a:fmtScheme>
+  </a:themeElements>
+  <a:objectDefaults>
+    <a:lnDef>
+      <a:spPr/>
+      <a:bodyPr/>
+      <a:lstStyle/>
+      <a:style>
+        <a:lnRef idx="2">
+          <a:schemeClr val="accent1"/>
+        </a:lnRef>
+        <a:fillRef idx="0">
+          <a:schemeClr val="accent1"/>
+        </a:fillRef>
+        <a:effectRef idx="1">
+          <a:schemeClr val="accent1"/>
+        </a:effectRef>
+        <a:fontRef idx="minor">
+          <a:schemeClr val="tx1"/>
+        </a:fontRef>
+      </a:style>
+    </a:lnDef>
+  </a:objectDefaults>
+  <a:extraClrSchemeLst/>
+  <a:extLst>
+    <a:ext uri="{05A4C25C-085E-4340-85A3-A5531E510DB2}">
+      <thm15:themeFamily xmlns:thm15="http://schemas.microsoft.com/office/thememl/2012/main" name="Office Theme" id="{2E142A2C-CD16-42D6-873A-C26D2A0506FA}" vid="{1BDDFF52-6CD6-40A5-AB3C-68EB2F1E4D0A}"/>
+    </a:ext>
+  </a:extLst>
+</a:theme>
 </file>